--- a/docs/NL2SQL-메타정보-설계.pptx
+++ b/docs/NL2SQL-메타정보-설계.pptx
@@ -574,7 +574,65 @@
           <a:chExt cx="0" cy="0"/>
         </a:xfrm>
       </p:grpSpPr>
+      <p:sp>
+        <p:nvSpPr>
+          <p:cNvPr id="2" name="슬라이드 이미지 개체 틀 1"/>
+          <p:cNvSpPr>
+            <a:spLocks noGrp="1" noRot="1" noChangeAspect="1"/>
+          </p:cNvSpPr>
+          <p:nvPr>
+            <p:ph type="sldImg"/>
+          </p:nvPr>
+        </p:nvSpPr>
+        <p:spPr>
+          <a:xfrm>
+            <a:off x="-228600" y="1524000"/>
+            <a:ext cx="7315200" cy="4114800"/>
+          </a:xfrm>
+          <a:prstGeom prst="rect">
+            <a:avLst/>
+          </a:prstGeom>
+          <a:noFill/>
+          <a:ln w="12700">
+            <a:solidFill>
+              <a:prstClr val="black"/>
+            </a:solidFill>
+          </a:ln>
+        </p:spPr>
+      </p:sp>
+      <p:sp>
+        <p:nvSpPr>
+          <p:cNvPr id="3" name="슬라이드 노트 개체 틀 2"/>
+          <p:cNvSpPr>
+            <a:spLocks noGrp="1"/>
+          </p:cNvSpPr>
+          <p:nvPr>
+            <p:ph type="body" idx="1"/>
+          </p:nvPr>
+        </p:nvSpPr>
+        <p:spPr>
+          <a:xfrm>
+            <a:off x="685800" y="5867400"/>
+            <a:ext cx="5486400" cy="4800600"/>
+          </a:xfrm>
+          <a:prstGeom prst="rect">
+            <a:avLst/>
+          </a:prstGeom>
+        </p:spPr>
+        <p:txBody>
+          <a:bodyPr/>
+          <a:lstStyle/>
+          <a:p>
+            <a:endParaRPr lang="ko-KR" altLang="en-US" dirty="0"/>
+          </a:p>
+        </p:txBody>
+      </p:sp>
     </p:spTree>
+    <p:extLst>
+      <p:ext uri="{BB962C8B-B14F-4D97-AF65-F5344CB8AC3E}">
+        <p14:creationId xmlns:p14="http://schemas.microsoft.com/office/powerpoint/2010/main" val="3372102726"/>
+      </p:ext>
+    </p:extLst>
   </p:cSld>
   <p:clrMapOvr>
     <a:masterClrMapping/>
@@ -633,6 +691,31 @@
 </file>
 
 <file path=ppt/notesSlides/notesSlide4.xml><?xml version="1.0" encoding="utf-8"?>
+<p:notes xmlns:a="http://schemas.openxmlformats.org/drawingml/2006/main" xmlns:r="http://schemas.openxmlformats.org/officeDocument/2006/relationships" xmlns:p="http://schemas.openxmlformats.org/presentationml/2006/main">
+  <p:cSld>
+    <p:spTree>
+      <p:nvGrpSpPr>
+        <p:cNvPr id="1" name=""/>
+        <p:cNvGrpSpPr/>
+        <p:nvPr/>
+      </p:nvGrpSpPr>
+      <p:grpSpPr>
+        <a:xfrm>
+          <a:off x="0" y="0"/>
+          <a:ext cx="0" cy="0"/>
+          <a:chOff x="0" y="0"/>
+          <a:chExt cx="0" cy="0"/>
+        </a:xfrm>
+      </p:grpSpPr>
+    </p:spTree>
+  </p:cSld>
+  <p:clrMapOvr>
+    <a:masterClrMapping/>
+  </p:clrMapOvr>
+</p:notes>
+</file>
+
+<file path=ppt/notesSlides/notesSlide5.xml><?xml version="1.0" encoding="utf-8"?>
 <p:notes xmlns:a="http://schemas.openxmlformats.org/drawingml/2006/main" xmlns:r="http://schemas.openxmlformats.org/officeDocument/2006/relationships" xmlns:p="http://schemas.openxmlformats.org/presentationml/2006/main">
   <p:cSld>
     <p:spTree>
@@ -1023,7 +1106,7 @@
           </a:prstGeom>
           <a:extLst>
             <a:ext uri="{C572A759-6A51-4108-AA02-DFA0A04FC94B}">
-              <ma14:wrappingTextBoxFlag xmlns:ma14="http://schemas.microsoft.com/office/mac/drawingml/2011/main" xmlns="" val="0"/>
+              <ma14:wrappingTextBoxFlag xmlns="" xmlns:ma14="http://schemas.microsoft.com/office/mac/drawingml/2011/main" val="0"/>
             </a:ext>
           </a:extLst>
         </p:spPr>
@@ -1229,7 +1312,7 @@
           </a:prstGeom>
           <a:extLst>
             <a:ext uri="{C572A759-6A51-4108-AA02-DFA0A04FC94B}">
-              <ma14:wrappingTextBoxFlag xmlns:ma14="http://schemas.microsoft.com/office/mac/drawingml/2011/main" xmlns="" val="0"/>
+              <ma14:wrappingTextBoxFlag xmlns="" xmlns:ma14="http://schemas.microsoft.com/office/mac/drawingml/2011/main" val="0"/>
             </a:ext>
           </a:extLst>
         </p:spPr>
@@ -14894,61 +14977,128 @@
             <a:lstStyle/>
             <a:p>
               <a:r>
-                <a:rPr lang="en-US" altLang="ko-KR" sz="1200" b="1">
+                <a:rPr lang="en-US" altLang="ko-KR" sz="1200" b="1" dirty="0">
                   <a:solidFill>
                     <a:srgbClr val="FFFFFF"/>
                   </a:solidFill>
                   <a:latin typeface="맑은 고딕" panose="020B0503020000020004" pitchFamily="50" charset="-127"/>
                 </a:rPr>
-                <a:t>AST 생성 프롬프트 원문   IF-LLM-002   (컬럼 목록은 발췌)</a:t>
+                <a:t>AST </a:t>
               </a:r>
-              <a:endParaRPr lang="ko-KR" altLang="en-US" sz="1200" b="1">
-                <a:solidFill>
-                  <a:srgbClr val="FFFFFF"/>
-                </a:solidFill>
-                <a:latin typeface="맑은 고딕" panose="020B0503020000020004" pitchFamily="50" charset="-127"/>
-              </a:endParaRPr>
-            </a:p>
-          </p:txBody>
-        </p:sp>
-        <p:sp>
-          <p:nvSpPr>
-            <p:cNvPr id="32" name="원문 닫기 안내 - AST생성">
-              <a:extLst>
-                <a:ext uri="{FF2B5EF4-FFF2-40B4-BE49-F238E27FC236}">
-                  <a16:creationId xmlns:a16="http://schemas.microsoft.com/office/drawing/2014/main" id="{969E78FB-AF54-E4F0-4E2C-D007ADA188CA}"/>
-                </a:ext>
-              </a:extLst>
-            </p:cNvPr>
-            <p:cNvSpPr txBox="1"/>
-            <p:nvPr/>
-          </p:nvSpPr>
-          <p:spPr>
-            <a:xfrm>
-              <a:off x="9664700" y="1117600"/>
-              <a:ext cx="1905000" cy="369332"/>
-            </a:xfrm>
-            <a:prstGeom prst="rect">
-              <a:avLst/>
-            </a:prstGeom>
-            <a:noFill/>
-          </p:spPr>
-          <p:txBody>
-            <a:bodyPr vert="horz" wrap="square" lIns="0" tIns="0" rIns="0" bIns="0" rtlCol="0">
-              <a:noAutofit/>
-            </a:bodyPr>
-            <a:lstStyle/>
-            <a:p>
-              <a:pPr algn="r"/>
               <a:r>
-                <a:rPr lang="ko-KR" altLang="en-US" sz="900">
+                <a:rPr lang="en-US" altLang="ko-KR" sz="1200" b="1" dirty="0" err="1">
                   <a:solidFill>
                     <a:srgbClr val="FFFFFF"/>
                   </a:solidFill>
                   <a:latin typeface="맑은 고딕" panose="020B0503020000020004" pitchFamily="50" charset="-127"/>
                 </a:rPr>
-                <a:t>클릭하면 닫힙니다  ✕</a:t>
+                <a:t>생성</a:t>
               </a:r>
+              <a:r>
+                <a:rPr lang="en-US" altLang="ko-KR" sz="1200" b="1" dirty="0">
+                  <a:solidFill>
+                    <a:srgbClr val="FFFFFF"/>
+                  </a:solidFill>
+                  <a:latin typeface="맑은 고딕" panose="020B0503020000020004" pitchFamily="50" charset="-127"/>
+                </a:rPr>
+                <a:t> </a:t>
+              </a:r>
+              <a:r>
+                <a:rPr lang="en-US" altLang="ko-KR" sz="1200" b="1" dirty="0" err="1">
+                  <a:solidFill>
+                    <a:srgbClr val="FFFFFF"/>
+                  </a:solidFill>
+                  <a:latin typeface="맑은 고딕" panose="020B0503020000020004" pitchFamily="50" charset="-127"/>
+                </a:rPr>
+                <a:t>프롬프트</a:t>
+              </a:r>
+              <a:r>
+                <a:rPr lang="en-US" altLang="ko-KR" sz="1200" b="1" dirty="0">
+                  <a:solidFill>
+                    <a:srgbClr val="FFFFFF"/>
+                  </a:solidFill>
+                  <a:latin typeface="맑은 고딕" panose="020B0503020000020004" pitchFamily="50" charset="-127"/>
+                </a:rPr>
+                <a:t> </a:t>
+              </a:r>
+              <a:r>
+                <a:rPr lang="en-US" altLang="ko-KR" sz="1200" b="1" dirty="0" err="1">
+                  <a:solidFill>
+                    <a:srgbClr val="FFFFFF"/>
+                  </a:solidFill>
+                  <a:latin typeface="맑은 고딕" panose="020B0503020000020004" pitchFamily="50" charset="-127"/>
+                </a:rPr>
+                <a:t>원문</a:t>
+              </a:r>
+              <a:r>
+                <a:rPr lang="en-US" altLang="ko-KR" sz="1200" b="1" dirty="0">
+                  <a:solidFill>
+                    <a:srgbClr val="FFFFFF"/>
+                  </a:solidFill>
+                  <a:latin typeface="맑은 고딕" panose="020B0503020000020004" pitchFamily="50" charset="-127"/>
+                </a:rPr>
+                <a:t>   IF-LLM-002   (</a:t>
+              </a:r>
+              <a:r>
+                <a:rPr lang="en-US" altLang="ko-KR" sz="1200" b="1" dirty="0" err="1">
+                  <a:solidFill>
+                    <a:srgbClr val="FFFFFF"/>
+                  </a:solidFill>
+                  <a:latin typeface="맑은 고딕" panose="020B0503020000020004" pitchFamily="50" charset="-127"/>
+                </a:rPr>
+                <a:t>컬럼</a:t>
+              </a:r>
+              <a:r>
+                <a:rPr lang="en-US" altLang="ko-KR" sz="1200" b="1" dirty="0">
+                  <a:solidFill>
+                    <a:srgbClr val="FFFFFF"/>
+                  </a:solidFill>
+                  <a:latin typeface="맑은 고딕" panose="020B0503020000020004" pitchFamily="50" charset="-127"/>
+                </a:rPr>
+                <a:t> </a:t>
+              </a:r>
+              <a:r>
+                <a:rPr lang="en-US" altLang="ko-KR" sz="1200" b="1" dirty="0" err="1">
+                  <a:solidFill>
+                    <a:srgbClr val="FFFFFF"/>
+                  </a:solidFill>
+                  <a:latin typeface="맑은 고딕" panose="020B0503020000020004" pitchFamily="50" charset="-127"/>
+                </a:rPr>
+                <a:t>목록은</a:t>
+              </a:r>
+              <a:r>
+                <a:rPr lang="en-US" altLang="ko-KR" sz="1200" b="1" dirty="0">
+                  <a:solidFill>
+                    <a:srgbClr val="FFFFFF"/>
+                  </a:solidFill>
+                  <a:latin typeface="맑은 고딕" panose="020B0503020000020004" pitchFamily="50" charset="-127"/>
+                </a:rPr>
+                <a:t> </a:t>
+              </a:r>
+              <a:r>
+                <a:rPr lang="en-US" altLang="ko-KR" sz="1200" b="1" dirty="0" err="1">
+                  <a:solidFill>
+                    <a:srgbClr val="FFFFFF"/>
+                  </a:solidFill>
+                  <a:latin typeface="맑은 고딕" panose="020B0503020000020004" pitchFamily="50" charset="-127"/>
+                </a:rPr>
+                <a:t>발췌</a:t>
+              </a:r>
+              <a:r>
+                <a:rPr lang="en-US" altLang="ko-KR" sz="1200" b="1" dirty="0">
+                  <a:solidFill>
+                    <a:srgbClr val="FFFFFF"/>
+                  </a:solidFill>
+                  <a:latin typeface="맑은 고딕" panose="020B0503020000020004" pitchFamily="50" charset="-127"/>
+                </a:rPr>
+                <a:t>)</a:t>
+              </a:r>
+              <a:endParaRPr lang="ko-KR" altLang="en-US" sz="1200" b="1" dirty="0">
+                <a:solidFill>
+                  <a:srgbClr val="FFFFFF"/>
+                </a:solidFill>
+                <a:latin typeface="맑은 고딕" panose="020B0503020000020004" pitchFamily="50" charset="-127"/>
+              </a:endParaRPr>
             </a:p>
           </p:txBody>
         </p:sp>
@@ -15475,105 +15625,179 @@
             <a:lstStyle/>
             <a:p>
               <a:r>
-                <a:rPr lang="en-US" altLang="ko-KR" sz="750" b="0">
+                <a:rPr lang="en-US" altLang="ko-KR" sz="750" b="0" dirty="0">
                   <a:solidFill>
                     <a:srgbClr val="292929"/>
                   </a:solidFill>
                   <a:latin typeface="맑은 고딕" panose="020B0503020000020004" pitchFamily="50" charset="-127"/>
                 </a:rPr>
-                <a:t>[테이블]</a:t>
+                <a:t>[</a:t>
               </a:r>
-            </a:p>
-            <a:p>
               <a:r>
-                <a:rPr lang="en-US" altLang="ko-KR" sz="750" b="0">
+                <a:rPr lang="en-US" altLang="ko-KR" sz="750" b="0" dirty="0" err="1">
                   <a:solidFill>
                     <a:srgbClr val="292929"/>
                   </a:solidFill>
                   <a:latin typeface="맑은 고딕" panose="020B0503020000020004" pitchFamily="50" charset="-127"/>
                 </a:rPr>
-                <a:t>[bms_log] 차량 로그 수집시간별 데이터가 누적되므로 집계시 유의</a:t>
+                <a:t>테이블</a:t>
               </a:r>
-            </a:p>
-            <a:p>
               <a:r>
-                <a:rPr lang="en-US" altLang="ko-KR" sz="750" b="0">
+                <a:rPr lang="en-US" altLang="ko-KR" sz="750" b="0" dirty="0">
                   <a:solidFill>
                     <a:srgbClr val="292929"/>
                   </a:solidFill>
                   <a:latin typeface="맑은 고딕" panose="020B0503020000020004" pitchFamily="50" charset="-127"/>
                 </a:rPr>
-                <a:t>  - collect_datetime (timestamp without time zone): 수집 일시 [UTC 보정]</a:t>
+                <a:t>]</a:t>
               </a:r>
             </a:p>
             <a:p>
               <a:r>
-                <a:rPr lang="en-US" altLang="ko-KR" sz="750" b="0">
+                <a:rPr lang="en-US" altLang="ko-KR" sz="750" b="0" dirty="0">
                   <a:solidFill>
                     <a:srgbClr val="292929"/>
                   </a:solidFill>
                   <a:latin typeface="맑은 고딕" panose="020B0503020000020004" pitchFamily="50" charset="-127"/>
                 </a:rPr>
-                <a:t>  - vehicle_id (character varying): 차량 시리얼 번호</a:t>
+                <a:t>[</a:t>
               </a:r>
-            </a:p>
-            <a:p>
               <a:r>
-                <a:rPr lang="en-US" altLang="ko-KR" sz="750" b="0">
+                <a:rPr lang="en-US" altLang="ko-KR" sz="750" b="0" dirty="0" err="1">
                   <a:solidFill>
                     <a:srgbClr val="292929"/>
                   </a:solidFill>
                   <a:latin typeface="맑은 고딕" panose="020B0503020000020004" pitchFamily="50" charset="-127"/>
                 </a:rPr>
-                <a:t>  - datatime (character varying): 기록일시</a:t>
+                <a:t>bms_log</a:t>
               </a:r>
-            </a:p>
-            <a:p>
               <a:r>
-                <a:rPr lang="en-US" altLang="ko-KR" sz="750" b="0">
+                <a:rPr lang="en-US" altLang="ko-KR" sz="750" b="0" dirty="0">
                   <a:solidFill>
                     <a:srgbClr val="292929"/>
                   </a:solidFill>
                   <a:latin typeface="맑은 고딕" panose="020B0503020000020004" pitchFamily="50" charset="-127"/>
                 </a:rPr>
-                <a:t>  - timezone (double precision): 시간대</a:t>
+                <a:t>] </a:t>
               </a:r>
-            </a:p>
-            <a:p>
               <a:r>
-                <a:rPr lang="en-US" altLang="ko-KR" sz="750" b="0">
+                <a:rPr lang="en-US" altLang="ko-KR" sz="750" b="0" dirty="0" err="1">
                   <a:solidFill>
                     <a:srgbClr val="292929"/>
                   </a:solidFill>
                   <a:latin typeface="맑은 고딕" panose="020B0503020000020004" pitchFamily="50" charset="-127"/>
                 </a:rPr>
-                <a:t>  - err_code (smallint): 오류 코드 : 0 = 정상(正常), 1 = 2~6 이외 모두(2~6以外全て), 2 = 장애물 감지(障害物検出), 3 = 측위 품질 저하(測位品質低下), 4 = 나침반 모드 오류(コンパスモードエラー), 5 = 적합률 저하(適合率低下), 6 = IMU 상태, 자세각 처리(IMUステータス、姿勢角処理)</a:t>
+                <a:t>차량</a:t>
               </a:r>
-            </a:p>
-            <a:p>
               <a:r>
-                <a:rPr lang="en-US" altLang="ko-KR" sz="750" b="0">
+                <a:rPr lang="en-US" altLang="ko-KR" sz="750" b="0" dirty="0">
                   <a:solidFill>
                     <a:srgbClr val="292929"/>
                   </a:solidFill>
                   <a:latin typeface="맑은 고딕" panose="020B0503020000020004" pitchFamily="50" charset="-127"/>
                 </a:rPr>
-                <a:t>  - eg_time (real): 가동시간</a:t>
+                <a:t> </a:t>
               </a:r>
-            </a:p>
-            <a:p>
               <a:r>
-                <a:rPr lang="en-US" altLang="ko-KR" sz="750" b="0">
+                <a:rPr lang="en-US" altLang="ko-KR" sz="750" b="0" dirty="0" err="1">
                   <a:solidFill>
                     <a:srgbClr val="292929"/>
                   </a:solidFill>
                   <a:latin typeface="맑은 고딕" panose="020B0503020000020004" pitchFamily="50" charset="-127"/>
                 </a:rPr>
-                <a:t>  - … 외 55개 컬럼 (uman_time (real): 무인 가동 시간 포함)</a:t>
+                <a:t>로그</a:t>
               </a:r>
-            </a:p>
-            <a:p>
-              <a:endParaRPr lang="en-US" altLang="ko-KR" sz="750" b="0">
+              <a:r>
+                <a:rPr lang="en-US" altLang="ko-KR" sz="750" b="0" dirty="0">
+                  <a:solidFill>
+                    <a:srgbClr val="292929"/>
+                  </a:solidFill>
+                  <a:latin typeface="맑은 고딕" panose="020B0503020000020004" pitchFamily="50" charset="-127"/>
+                </a:rPr>
+                <a:t> </a:t>
+              </a:r>
+              <a:r>
+                <a:rPr lang="en-US" altLang="ko-KR" sz="750" b="0" dirty="0" err="1">
+                  <a:solidFill>
+                    <a:srgbClr val="292929"/>
+                  </a:solidFill>
+                  <a:latin typeface="맑은 고딕" panose="020B0503020000020004" pitchFamily="50" charset="-127"/>
+                </a:rPr>
+                <a:t>수집시간별</a:t>
+              </a:r>
+              <a:r>
+                <a:rPr lang="en-US" altLang="ko-KR" sz="750" b="0" dirty="0">
+                  <a:solidFill>
+                    <a:srgbClr val="292929"/>
+                  </a:solidFill>
+                  <a:latin typeface="맑은 고딕" panose="020B0503020000020004" pitchFamily="50" charset="-127"/>
+                </a:rPr>
+                <a:t> </a:t>
+              </a:r>
+              <a:r>
+                <a:rPr lang="en-US" altLang="ko-KR" sz="750" b="0" dirty="0" err="1">
+                  <a:solidFill>
+                    <a:srgbClr val="292929"/>
+                  </a:solidFill>
+                  <a:latin typeface="맑은 고딕" panose="020B0503020000020004" pitchFamily="50" charset="-127"/>
+                </a:rPr>
+                <a:t>데이터가</a:t>
+              </a:r>
+              <a:r>
+                <a:rPr lang="en-US" altLang="ko-KR" sz="750" b="0" dirty="0">
+                  <a:solidFill>
+                    <a:srgbClr val="292929"/>
+                  </a:solidFill>
+                  <a:latin typeface="맑은 고딕" panose="020B0503020000020004" pitchFamily="50" charset="-127"/>
+                </a:rPr>
+                <a:t> </a:t>
+              </a:r>
+              <a:r>
+                <a:rPr lang="en-US" altLang="ko-KR" sz="750" b="0" dirty="0" err="1">
+                  <a:solidFill>
+                    <a:srgbClr val="292929"/>
+                  </a:solidFill>
+                  <a:latin typeface="맑은 고딕" panose="020B0503020000020004" pitchFamily="50" charset="-127"/>
+                </a:rPr>
+                <a:t>누적되므로</a:t>
+              </a:r>
+              <a:r>
+                <a:rPr lang="en-US" altLang="ko-KR" sz="750" b="0" dirty="0">
+                  <a:solidFill>
+                    <a:srgbClr val="292929"/>
+                  </a:solidFill>
+                  <a:latin typeface="맑은 고딕" panose="020B0503020000020004" pitchFamily="50" charset="-127"/>
+                </a:rPr>
+                <a:t> </a:t>
+              </a:r>
+              <a:r>
+                <a:rPr lang="en-US" altLang="ko-KR" sz="750" b="0" dirty="0" err="1">
+                  <a:solidFill>
+                    <a:srgbClr val="292929"/>
+                  </a:solidFill>
+                  <a:latin typeface="맑은 고딕" panose="020B0503020000020004" pitchFamily="50" charset="-127"/>
+                </a:rPr>
+                <a:t>집계시</a:t>
+              </a:r>
+              <a:r>
+                <a:rPr lang="en-US" altLang="ko-KR" sz="750" b="0" dirty="0">
+                  <a:solidFill>
+                    <a:srgbClr val="292929"/>
+                  </a:solidFill>
+                  <a:latin typeface="맑은 고딕" panose="020B0503020000020004" pitchFamily="50" charset="-127"/>
+                </a:rPr>
+                <a:t> </a:t>
+              </a:r>
+              <a:r>
+                <a:rPr lang="en-US" altLang="ko-KR" sz="750" b="0" dirty="0" err="1">
+                  <a:solidFill>
+                    <a:srgbClr val="292929"/>
+                  </a:solidFill>
+                  <a:latin typeface="맑은 고딕" panose="020B0503020000020004" pitchFamily="50" charset="-127"/>
+                </a:rPr>
+                <a:t>유의</a:t>
+              </a:r>
+              <a:endParaRPr lang="en-US" altLang="ko-KR" sz="750" b="0" dirty="0">
                 <a:solidFill>
                   <a:srgbClr val="292929"/>
                 </a:solidFill>
@@ -15582,62 +15806,1434 @@
             </a:p>
             <a:p>
               <a:r>
-                <a:rPr lang="en-US" altLang="ko-KR" sz="750" b="0">
+                <a:rPr lang="en-US" altLang="ko-KR" sz="750" b="0" dirty="0">
                   <a:solidFill>
                     <a:srgbClr val="292929"/>
                   </a:solidFill>
                   <a:latin typeface="맑은 고딕" panose="020B0503020000020004" pitchFamily="50" charset="-127"/>
                 </a:rPr>
-                <a:t>[지표] 무인 가동시간 — 차량별 하루 무인 가동시간. uman_time 은 계속 커지는 누적값이라 하루의 MAX - MIN 으로 구한다. 기간 합계는 일별 값을 더한다.</a:t>
+                <a:t>  - </a:t>
               </a:r>
-            </a:p>
-            <a:p>
               <a:r>
-                <a:rPr lang="en-US" altLang="ko-KR" sz="750" b="0">
+                <a:rPr lang="en-US" altLang="ko-KR" sz="750" b="0" dirty="0" err="1">
                   <a:solidFill>
                     <a:srgbClr val="292929"/>
                   </a:solidFill>
                   <a:latin typeface="맑은 고딕" panose="020B0503020000020004" pitchFamily="50" charset="-127"/>
                 </a:rPr>
-                <a:t>등록된 SQL:</a:t>
+                <a:t>collect_datetime</a:t>
               </a:r>
-            </a:p>
-            <a:p>
               <a:r>
-                <a:rPr lang="en-US" altLang="ko-KR" sz="750" b="0">
+                <a:rPr lang="en-US" altLang="ko-KR" sz="750" b="0" dirty="0">
                   <a:solidFill>
                     <a:srgbClr val="292929"/>
                   </a:solidFill>
                   <a:latin typeface="맑은 고딕" panose="020B0503020000020004" pitchFamily="50" charset="-127"/>
                 </a:rPr>
-                <a:t>select date(collect_datetime + interval '9 hours') as day, vehicle_id, max(uman_time) - min(uman_time) as uman_hours</a:t>
+                <a:t> (timestamp without time zone): </a:t>
               </a:r>
-            </a:p>
-            <a:p>
               <a:r>
-                <a:rPr lang="en-US" altLang="ko-KR" sz="750" b="0">
+                <a:rPr lang="en-US" altLang="ko-KR" sz="750" b="0" dirty="0" err="1">
                   <a:solidFill>
                     <a:srgbClr val="292929"/>
                   </a:solidFill>
                   <a:latin typeface="맑은 고딕" panose="020B0503020000020004" pitchFamily="50" charset="-127"/>
                 </a:rPr>
-                <a:t>  from bms_log</a:t>
+                <a:t>수집</a:t>
               </a:r>
-            </a:p>
-            <a:p>
               <a:r>
-                <a:rPr lang="en-US" altLang="ko-KR" sz="750" b="0">
+                <a:rPr lang="en-US" altLang="ko-KR" sz="750" b="0" dirty="0">
                   <a:solidFill>
                     <a:srgbClr val="292929"/>
                   </a:solidFill>
                   <a:latin typeface="맑은 고딕" panose="020B0503020000020004" pitchFamily="50" charset="-127"/>
                 </a:rPr>
-                <a:t> where collect_datetime &gt;= timestamp '2026-10-01 00:00:00' - interval '9 hours'</a:t>
+                <a:t> </a:t>
+              </a:r>
+              <a:r>
+                <a:rPr lang="en-US" altLang="ko-KR" sz="750" b="0" dirty="0" err="1">
+                  <a:solidFill>
+                    <a:srgbClr val="292929"/>
+                  </a:solidFill>
+                  <a:latin typeface="맑은 고딕" panose="020B0503020000020004" pitchFamily="50" charset="-127"/>
+                </a:rPr>
+                <a:t>일시</a:t>
+              </a:r>
+              <a:r>
+                <a:rPr lang="en-US" altLang="ko-KR" sz="750" b="0" dirty="0">
+                  <a:solidFill>
+                    <a:srgbClr val="292929"/>
+                  </a:solidFill>
+                  <a:latin typeface="맑은 고딕" panose="020B0503020000020004" pitchFamily="50" charset="-127"/>
+                </a:rPr>
+                <a:t> [UTC </a:t>
+              </a:r>
+              <a:r>
+                <a:rPr lang="en-US" altLang="ko-KR" sz="750" b="0" dirty="0" err="1">
+                  <a:solidFill>
+                    <a:srgbClr val="292929"/>
+                  </a:solidFill>
+                  <a:latin typeface="맑은 고딕" panose="020B0503020000020004" pitchFamily="50" charset="-127"/>
+                </a:rPr>
+                <a:t>보정</a:t>
+              </a:r>
+              <a:r>
+                <a:rPr lang="en-US" altLang="ko-KR" sz="750" b="0" dirty="0">
+                  <a:solidFill>
+                    <a:srgbClr val="292929"/>
+                  </a:solidFill>
+                  <a:latin typeface="맑은 고딕" panose="020B0503020000020004" pitchFamily="50" charset="-127"/>
+                </a:rPr>
+                <a:t>]</a:t>
               </a:r>
             </a:p>
             <a:p>
               <a:r>
-                <a:rPr lang="en-US" altLang="ko-KR" sz="750" b="0">
+                <a:rPr lang="en-US" altLang="ko-KR" sz="750" b="0" dirty="0">
+                  <a:solidFill>
+                    <a:srgbClr val="292929"/>
+                  </a:solidFill>
+                  <a:latin typeface="맑은 고딕" panose="020B0503020000020004" pitchFamily="50" charset="-127"/>
+                </a:rPr>
+                <a:t>  - </a:t>
+              </a:r>
+              <a:r>
+                <a:rPr lang="en-US" altLang="ko-KR" sz="750" b="0" dirty="0" err="1">
+                  <a:solidFill>
+                    <a:srgbClr val="292929"/>
+                  </a:solidFill>
+                  <a:latin typeface="맑은 고딕" panose="020B0503020000020004" pitchFamily="50" charset="-127"/>
+                </a:rPr>
+                <a:t>vehicle_id</a:t>
+              </a:r>
+              <a:r>
+                <a:rPr lang="en-US" altLang="ko-KR" sz="750" b="0" dirty="0">
+                  <a:solidFill>
+                    <a:srgbClr val="292929"/>
+                  </a:solidFill>
+                  <a:latin typeface="맑은 고딕" panose="020B0503020000020004" pitchFamily="50" charset="-127"/>
+                </a:rPr>
+                <a:t> (character varying): </a:t>
+              </a:r>
+              <a:r>
+                <a:rPr lang="en-US" altLang="ko-KR" sz="750" b="0" dirty="0" err="1">
+                  <a:solidFill>
+                    <a:srgbClr val="292929"/>
+                  </a:solidFill>
+                  <a:latin typeface="맑은 고딕" panose="020B0503020000020004" pitchFamily="50" charset="-127"/>
+                </a:rPr>
+                <a:t>차량</a:t>
+              </a:r>
+              <a:r>
+                <a:rPr lang="en-US" altLang="ko-KR" sz="750" b="0" dirty="0">
+                  <a:solidFill>
+                    <a:srgbClr val="292929"/>
+                  </a:solidFill>
+                  <a:latin typeface="맑은 고딕" panose="020B0503020000020004" pitchFamily="50" charset="-127"/>
+                </a:rPr>
+                <a:t> </a:t>
+              </a:r>
+              <a:r>
+                <a:rPr lang="en-US" altLang="ko-KR" sz="750" b="0" dirty="0" err="1">
+                  <a:solidFill>
+                    <a:srgbClr val="292929"/>
+                  </a:solidFill>
+                  <a:latin typeface="맑은 고딕" panose="020B0503020000020004" pitchFamily="50" charset="-127"/>
+                </a:rPr>
+                <a:t>시리얼</a:t>
+              </a:r>
+              <a:r>
+                <a:rPr lang="en-US" altLang="ko-KR" sz="750" b="0" dirty="0">
+                  <a:solidFill>
+                    <a:srgbClr val="292929"/>
+                  </a:solidFill>
+                  <a:latin typeface="맑은 고딕" panose="020B0503020000020004" pitchFamily="50" charset="-127"/>
+                </a:rPr>
+                <a:t> </a:t>
+              </a:r>
+              <a:r>
+                <a:rPr lang="en-US" altLang="ko-KR" sz="750" b="0" dirty="0" err="1">
+                  <a:solidFill>
+                    <a:srgbClr val="292929"/>
+                  </a:solidFill>
+                  <a:latin typeface="맑은 고딕" panose="020B0503020000020004" pitchFamily="50" charset="-127"/>
+                </a:rPr>
+                <a:t>번호</a:t>
+              </a:r>
+              <a:endParaRPr lang="en-US" altLang="ko-KR" sz="750" b="0" dirty="0">
+                <a:solidFill>
+                  <a:srgbClr val="292929"/>
+                </a:solidFill>
+                <a:latin typeface="맑은 고딕" panose="020B0503020000020004" pitchFamily="50" charset="-127"/>
+              </a:endParaRPr>
+            </a:p>
+            <a:p>
+              <a:r>
+                <a:rPr lang="en-US" altLang="ko-KR" sz="750" b="0" dirty="0">
+                  <a:solidFill>
+                    <a:srgbClr val="292929"/>
+                  </a:solidFill>
+                  <a:latin typeface="맑은 고딕" panose="020B0503020000020004" pitchFamily="50" charset="-127"/>
+                </a:rPr>
+                <a:t>  - </a:t>
+              </a:r>
+              <a:r>
+                <a:rPr lang="en-US" altLang="ko-KR" sz="750" b="0" dirty="0" err="1">
+                  <a:solidFill>
+                    <a:srgbClr val="292929"/>
+                  </a:solidFill>
+                  <a:latin typeface="맑은 고딕" panose="020B0503020000020004" pitchFamily="50" charset="-127"/>
+                </a:rPr>
+                <a:t>datatime</a:t>
+              </a:r>
+              <a:r>
+                <a:rPr lang="en-US" altLang="ko-KR" sz="750" b="0" dirty="0">
+                  <a:solidFill>
+                    <a:srgbClr val="292929"/>
+                  </a:solidFill>
+                  <a:latin typeface="맑은 고딕" panose="020B0503020000020004" pitchFamily="50" charset="-127"/>
+                </a:rPr>
+                <a:t> (character varying): </a:t>
+              </a:r>
+              <a:r>
+                <a:rPr lang="en-US" altLang="ko-KR" sz="750" b="0" dirty="0" err="1">
+                  <a:solidFill>
+                    <a:srgbClr val="292929"/>
+                  </a:solidFill>
+                  <a:latin typeface="맑은 고딕" panose="020B0503020000020004" pitchFamily="50" charset="-127"/>
+                </a:rPr>
+                <a:t>기록일시</a:t>
+              </a:r>
+              <a:endParaRPr lang="en-US" altLang="ko-KR" sz="750" b="0" dirty="0">
+                <a:solidFill>
+                  <a:srgbClr val="292929"/>
+                </a:solidFill>
+                <a:latin typeface="맑은 고딕" panose="020B0503020000020004" pitchFamily="50" charset="-127"/>
+              </a:endParaRPr>
+            </a:p>
+            <a:p>
+              <a:r>
+                <a:rPr lang="en-US" altLang="ko-KR" sz="750" b="0" dirty="0">
+                  <a:solidFill>
+                    <a:srgbClr val="292929"/>
+                  </a:solidFill>
+                  <a:latin typeface="맑은 고딕" panose="020B0503020000020004" pitchFamily="50" charset="-127"/>
+                </a:rPr>
+                <a:t>  - </a:t>
+              </a:r>
+              <a:r>
+                <a:rPr lang="en-US" altLang="ko-KR" sz="750" b="0" dirty="0" err="1">
+                  <a:solidFill>
+                    <a:srgbClr val="292929"/>
+                  </a:solidFill>
+                  <a:latin typeface="맑은 고딕" panose="020B0503020000020004" pitchFamily="50" charset="-127"/>
+                </a:rPr>
+                <a:t>timezone</a:t>
+              </a:r>
+              <a:r>
+                <a:rPr lang="en-US" altLang="ko-KR" sz="750" b="0" dirty="0">
+                  <a:solidFill>
+                    <a:srgbClr val="292929"/>
+                  </a:solidFill>
+                  <a:latin typeface="맑은 고딕" panose="020B0503020000020004" pitchFamily="50" charset="-127"/>
+                </a:rPr>
+                <a:t> (double precision): </a:t>
+              </a:r>
+              <a:r>
+                <a:rPr lang="en-US" altLang="ko-KR" sz="750" b="0" dirty="0" err="1">
+                  <a:solidFill>
+                    <a:srgbClr val="292929"/>
+                  </a:solidFill>
+                  <a:latin typeface="맑은 고딕" panose="020B0503020000020004" pitchFamily="50" charset="-127"/>
+                </a:rPr>
+                <a:t>시간대</a:t>
+              </a:r>
+              <a:endParaRPr lang="en-US" altLang="ko-KR" sz="750" b="0" dirty="0">
+                <a:solidFill>
+                  <a:srgbClr val="292929"/>
+                </a:solidFill>
+                <a:latin typeface="맑은 고딕" panose="020B0503020000020004" pitchFamily="50" charset="-127"/>
+              </a:endParaRPr>
+            </a:p>
+            <a:p>
+              <a:r>
+                <a:rPr lang="en-US" altLang="ko-KR" sz="750" b="0" dirty="0">
+                  <a:solidFill>
+                    <a:srgbClr val="292929"/>
+                  </a:solidFill>
+                  <a:latin typeface="맑은 고딕" panose="020B0503020000020004" pitchFamily="50" charset="-127"/>
+                </a:rPr>
+                <a:t>  - </a:t>
+              </a:r>
+              <a:r>
+                <a:rPr lang="en-US" altLang="ko-KR" sz="750" b="0" dirty="0" err="1">
+                  <a:solidFill>
+                    <a:srgbClr val="292929"/>
+                  </a:solidFill>
+                  <a:latin typeface="맑은 고딕" panose="020B0503020000020004" pitchFamily="50" charset="-127"/>
+                </a:rPr>
+                <a:t>err_code</a:t>
+              </a:r>
+              <a:r>
+                <a:rPr lang="en-US" altLang="ko-KR" sz="750" b="0" dirty="0">
+                  <a:solidFill>
+                    <a:srgbClr val="292929"/>
+                  </a:solidFill>
+                  <a:latin typeface="맑은 고딕" panose="020B0503020000020004" pitchFamily="50" charset="-127"/>
+                </a:rPr>
+                <a:t> (</a:t>
+              </a:r>
+              <a:r>
+                <a:rPr lang="en-US" altLang="ko-KR" sz="750" b="0" dirty="0" err="1">
+                  <a:solidFill>
+                    <a:srgbClr val="292929"/>
+                  </a:solidFill>
+                  <a:latin typeface="맑은 고딕" panose="020B0503020000020004" pitchFamily="50" charset="-127"/>
+                </a:rPr>
+                <a:t>smallint</a:t>
+              </a:r>
+              <a:r>
+                <a:rPr lang="en-US" altLang="ko-KR" sz="750" b="0" dirty="0">
+                  <a:solidFill>
+                    <a:srgbClr val="292929"/>
+                  </a:solidFill>
+                  <a:latin typeface="맑은 고딕" panose="020B0503020000020004" pitchFamily="50" charset="-127"/>
+                </a:rPr>
+                <a:t>): </a:t>
+              </a:r>
+              <a:r>
+                <a:rPr lang="en-US" altLang="ko-KR" sz="750" b="0" dirty="0" err="1">
+                  <a:solidFill>
+                    <a:srgbClr val="292929"/>
+                  </a:solidFill>
+                  <a:latin typeface="맑은 고딕" panose="020B0503020000020004" pitchFamily="50" charset="-127"/>
+                </a:rPr>
+                <a:t>오류</a:t>
+              </a:r>
+              <a:r>
+                <a:rPr lang="en-US" altLang="ko-KR" sz="750" b="0" dirty="0">
+                  <a:solidFill>
+                    <a:srgbClr val="292929"/>
+                  </a:solidFill>
+                  <a:latin typeface="맑은 고딕" panose="020B0503020000020004" pitchFamily="50" charset="-127"/>
+                </a:rPr>
+                <a:t> </a:t>
+              </a:r>
+              <a:r>
+                <a:rPr lang="en-US" altLang="ko-KR" sz="750" b="0" dirty="0" err="1">
+                  <a:solidFill>
+                    <a:srgbClr val="292929"/>
+                  </a:solidFill>
+                  <a:latin typeface="맑은 고딕" panose="020B0503020000020004" pitchFamily="50" charset="-127"/>
+                </a:rPr>
+                <a:t>코드</a:t>
+              </a:r>
+              <a:r>
+                <a:rPr lang="en-US" altLang="ko-KR" sz="750" b="0" dirty="0">
+                  <a:solidFill>
+                    <a:srgbClr val="292929"/>
+                  </a:solidFill>
+                  <a:latin typeface="맑은 고딕" panose="020B0503020000020004" pitchFamily="50" charset="-127"/>
+                </a:rPr>
+                <a:t> : 0 = </a:t>
+              </a:r>
+              <a:r>
+                <a:rPr lang="en-US" altLang="ko-KR" sz="750" b="0" dirty="0" err="1">
+                  <a:solidFill>
+                    <a:srgbClr val="292929"/>
+                  </a:solidFill>
+                  <a:latin typeface="맑은 고딕" panose="020B0503020000020004" pitchFamily="50" charset="-127"/>
+                </a:rPr>
+                <a:t>정상</a:t>
+              </a:r>
+              <a:r>
+                <a:rPr lang="en-US" altLang="ko-KR" sz="750" b="0" dirty="0">
+                  <a:solidFill>
+                    <a:srgbClr val="292929"/>
+                  </a:solidFill>
+                  <a:latin typeface="맑은 고딕" panose="020B0503020000020004" pitchFamily="50" charset="-127"/>
+                </a:rPr>
+                <a:t>(</a:t>
+              </a:r>
+              <a:r>
+                <a:rPr lang="en-US" altLang="ko-KR" sz="750" b="0" dirty="0" err="1">
+                  <a:solidFill>
+                    <a:srgbClr val="292929"/>
+                  </a:solidFill>
+                  <a:latin typeface="맑은 고딕" panose="020B0503020000020004" pitchFamily="50" charset="-127"/>
+                </a:rPr>
+                <a:t>正常</a:t>
+              </a:r>
+              <a:r>
+                <a:rPr lang="en-US" altLang="ko-KR" sz="750" b="0" dirty="0">
+                  <a:solidFill>
+                    <a:srgbClr val="292929"/>
+                  </a:solidFill>
+                  <a:latin typeface="맑은 고딕" panose="020B0503020000020004" pitchFamily="50" charset="-127"/>
+                </a:rPr>
+                <a:t>), 1 = 2~6 </a:t>
+              </a:r>
+              <a:r>
+                <a:rPr lang="en-US" altLang="ko-KR" sz="750" b="0" dirty="0" err="1">
+                  <a:solidFill>
+                    <a:srgbClr val="292929"/>
+                  </a:solidFill>
+                  <a:latin typeface="맑은 고딕" panose="020B0503020000020004" pitchFamily="50" charset="-127"/>
+                </a:rPr>
+                <a:t>이외</a:t>
+              </a:r>
+              <a:r>
+                <a:rPr lang="en-US" altLang="ko-KR" sz="750" b="0" dirty="0">
+                  <a:solidFill>
+                    <a:srgbClr val="292929"/>
+                  </a:solidFill>
+                  <a:latin typeface="맑은 고딕" panose="020B0503020000020004" pitchFamily="50" charset="-127"/>
+                </a:rPr>
+                <a:t> </a:t>
+              </a:r>
+              <a:r>
+                <a:rPr lang="en-US" altLang="ko-KR" sz="750" b="0" dirty="0" err="1">
+                  <a:solidFill>
+                    <a:srgbClr val="292929"/>
+                  </a:solidFill>
+                  <a:latin typeface="맑은 고딕" panose="020B0503020000020004" pitchFamily="50" charset="-127"/>
+                </a:rPr>
+                <a:t>모두</a:t>
+              </a:r>
+              <a:r>
+                <a:rPr lang="en-US" altLang="ko-KR" sz="750" b="0" dirty="0">
+                  <a:solidFill>
+                    <a:srgbClr val="292929"/>
+                  </a:solidFill>
+                  <a:latin typeface="맑은 고딕" panose="020B0503020000020004" pitchFamily="50" charset="-127"/>
+                </a:rPr>
+                <a:t>(2~6以外全て), 2 = </a:t>
+              </a:r>
+              <a:r>
+                <a:rPr lang="en-US" altLang="ko-KR" sz="750" b="0" dirty="0" err="1">
+                  <a:solidFill>
+                    <a:srgbClr val="292929"/>
+                  </a:solidFill>
+                  <a:latin typeface="맑은 고딕" panose="020B0503020000020004" pitchFamily="50" charset="-127"/>
+                </a:rPr>
+                <a:t>장애물</a:t>
+              </a:r>
+              <a:r>
+                <a:rPr lang="en-US" altLang="ko-KR" sz="750" b="0" dirty="0">
+                  <a:solidFill>
+                    <a:srgbClr val="292929"/>
+                  </a:solidFill>
+                  <a:latin typeface="맑은 고딕" panose="020B0503020000020004" pitchFamily="50" charset="-127"/>
+                </a:rPr>
+                <a:t> </a:t>
+              </a:r>
+              <a:r>
+                <a:rPr lang="en-US" altLang="ko-KR" sz="750" b="0" dirty="0" err="1">
+                  <a:solidFill>
+                    <a:srgbClr val="292929"/>
+                  </a:solidFill>
+                  <a:latin typeface="맑은 고딕" panose="020B0503020000020004" pitchFamily="50" charset="-127"/>
+                </a:rPr>
+                <a:t>감지</a:t>
+              </a:r>
+              <a:r>
+                <a:rPr lang="en-US" altLang="ko-KR" sz="750" b="0" dirty="0">
+                  <a:solidFill>
+                    <a:srgbClr val="292929"/>
+                  </a:solidFill>
+                  <a:latin typeface="맑은 고딕" panose="020B0503020000020004" pitchFamily="50" charset="-127"/>
+                </a:rPr>
+                <a:t>(</a:t>
+              </a:r>
+              <a:r>
+                <a:rPr lang="en-US" altLang="ko-KR" sz="750" b="0" dirty="0" err="1">
+                  <a:solidFill>
+                    <a:srgbClr val="292929"/>
+                  </a:solidFill>
+                  <a:latin typeface="맑은 고딕" panose="020B0503020000020004" pitchFamily="50" charset="-127"/>
+                </a:rPr>
+                <a:t>障害物検出</a:t>
+              </a:r>
+              <a:r>
+                <a:rPr lang="en-US" altLang="ko-KR" sz="750" b="0" dirty="0">
+                  <a:solidFill>
+                    <a:srgbClr val="292929"/>
+                  </a:solidFill>
+                  <a:latin typeface="맑은 고딕" panose="020B0503020000020004" pitchFamily="50" charset="-127"/>
+                </a:rPr>
+                <a:t>), 3 = </a:t>
+              </a:r>
+              <a:r>
+                <a:rPr lang="en-US" altLang="ko-KR" sz="750" b="0" dirty="0" err="1">
+                  <a:solidFill>
+                    <a:srgbClr val="292929"/>
+                  </a:solidFill>
+                  <a:latin typeface="맑은 고딕" panose="020B0503020000020004" pitchFamily="50" charset="-127"/>
+                </a:rPr>
+                <a:t>측위</a:t>
+              </a:r>
+              <a:r>
+                <a:rPr lang="en-US" altLang="ko-KR" sz="750" b="0" dirty="0">
+                  <a:solidFill>
+                    <a:srgbClr val="292929"/>
+                  </a:solidFill>
+                  <a:latin typeface="맑은 고딕" panose="020B0503020000020004" pitchFamily="50" charset="-127"/>
+                </a:rPr>
+                <a:t> </a:t>
+              </a:r>
+              <a:r>
+                <a:rPr lang="en-US" altLang="ko-KR" sz="750" b="0" dirty="0" err="1">
+                  <a:solidFill>
+                    <a:srgbClr val="292929"/>
+                  </a:solidFill>
+                  <a:latin typeface="맑은 고딕" panose="020B0503020000020004" pitchFamily="50" charset="-127"/>
+                </a:rPr>
+                <a:t>품질</a:t>
+              </a:r>
+              <a:r>
+                <a:rPr lang="en-US" altLang="ko-KR" sz="750" b="0" dirty="0">
+                  <a:solidFill>
+                    <a:srgbClr val="292929"/>
+                  </a:solidFill>
+                  <a:latin typeface="맑은 고딕" panose="020B0503020000020004" pitchFamily="50" charset="-127"/>
+                </a:rPr>
+                <a:t> </a:t>
+              </a:r>
+              <a:r>
+                <a:rPr lang="en-US" altLang="ko-KR" sz="750" b="0" dirty="0" err="1">
+                  <a:solidFill>
+                    <a:srgbClr val="292929"/>
+                  </a:solidFill>
+                  <a:latin typeface="맑은 고딕" panose="020B0503020000020004" pitchFamily="50" charset="-127"/>
+                </a:rPr>
+                <a:t>저하</a:t>
+              </a:r>
+              <a:r>
+                <a:rPr lang="en-US" altLang="ko-KR" sz="750" b="0" dirty="0">
+                  <a:solidFill>
+                    <a:srgbClr val="292929"/>
+                  </a:solidFill>
+                  <a:latin typeface="맑은 고딕" panose="020B0503020000020004" pitchFamily="50" charset="-127"/>
+                </a:rPr>
+                <a:t>(</a:t>
+              </a:r>
+              <a:r>
+                <a:rPr lang="en-US" altLang="ko-KR" sz="750" b="0" dirty="0" err="1">
+                  <a:solidFill>
+                    <a:srgbClr val="292929"/>
+                  </a:solidFill>
+                  <a:latin typeface="맑은 고딕" panose="020B0503020000020004" pitchFamily="50" charset="-127"/>
+                </a:rPr>
+                <a:t>測位品質低下</a:t>
+              </a:r>
+              <a:r>
+                <a:rPr lang="en-US" altLang="ko-KR" sz="750" b="0" dirty="0">
+                  <a:solidFill>
+                    <a:srgbClr val="292929"/>
+                  </a:solidFill>
+                  <a:latin typeface="맑은 고딕" panose="020B0503020000020004" pitchFamily="50" charset="-127"/>
+                </a:rPr>
+                <a:t>), 4 = </a:t>
+              </a:r>
+              <a:r>
+                <a:rPr lang="en-US" altLang="ko-KR" sz="750" b="0" dirty="0" err="1">
+                  <a:solidFill>
+                    <a:srgbClr val="292929"/>
+                  </a:solidFill>
+                  <a:latin typeface="맑은 고딕" panose="020B0503020000020004" pitchFamily="50" charset="-127"/>
+                </a:rPr>
+                <a:t>나침반</a:t>
+              </a:r>
+              <a:r>
+                <a:rPr lang="en-US" altLang="ko-KR" sz="750" b="0" dirty="0">
+                  <a:solidFill>
+                    <a:srgbClr val="292929"/>
+                  </a:solidFill>
+                  <a:latin typeface="맑은 고딕" panose="020B0503020000020004" pitchFamily="50" charset="-127"/>
+                </a:rPr>
+                <a:t> </a:t>
+              </a:r>
+              <a:r>
+                <a:rPr lang="en-US" altLang="ko-KR" sz="750" b="0" dirty="0" err="1">
+                  <a:solidFill>
+                    <a:srgbClr val="292929"/>
+                  </a:solidFill>
+                  <a:latin typeface="맑은 고딕" panose="020B0503020000020004" pitchFamily="50" charset="-127"/>
+                </a:rPr>
+                <a:t>모드</a:t>
+              </a:r>
+              <a:r>
+                <a:rPr lang="en-US" altLang="ko-KR" sz="750" b="0" dirty="0">
+                  <a:solidFill>
+                    <a:srgbClr val="292929"/>
+                  </a:solidFill>
+                  <a:latin typeface="맑은 고딕" panose="020B0503020000020004" pitchFamily="50" charset="-127"/>
+                </a:rPr>
+                <a:t> </a:t>
+              </a:r>
+              <a:r>
+                <a:rPr lang="en-US" altLang="ko-KR" sz="750" b="0" dirty="0" err="1">
+                  <a:solidFill>
+                    <a:srgbClr val="292929"/>
+                  </a:solidFill>
+                  <a:latin typeface="맑은 고딕" panose="020B0503020000020004" pitchFamily="50" charset="-127"/>
+                </a:rPr>
+                <a:t>오류</a:t>
+              </a:r>
+              <a:r>
+                <a:rPr lang="en-US" altLang="ko-KR" sz="750" b="0" dirty="0">
+                  <a:solidFill>
+                    <a:srgbClr val="292929"/>
+                  </a:solidFill>
+                  <a:latin typeface="맑은 고딕" panose="020B0503020000020004" pitchFamily="50" charset="-127"/>
+                </a:rPr>
+                <a:t>(</a:t>
+              </a:r>
+              <a:r>
+                <a:rPr lang="en-US" altLang="ko-KR" sz="750" b="0" dirty="0" err="1">
+                  <a:solidFill>
+                    <a:srgbClr val="292929"/>
+                  </a:solidFill>
+                  <a:latin typeface="맑은 고딕" panose="020B0503020000020004" pitchFamily="50" charset="-127"/>
+                </a:rPr>
+                <a:t>コンパスモードエラ</a:t>
+              </a:r>
+              <a:r>
+                <a:rPr lang="en-US" altLang="ko-KR" sz="750" b="0" dirty="0">
+                  <a:solidFill>
+                    <a:srgbClr val="292929"/>
+                  </a:solidFill>
+                  <a:latin typeface="맑은 고딕" panose="020B0503020000020004" pitchFamily="50" charset="-127"/>
+                </a:rPr>
+                <a:t>ー), 5 = </a:t>
+              </a:r>
+              <a:r>
+                <a:rPr lang="en-US" altLang="ko-KR" sz="750" b="0" dirty="0" err="1">
+                  <a:solidFill>
+                    <a:srgbClr val="292929"/>
+                  </a:solidFill>
+                  <a:latin typeface="맑은 고딕" panose="020B0503020000020004" pitchFamily="50" charset="-127"/>
+                </a:rPr>
+                <a:t>적합률</a:t>
+              </a:r>
+              <a:r>
+                <a:rPr lang="en-US" altLang="ko-KR" sz="750" b="0" dirty="0">
+                  <a:solidFill>
+                    <a:srgbClr val="292929"/>
+                  </a:solidFill>
+                  <a:latin typeface="맑은 고딕" panose="020B0503020000020004" pitchFamily="50" charset="-127"/>
+                </a:rPr>
+                <a:t> </a:t>
+              </a:r>
+              <a:r>
+                <a:rPr lang="en-US" altLang="ko-KR" sz="750" b="0" dirty="0" err="1">
+                  <a:solidFill>
+                    <a:srgbClr val="292929"/>
+                  </a:solidFill>
+                  <a:latin typeface="맑은 고딕" panose="020B0503020000020004" pitchFamily="50" charset="-127"/>
+                </a:rPr>
+                <a:t>저하</a:t>
+              </a:r>
+              <a:r>
+                <a:rPr lang="en-US" altLang="ko-KR" sz="750" b="0" dirty="0">
+                  <a:solidFill>
+                    <a:srgbClr val="292929"/>
+                  </a:solidFill>
+                  <a:latin typeface="맑은 고딕" panose="020B0503020000020004" pitchFamily="50" charset="-127"/>
+                </a:rPr>
+                <a:t>(</a:t>
+              </a:r>
+              <a:r>
+                <a:rPr lang="en-US" altLang="ko-KR" sz="750" b="0" dirty="0" err="1">
+                  <a:solidFill>
+                    <a:srgbClr val="292929"/>
+                  </a:solidFill>
+                  <a:latin typeface="맑은 고딕" panose="020B0503020000020004" pitchFamily="50" charset="-127"/>
+                </a:rPr>
+                <a:t>適合率低下</a:t>
+              </a:r>
+              <a:r>
+                <a:rPr lang="en-US" altLang="ko-KR" sz="750" b="0" dirty="0">
+                  <a:solidFill>
+                    <a:srgbClr val="292929"/>
+                  </a:solidFill>
+                  <a:latin typeface="맑은 고딕" panose="020B0503020000020004" pitchFamily="50" charset="-127"/>
+                </a:rPr>
+                <a:t>), 6 = IMU </a:t>
+              </a:r>
+              <a:r>
+                <a:rPr lang="en-US" altLang="ko-KR" sz="750" b="0" dirty="0" err="1">
+                  <a:solidFill>
+                    <a:srgbClr val="292929"/>
+                  </a:solidFill>
+                  <a:latin typeface="맑은 고딕" panose="020B0503020000020004" pitchFamily="50" charset="-127"/>
+                </a:rPr>
+                <a:t>상태</a:t>
+              </a:r>
+              <a:r>
+                <a:rPr lang="en-US" altLang="ko-KR" sz="750" b="0" dirty="0">
+                  <a:solidFill>
+                    <a:srgbClr val="292929"/>
+                  </a:solidFill>
+                  <a:latin typeface="맑은 고딕" panose="020B0503020000020004" pitchFamily="50" charset="-127"/>
+                </a:rPr>
+                <a:t>, </a:t>
+              </a:r>
+              <a:r>
+                <a:rPr lang="en-US" altLang="ko-KR" sz="750" b="0" dirty="0" err="1">
+                  <a:solidFill>
+                    <a:srgbClr val="292929"/>
+                  </a:solidFill>
+                  <a:latin typeface="맑은 고딕" panose="020B0503020000020004" pitchFamily="50" charset="-127"/>
+                </a:rPr>
+                <a:t>자세각</a:t>
+              </a:r>
+              <a:r>
+                <a:rPr lang="en-US" altLang="ko-KR" sz="750" b="0" dirty="0">
+                  <a:solidFill>
+                    <a:srgbClr val="292929"/>
+                  </a:solidFill>
+                  <a:latin typeface="맑은 고딕" panose="020B0503020000020004" pitchFamily="50" charset="-127"/>
+                </a:rPr>
+                <a:t> </a:t>
+              </a:r>
+              <a:r>
+                <a:rPr lang="en-US" altLang="ko-KR" sz="750" b="0" dirty="0" err="1">
+                  <a:solidFill>
+                    <a:srgbClr val="292929"/>
+                  </a:solidFill>
+                  <a:latin typeface="맑은 고딕" panose="020B0503020000020004" pitchFamily="50" charset="-127"/>
+                </a:rPr>
+                <a:t>처리</a:t>
+              </a:r>
+              <a:r>
+                <a:rPr lang="en-US" altLang="ko-KR" sz="750" b="0" dirty="0">
+                  <a:solidFill>
+                    <a:srgbClr val="292929"/>
+                  </a:solidFill>
+                  <a:latin typeface="맑은 고딕" panose="020B0503020000020004" pitchFamily="50" charset="-127"/>
+                </a:rPr>
+                <a:t>(</a:t>
+              </a:r>
+              <a:r>
+                <a:rPr lang="en-US" altLang="ko-KR" sz="750" b="0" dirty="0" err="1">
+                  <a:solidFill>
+                    <a:srgbClr val="292929"/>
+                  </a:solidFill>
+                  <a:latin typeface="맑은 고딕" panose="020B0503020000020004" pitchFamily="50" charset="-127"/>
+                </a:rPr>
+                <a:t>IMUステータス、姿勢角処理</a:t>
+              </a:r>
+              <a:r>
+                <a:rPr lang="en-US" altLang="ko-KR" sz="750" b="0" dirty="0">
+                  <a:solidFill>
+                    <a:srgbClr val="292929"/>
+                  </a:solidFill>
+                  <a:latin typeface="맑은 고딕" panose="020B0503020000020004" pitchFamily="50" charset="-127"/>
+                </a:rPr>
+                <a:t>)</a:t>
+              </a:r>
+            </a:p>
+            <a:p>
+              <a:r>
+                <a:rPr lang="en-US" altLang="ko-KR" sz="750" b="0" dirty="0">
+                  <a:solidFill>
+                    <a:srgbClr val="292929"/>
+                  </a:solidFill>
+                  <a:latin typeface="맑은 고딕" panose="020B0503020000020004" pitchFamily="50" charset="-127"/>
+                </a:rPr>
+                <a:t>  - </a:t>
+              </a:r>
+              <a:r>
+                <a:rPr lang="en-US" altLang="ko-KR" sz="750" b="0" dirty="0" err="1">
+                  <a:solidFill>
+                    <a:srgbClr val="292929"/>
+                  </a:solidFill>
+                  <a:latin typeface="맑은 고딕" panose="020B0503020000020004" pitchFamily="50" charset="-127"/>
+                </a:rPr>
+                <a:t>eg_time</a:t>
+              </a:r>
+              <a:r>
+                <a:rPr lang="en-US" altLang="ko-KR" sz="750" b="0" dirty="0">
+                  <a:solidFill>
+                    <a:srgbClr val="292929"/>
+                  </a:solidFill>
+                  <a:latin typeface="맑은 고딕" panose="020B0503020000020004" pitchFamily="50" charset="-127"/>
+                </a:rPr>
+                <a:t> (real): </a:t>
+              </a:r>
+              <a:r>
+                <a:rPr lang="en-US" altLang="ko-KR" sz="750" b="0" dirty="0" err="1">
+                  <a:solidFill>
+                    <a:srgbClr val="292929"/>
+                  </a:solidFill>
+                  <a:latin typeface="맑은 고딕" panose="020B0503020000020004" pitchFamily="50" charset="-127"/>
+                </a:rPr>
+                <a:t>가동시간</a:t>
+              </a:r>
+              <a:endParaRPr lang="en-US" altLang="ko-KR" sz="750" b="0" dirty="0">
+                <a:solidFill>
+                  <a:srgbClr val="292929"/>
+                </a:solidFill>
+                <a:latin typeface="맑은 고딕" panose="020B0503020000020004" pitchFamily="50" charset="-127"/>
+              </a:endParaRPr>
+            </a:p>
+            <a:p>
+              <a:r>
+                <a:rPr lang="en-US" altLang="ko-KR" sz="750" b="0" dirty="0">
+                  <a:solidFill>
+                    <a:srgbClr val="292929"/>
+                  </a:solidFill>
+                  <a:latin typeface="맑은 고딕" panose="020B0503020000020004" pitchFamily="50" charset="-127"/>
+                </a:rPr>
+                <a:t>  - … 외 55개 </a:t>
+              </a:r>
+              <a:r>
+                <a:rPr lang="en-US" altLang="ko-KR" sz="750" b="0" dirty="0" err="1">
+                  <a:solidFill>
+                    <a:srgbClr val="292929"/>
+                  </a:solidFill>
+                  <a:latin typeface="맑은 고딕" panose="020B0503020000020004" pitchFamily="50" charset="-127"/>
+                </a:rPr>
+                <a:t>컬럼</a:t>
+              </a:r>
+              <a:r>
+                <a:rPr lang="en-US" altLang="ko-KR" sz="750" b="0" dirty="0">
+                  <a:solidFill>
+                    <a:srgbClr val="292929"/>
+                  </a:solidFill>
+                  <a:latin typeface="맑은 고딕" panose="020B0503020000020004" pitchFamily="50" charset="-127"/>
+                </a:rPr>
+                <a:t> (</a:t>
+              </a:r>
+              <a:r>
+                <a:rPr lang="en-US" altLang="ko-KR" sz="750" b="0" dirty="0" err="1">
+                  <a:solidFill>
+                    <a:srgbClr val="292929"/>
+                  </a:solidFill>
+                  <a:latin typeface="맑은 고딕" panose="020B0503020000020004" pitchFamily="50" charset="-127"/>
+                </a:rPr>
+                <a:t>uman_time</a:t>
+              </a:r>
+              <a:r>
+                <a:rPr lang="en-US" altLang="ko-KR" sz="750" b="0" dirty="0">
+                  <a:solidFill>
+                    <a:srgbClr val="292929"/>
+                  </a:solidFill>
+                  <a:latin typeface="맑은 고딕" panose="020B0503020000020004" pitchFamily="50" charset="-127"/>
+                </a:rPr>
+                <a:t> (real): </a:t>
+              </a:r>
+              <a:r>
+                <a:rPr lang="en-US" altLang="ko-KR" sz="750" b="0" dirty="0" err="1">
+                  <a:solidFill>
+                    <a:srgbClr val="292929"/>
+                  </a:solidFill>
+                  <a:latin typeface="맑은 고딕" panose="020B0503020000020004" pitchFamily="50" charset="-127"/>
+                </a:rPr>
+                <a:t>무인</a:t>
+              </a:r>
+              <a:r>
+                <a:rPr lang="en-US" altLang="ko-KR" sz="750" b="0" dirty="0">
+                  <a:solidFill>
+                    <a:srgbClr val="292929"/>
+                  </a:solidFill>
+                  <a:latin typeface="맑은 고딕" panose="020B0503020000020004" pitchFamily="50" charset="-127"/>
+                </a:rPr>
+                <a:t> </a:t>
+              </a:r>
+              <a:r>
+                <a:rPr lang="en-US" altLang="ko-KR" sz="750" b="0" dirty="0" err="1">
+                  <a:solidFill>
+                    <a:srgbClr val="292929"/>
+                  </a:solidFill>
+                  <a:latin typeface="맑은 고딕" panose="020B0503020000020004" pitchFamily="50" charset="-127"/>
+                </a:rPr>
+                <a:t>가동</a:t>
+              </a:r>
+              <a:r>
+                <a:rPr lang="en-US" altLang="ko-KR" sz="750" b="0" dirty="0">
+                  <a:solidFill>
+                    <a:srgbClr val="292929"/>
+                  </a:solidFill>
+                  <a:latin typeface="맑은 고딕" panose="020B0503020000020004" pitchFamily="50" charset="-127"/>
+                </a:rPr>
+                <a:t> </a:t>
+              </a:r>
+              <a:r>
+                <a:rPr lang="en-US" altLang="ko-KR" sz="750" b="0" dirty="0" err="1">
+                  <a:solidFill>
+                    <a:srgbClr val="292929"/>
+                  </a:solidFill>
+                  <a:latin typeface="맑은 고딕" panose="020B0503020000020004" pitchFamily="50" charset="-127"/>
+                </a:rPr>
+                <a:t>시간</a:t>
+              </a:r>
+              <a:r>
+                <a:rPr lang="en-US" altLang="ko-KR" sz="750" b="0" dirty="0">
+                  <a:solidFill>
+                    <a:srgbClr val="292929"/>
+                  </a:solidFill>
+                  <a:latin typeface="맑은 고딕" panose="020B0503020000020004" pitchFamily="50" charset="-127"/>
+                </a:rPr>
+                <a:t> </a:t>
+              </a:r>
+              <a:r>
+                <a:rPr lang="en-US" altLang="ko-KR" sz="750" b="0" dirty="0" err="1">
+                  <a:solidFill>
+                    <a:srgbClr val="292929"/>
+                  </a:solidFill>
+                  <a:latin typeface="맑은 고딕" panose="020B0503020000020004" pitchFamily="50" charset="-127"/>
+                </a:rPr>
+                <a:t>포함</a:t>
+              </a:r>
+              <a:r>
+                <a:rPr lang="en-US" altLang="ko-KR" sz="750" b="0" dirty="0">
+                  <a:solidFill>
+                    <a:srgbClr val="292929"/>
+                  </a:solidFill>
+                  <a:latin typeface="맑은 고딕" panose="020B0503020000020004" pitchFamily="50" charset="-127"/>
+                </a:rPr>
+                <a:t>)</a:t>
+              </a:r>
+            </a:p>
+            <a:p>
+              <a:endParaRPr lang="en-US" altLang="ko-KR" sz="750" b="0" dirty="0">
+                <a:solidFill>
+                  <a:srgbClr val="292929"/>
+                </a:solidFill>
+                <a:latin typeface="맑은 고딕" panose="020B0503020000020004" pitchFamily="50" charset="-127"/>
+              </a:endParaRPr>
+            </a:p>
+            <a:p>
+              <a:r>
+                <a:rPr lang="en-US" altLang="ko-KR" sz="750" b="0" dirty="0">
+                  <a:solidFill>
+                    <a:srgbClr val="292929"/>
+                  </a:solidFill>
+                  <a:latin typeface="맑은 고딕" panose="020B0503020000020004" pitchFamily="50" charset="-127"/>
+                </a:rPr>
+                <a:t>[</a:t>
+              </a:r>
+              <a:r>
+                <a:rPr lang="en-US" altLang="ko-KR" sz="750" b="0" dirty="0" err="1">
+                  <a:solidFill>
+                    <a:srgbClr val="292929"/>
+                  </a:solidFill>
+                  <a:latin typeface="맑은 고딕" panose="020B0503020000020004" pitchFamily="50" charset="-127"/>
+                </a:rPr>
+                <a:t>지표</a:t>
+              </a:r>
+              <a:r>
+                <a:rPr lang="en-US" altLang="ko-KR" sz="750" b="0" dirty="0">
+                  <a:solidFill>
+                    <a:srgbClr val="292929"/>
+                  </a:solidFill>
+                  <a:latin typeface="맑은 고딕" panose="020B0503020000020004" pitchFamily="50" charset="-127"/>
+                </a:rPr>
+                <a:t>] </a:t>
+              </a:r>
+              <a:r>
+                <a:rPr lang="en-US" altLang="ko-KR" sz="750" b="0" dirty="0" err="1">
+                  <a:solidFill>
+                    <a:srgbClr val="292929"/>
+                  </a:solidFill>
+                  <a:latin typeface="맑은 고딕" panose="020B0503020000020004" pitchFamily="50" charset="-127"/>
+                </a:rPr>
+                <a:t>무인</a:t>
+              </a:r>
+              <a:r>
+                <a:rPr lang="en-US" altLang="ko-KR" sz="750" b="0" dirty="0">
+                  <a:solidFill>
+                    <a:srgbClr val="292929"/>
+                  </a:solidFill>
+                  <a:latin typeface="맑은 고딕" panose="020B0503020000020004" pitchFamily="50" charset="-127"/>
+                </a:rPr>
+                <a:t> </a:t>
+              </a:r>
+              <a:r>
+                <a:rPr lang="en-US" altLang="ko-KR" sz="750" b="0" dirty="0" err="1">
+                  <a:solidFill>
+                    <a:srgbClr val="292929"/>
+                  </a:solidFill>
+                  <a:latin typeface="맑은 고딕" panose="020B0503020000020004" pitchFamily="50" charset="-127"/>
+                </a:rPr>
+                <a:t>가동시간</a:t>
+              </a:r>
+              <a:r>
+                <a:rPr lang="en-US" altLang="ko-KR" sz="750" b="0" dirty="0">
+                  <a:solidFill>
+                    <a:srgbClr val="292929"/>
+                  </a:solidFill>
+                  <a:latin typeface="맑은 고딕" panose="020B0503020000020004" pitchFamily="50" charset="-127"/>
+                </a:rPr>
+                <a:t> — </a:t>
+              </a:r>
+              <a:r>
+                <a:rPr lang="en-US" altLang="ko-KR" sz="750" b="0" dirty="0" err="1">
+                  <a:solidFill>
+                    <a:srgbClr val="292929"/>
+                  </a:solidFill>
+                  <a:latin typeface="맑은 고딕" panose="020B0503020000020004" pitchFamily="50" charset="-127"/>
+                </a:rPr>
+                <a:t>차량별</a:t>
+              </a:r>
+              <a:r>
+                <a:rPr lang="en-US" altLang="ko-KR" sz="750" b="0" dirty="0">
+                  <a:solidFill>
+                    <a:srgbClr val="292929"/>
+                  </a:solidFill>
+                  <a:latin typeface="맑은 고딕" panose="020B0503020000020004" pitchFamily="50" charset="-127"/>
+                </a:rPr>
+                <a:t> </a:t>
+              </a:r>
+              <a:r>
+                <a:rPr lang="en-US" altLang="ko-KR" sz="750" b="0" dirty="0" err="1">
+                  <a:solidFill>
+                    <a:srgbClr val="292929"/>
+                  </a:solidFill>
+                  <a:latin typeface="맑은 고딕" panose="020B0503020000020004" pitchFamily="50" charset="-127"/>
+                </a:rPr>
+                <a:t>하루</a:t>
+              </a:r>
+              <a:r>
+                <a:rPr lang="en-US" altLang="ko-KR" sz="750" b="0" dirty="0">
+                  <a:solidFill>
+                    <a:srgbClr val="292929"/>
+                  </a:solidFill>
+                  <a:latin typeface="맑은 고딕" panose="020B0503020000020004" pitchFamily="50" charset="-127"/>
+                </a:rPr>
+                <a:t> </a:t>
+              </a:r>
+              <a:r>
+                <a:rPr lang="en-US" altLang="ko-KR" sz="750" b="0" dirty="0" err="1">
+                  <a:solidFill>
+                    <a:srgbClr val="292929"/>
+                  </a:solidFill>
+                  <a:latin typeface="맑은 고딕" panose="020B0503020000020004" pitchFamily="50" charset="-127"/>
+                </a:rPr>
+                <a:t>무인</a:t>
+              </a:r>
+              <a:r>
+                <a:rPr lang="en-US" altLang="ko-KR" sz="750" b="0" dirty="0">
+                  <a:solidFill>
+                    <a:srgbClr val="292929"/>
+                  </a:solidFill>
+                  <a:latin typeface="맑은 고딕" panose="020B0503020000020004" pitchFamily="50" charset="-127"/>
+                </a:rPr>
+                <a:t> </a:t>
+              </a:r>
+              <a:r>
+                <a:rPr lang="en-US" altLang="ko-KR" sz="750" b="0" dirty="0" err="1">
+                  <a:solidFill>
+                    <a:srgbClr val="292929"/>
+                  </a:solidFill>
+                  <a:latin typeface="맑은 고딕" panose="020B0503020000020004" pitchFamily="50" charset="-127"/>
+                </a:rPr>
+                <a:t>가동시간</a:t>
+              </a:r>
+              <a:r>
+                <a:rPr lang="en-US" altLang="ko-KR" sz="750" b="0" dirty="0">
+                  <a:solidFill>
+                    <a:srgbClr val="292929"/>
+                  </a:solidFill>
+                  <a:latin typeface="맑은 고딕" panose="020B0503020000020004" pitchFamily="50" charset="-127"/>
+                </a:rPr>
+                <a:t>. </a:t>
+              </a:r>
+              <a:r>
+                <a:rPr lang="en-US" altLang="ko-KR" sz="750" b="0" dirty="0" err="1">
+                  <a:solidFill>
+                    <a:srgbClr val="292929"/>
+                  </a:solidFill>
+                  <a:latin typeface="맑은 고딕" panose="020B0503020000020004" pitchFamily="50" charset="-127"/>
+                </a:rPr>
+                <a:t>uman_time</a:t>
+              </a:r>
+              <a:r>
+                <a:rPr lang="en-US" altLang="ko-KR" sz="750" b="0" dirty="0">
+                  <a:solidFill>
+                    <a:srgbClr val="292929"/>
+                  </a:solidFill>
+                  <a:latin typeface="맑은 고딕" panose="020B0503020000020004" pitchFamily="50" charset="-127"/>
+                </a:rPr>
+                <a:t> 은 </a:t>
+              </a:r>
+              <a:r>
+                <a:rPr lang="en-US" altLang="ko-KR" sz="750" b="0" dirty="0" err="1">
+                  <a:solidFill>
+                    <a:srgbClr val="292929"/>
+                  </a:solidFill>
+                  <a:latin typeface="맑은 고딕" panose="020B0503020000020004" pitchFamily="50" charset="-127"/>
+                </a:rPr>
+                <a:t>계속</a:t>
+              </a:r>
+              <a:r>
+                <a:rPr lang="en-US" altLang="ko-KR" sz="750" b="0" dirty="0">
+                  <a:solidFill>
+                    <a:srgbClr val="292929"/>
+                  </a:solidFill>
+                  <a:latin typeface="맑은 고딕" panose="020B0503020000020004" pitchFamily="50" charset="-127"/>
+                </a:rPr>
+                <a:t> </a:t>
+              </a:r>
+              <a:r>
+                <a:rPr lang="en-US" altLang="ko-KR" sz="750" b="0" dirty="0" err="1">
+                  <a:solidFill>
+                    <a:srgbClr val="292929"/>
+                  </a:solidFill>
+                  <a:latin typeface="맑은 고딕" panose="020B0503020000020004" pitchFamily="50" charset="-127"/>
+                </a:rPr>
+                <a:t>커지는</a:t>
+              </a:r>
+              <a:r>
+                <a:rPr lang="en-US" altLang="ko-KR" sz="750" b="0" dirty="0">
+                  <a:solidFill>
+                    <a:srgbClr val="292929"/>
+                  </a:solidFill>
+                  <a:latin typeface="맑은 고딕" panose="020B0503020000020004" pitchFamily="50" charset="-127"/>
+                </a:rPr>
+                <a:t> </a:t>
+              </a:r>
+              <a:r>
+                <a:rPr lang="en-US" altLang="ko-KR" sz="750" b="0" dirty="0" err="1">
+                  <a:solidFill>
+                    <a:srgbClr val="292929"/>
+                  </a:solidFill>
+                  <a:latin typeface="맑은 고딕" panose="020B0503020000020004" pitchFamily="50" charset="-127"/>
+                </a:rPr>
+                <a:t>누적값이라</a:t>
+              </a:r>
+              <a:r>
+                <a:rPr lang="en-US" altLang="ko-KR" sz="750" b="0" dirty="0">
+                  <a:solidFill>
+                    <a:srgbClr val="292929"/>
+                  </a:solidFill>
+                  <a:latin typeface="맑은 고딕" panose="020B0503020000020004" pitchFamily="50" charset="-127"/>
+                </a:rPr>
+                <a:t> </a:t>
+              </a:r>
+              <a:r>
+                <a:rPr lang="en-US" altLang="ko-KR" sz="750" b="0" dirty="0" err="1">
+                  <a:solidFill>
+                    <a:srgbClr val="292929"/>
+                  </a:solidFill>
+                  <a:latin typeface="맑은 고딕" panose="020B0503020000020004" pitchFamily="50" charset="-127"/>
+                </a:rPr>
+                <a:t>하루의</a:t>
+              </a:r>
+              <a:r>
+                <a:rPr lang="en-US" altLang="ko-KR" sz="750" b="0" dirty="0">
+                  <a:solidFill>
+                    <a:srgbClr val="292929"/>
+                  </a:solidFill>
+                  <a:latin typeface="맑은 고딕" panose="020B0503020000020004" pitchFamily="50" charset="-127"/>
+                </a:rPr>
+                <a:t> MAX - MIN </a:t>
+              </a:r>
+              <a:r>
+                <a:rPr lang="en-US" altLang="ko-KR" sz="750" b="0" dirty="0" err="1">
+                  <a:solidFill>
+                    <a:srgbClr val="292929"/>
+                  </a:solidFill>
+                  <a:latin typeface="맑은 고딕" panose="020B0503020000020004" pitchFamily="50" charset="-127"/>
+                </a:rPr>
+                <a:t>으로</a:t>
+              </a:r>
+              <a:r>
+                <a:rPr lang="en-US" altLang="ko-KR" sz="750" b="0" dirty="0">
+                  <a:solidFill>
+                    <a:srgbClr val="292929"/>
+                  </a:solidFill>
+                  <a:latin typeface="맑은 고딕" panose="020B0503020000020004" pitchFamily="50" charset="-127"/>
+                </a:rPr>
+                <a:t> </a:t>
+              </a:r>
+              <a:r>
+                <a:rPr lang="en-US" altLang="ko-KR" sz="750" b="0" dirty="0" err="1">
+                  <a:solidFill>
+                    <a:srgbClr val="292929"/>
+                  </a:solidFill>
+                  <a:latin typeface="맑은 고딕" panose="020B0503020000020004" pitchFamily="50" charset="-127"/>
+                </a:rPr>
+                <a:t>구한다</a:t>
+              </a:r>
+              <a:r>
+                <a:rPr lang="en-US" altLang="ko-KR" sz="750" b="0" dirty="0">
+                  <a:solidFill>
+                    <a:srgbClr val="292929"/>
+                  </a:solidFill>
+                  <a:latin typeface="맑은 고딕" panose="020B0503020000020004" pitchFamily="50" charset="-127"/>
+                </a:rPr>
+                <a:t>. </a:t>
+              </a:r>
+              <a:r>
+                <a:rPr lang="en-US" altLang="ko-KR" sz="750" b="0" dirty="0" err="1">
+                  <a:solidFill>
+                    <a:srgbClr val="292929"/>
+                  </a:solidFill>
+                  <a:latin typeface="맑은 고딕" panose="020B0503020000020004" pitchFamily="50" charset="-127"/>
+                </a:rPr>
+                <a:t>기간</a:t>
+              </a:r>
+              <a:r>
+                <a:rPr lang="en-US" altLang="ko-KR" sz="750" b="0" dirty="0">
+                  <a:solidFill>
+                    <a:srgbClr val="292929"/>
+                  </a:solidFill>
+                  <a:latin typeface="맑은 고딕" panose="020B0503020000020004" pitchFamily="50" charset="-127"/>
+                </a:rPr>
+                <a:t> </a:t>
+              </a:r>
+              <a:r>
+                <a:rPr lang="en-US" altLang="ko-KR" sz="750" b="0" dirty="0" err="1">
+                  <a:solidFill>
+                    <a:srgbClr val="292929"/>
+                  </a:solidFill>
+                  <a:latin typeface="맑은 고딕" panose="020B0503020000020004" pitchFamily="50" charset="-127"/>
+                </a:rPr>
+                <a:t>합계는</a:t>
+              </a:r>
+              <a:r>
+                <a:rPr lang="en-US" altLang="ko-KR" sz="750" b="0" dirty="0">
+                  <a:solidFill>
+                    <a:srgbClr val="292929"/>
+                  </a:solidFill>
+                  <a:latin typeface="맑은 고딕" panose="020B0503020000020004" pitchFamily="50" charset="-127"/>
+                </a:rPr>
+                <a:t> </a:t>
+              </a:r>
+              <a:r>
+                <a:rPr lang="en-US" altLang="ko-KR" sz="750" b="0" dirty="0" err="1">
+                  <a:solidFill>
+                    <a:srgbClr val="292929"/>
+                  </a:solidFill>
+                  <a:latin typeface="맑은 고딕" panose="020B0503020000020004" pitchFamily="50" charset="-127"/>
+                </a:rPr>
+                <a:t>일별</a:t>
+              </a:r>
+              <a:r>
+                <a:rPr lang="en-US" altLang="ko-KR" sz="750" b="0" dirty="0">
+                  <a:solidFill>
+                    <a:srgbClr val="292929"/>
+                  </a:solidFill>
+                  <a:latin typeface="맑은 고딕" panose="020B0503020000020004" pitchFamily="50" charset="-127"/>
+                </a:rPr>
+                <a:t> </a:t>
+              </a:r>
+              <a:r>
+                <a:rPr lang="en-US" altLang="ko-KR" sz="750" b="0" dirty="0" err="1">
+                  <a:solidFill>
+                    <a:srgbClr val="292929"/>
+                  </a:solidFill>
+                  <a:latin typeface="맑은 고딕" panose="020B0503020000020004" pitchFamily="50" charset="-127"/>
+                </a:rPr>
+                <a:t>값을</a:t>
+              </a:r>
+              <a:r>
+                <a:rPr lang="en-US" altLang="ko-KR" sz="750" b="0" dirty="0">
+                  <a:solidFill>
+                    <a:srgbClr val="292929"/>
+                  </a:solidFill>
+                  <a:latin typeface="맑은 고딕" panose="020B0503020000020004" pitchFamily="50" charset="-127"/>
+                </a:rPr>
+                <a:t> </a:t>
+              </a:r>
+              <a:r>
+                <a:rPr lang="en-US" altLang="ko-KR" sz="750" b="0" dirty="0" err="1">
+                  <a:solidFill>
+                    <a:srgbClr val="292929"/>
+                  </a:solidFill>
+                  <a:latin typeface="맑은 고딕" panose="020B0503020000020004" pitchFamily="50" charset="-127"/>
+                </a:rPr>
+                <a:t>더한다</a:t>
+              </a:r>
+              <a:r>
+                <a:rPr lang="en-US" altLang="ko-KR" sz="750" b="0" dirty="0">
+                  <a:solidFill>
+                    <a:srgbClr val="292929"/>
+                  </a:solidFill>
+                  <a:latin typeface="맑은 고딕" panose="020B0503020000020004" pitchFamily="50" charset="-127"/>
+                </a:rPr>
+                <a:t>.</a:t>
+              </a:r>
+            </a:p>
+            <a:p>
+              <a:r>
+                <a:rPr lang="en-US" altLang="ko-KR" sz="750" b="0" dirty="0" err="1">
+                  <a:solidFill>
+                    <a:srgbClr val="292929"/>
+                  </a:solidFill>
+                  <a:latin typeface="맑은 고딕" panose="020B0503020000020004" pitchFamily="50" charset="-127"/>
+                </a:rPr>
+                <a:t>등록된</a:t>
+              </a:r>
+              <a:r>
+                <a:rPr lang="en-US" altLang="ko-KR" sz="750" b="0" dirty="0">
+                  <a:solidFill>
+                    <a:srgbClr val="292929"/>
+                  </a:solidFill>
+                  <a:latin typeface="맑은 고딕" panose="020B0503020000020004" pitchFamily="50" charset="-127"/>
+                </a:rPr>
+                <a:t> SQL:</a:t>
+              </a:r>
+            </a:p>
+            <a:p>
+              <a:r>
+                <a:rPr lang="en-US" altLang="ko-KR" sz="750" b="0" dirty="0">
+                  <a:solidFill>
+                    <a:srgbClr val="292929"/>
+                  </a:solidFill>
+                  <a:latin typeface="맑은 고딕" panose="020B0503020000020004" pitchFamily="50" charset="-127"/>
+                </a:rPr>
+                <a:t>select date(</a:t>
+              </a:r>
+              <a:r>
+                <a:rPr lang="en-US" altLang="ko-KR" sz="750" b="0" dirty="0" err="1">
+                  <a:solidFill>
+                    <a:srgbClr val="292929"/>
+                  </a:solidFill>
+                  <a:latin typeface="맑은 고딕" panose="020B0503020000020004" pitchFamily="50" charset="-127"/>
+                </a:rPr>
+                <a:t>collect_datetime</a:t>
+              </a:r>
+              <a:r>
+                <a:rPr lang="en-US" altLang="ko-KR" sz="750" b="0" dirty="0">
+                  <a:solidFill>
+                    <a:srgbClr val="292929"/>
+                  </a:solidFill>
+                  <a:latin typeface="맑은 고딕" panose="020B0503020000020004" pitchFamily="50" charset="-127"/>
+                </a:rPr>
+                <a:t> + interval '9 hours') as day, </a:t>
+              </a:r>
+              <a:r>
+                <a:rPr lang="en-US" altLang="ko-KR" sz="750" b="0" dirty="0" err="1">
+                  <a:solidFill>
+                    <a:srgbClr val="292929"/>
+                  </a:solidFill>
+                  <a:latin typeface="맑은 고딕" panose="020B0503020000020004" pitchFamily="50" charset="-127"/>
+                </a:rPr>
+                <a:t>vehicle_id</a:t>
+              </a:r>
+              <a:r>
+                <a:rPr lang="en-US" altLang="ko-KR" sz="750" b="0" dirty="0">
+                  <a:solidFill>
+                    <a:srgbClr val="292929"/>
+                  </a:solidFill>
+                  <a:latin typeface="맑은 고딕" panose="020B0503020000020004" pitchFamily="50" charset="-127"/>
+                </a:rPr>
+                <a:t>, max(</a:t>
+              </a:r>
+              <a:r>
+                <a:rPr lang="en-US" altLang="ko-KR" sz="750" b="0" dirty="0" err="1">
+                  <a:solidFill>
+                    <a:srgbClr val="292929"/>
+                  </a:solidFill>
+                  <a:latin typeface="맑은 고딕" panose="020B0503020000020004" pitchFamily="50" charset="-127"/>
+                </a:rPr>
+                <a:t>uman_time</a:t>
+              </a:r>
+              <a:r>
+                <a:rPr lang="en-US" altLang="ko-KR" sz="750" b="0" dirty="0">
+                  <a:solidFill>
+                    <a:srgbClr val="292929"/>
+                  </a:solidFill>
+                  <a:latin typeface="맑은 고딕" panose="020B0503020000020004" pitchFamily="50" charset="-127"/>
+                </a:rPr>
+                <a:t>) - min(</a:t>
+              </a:r>
+              <a:r>
+                <a:rPr lang="en-US" altLang="ko-KR" sz="750" b="0" dirty="0" err="1">
+                  <a:solidFill>
+                    <a:srgbClr val="292929"/>
+                  </a:solidFill>
+                  <a:latin typeface="맑은 고딕" panose="020B0503020000020004" pitchFamily="50" charset="-127"/>
+                </a:rPr>
+                <a:t>uman_time</a:t>
+              </a:r>
+              <a:r>
+                <a:rPr lang="en-US" altLang="ko-KR" sz="750" b="0" dirty="0">
+                  <a:solidFill>
+                    <a:srgbClr val="292929"/>
+                  </a:solidFill>
+                  <a:latin typeface="맑은 고딕" panose="020B0503020000020004" pitchFamily="50" charset="-127"/>
+                </a:rPr>
+                <a:t>) as </a:t>
+              </a:r>
+              <a:r>
+                <a:rPr lang="en-US" altLang="ko-KR" sz="750" b="0" dirty="0" err="1">
+                  <a:solidFill>
+                    <a:srgbClr val="292929"/>
+                  </a:solidFill>
+                  <a:latin typeface="맑은 고딕" panose="020B0503020000020004" pitchFamily="50" charset="-127"/>
+                </a:rPr>
+                <a:t>uman_hours</a:t>
+              </a:r>
+              <a:endParaRPr lang="en-US" altLang="ko-KR" sz="750" b="0" dirty="0">
+                <a:solidFill>
+                  <a:srgbClr val="292929"/>
+                </a:solidFill>
+                <a:latin typeface="맑은 고딕" panose="020B0503020000020004" pitchFamily="50" charset="-127"/>
+              </a:endParaRPr>
+            </a:p>
+            <a:p>
+              <a:r>
+                <a:rPr lang="en-US" altLang="ko-KR" sz="750" b="0" dirty="0">
+                  <a:solidFill>
+                    <a:srgbClr val="292929"/>
+                  </a:solidFill>
+                  <a:latin typeface="맑은 고딕" panose="020B0503020000020004" pitchFamily="50" charset="-127"/>
+                </a:rPr>
+                <a:t>  from </a:t>
+              </a:r>
+              <a:r>
+                <a:rPr lang="en-US" altLang="ko-KR" sz="750" b="0" dirty="0" err="1">
+                  <a:solidFill>
+                    <a:srgbClr val="292929"/>
+                  </a:solidFill>
+                  <a:latin typeface="맑은 고딕" panose="020B0503020000020004" pitchFamily="50" charset="-127"/>
+                </a:rPr>
+                <a:t>bms_log</a:t>
+              </a:r>
+              <a:endParaRPr lang="en-US" altLang="ko-KR" sz="750" b="0" dirty="0">
+                <a:solidFill>
+                  <a:srgbClr val="292929"/>
+                </a:solidFill>
+                <a:latin typeface="맑은 고딕" panose="020B0503020000020004" pitchFamily="50" charset="-127"/>
+              </a:endParaRPr>
+            </a:p>
+            <a:p>
+              <a:r>
+                <a:rPr lang="en-US" altLang="ko-KR" sz="750" b="0" dirty="0">
+                  <a:solidFill>
+                    <a:srgbClr val="292929"/>
+                  </a:solidFill>
+                  <a:latin typeface="맑은 고딕" panose="020B0503020000020004" pitchFamily="50" charset="-127"/>
+                </a:rPr>
+                <a:t> where </a:t>
+              </a:r>
+              <a:r>
+                <a:rPr lang="en-US" altLang="ko-KR" sz="750" b="0" dirty="0" err="1">
+                  <a:solidFill>
+                    <a:srgbClr val="292929"/>
+                  </a:solidFill>
+                  <a:latin typeface="맑은 고딕" panose="020B0503020000020004" pitchFamily="50" charset="-127"/>
+                </a:rPr>
+                <a:t>collect_datetime</a:t>
+              </a:r>
+              <a:r>
+                <a:rPr lang="en-US" altLang="ko-KR" sz="750" b="0" dirty="0">
+                  <a:solidFill>
+                    <a:srgbClr val="292929"/>
+                  </a:solidFill>
+                  <a:latin typeface="맑은 고딕" panose="020B0503020000020004" pitchFamily="50" charset="-127"/>
+                </a:rPr>
+                <a:t> &gt;= timestamp '2026-10-01 00:00:00' - interval '9 hours'</a:t>
+              </a:r>
+            </a:p>
+            <a:p>
+              <a:r>
+                <a:rPr lang="en-US" altLang="ko-KR" sz="750" b="0" dirty="0">
                   <a:solidFill>
                     <a:srgbClr val="292929"/>
                   </a:solidFill>
@@ -15648,39 +17244,606 @@
             </a:p>
             <a:p>
               <a:r>
-                <a:rPr lang="en-US" altLang="ko-KR" sz="750" b="0">
+                <a:rPr lang="en-US" altLang="ko-KR" sz="750" b="0" dirty="0" err="1">
                   <a:solidFill>
                     <a:srgbClr val="292929"/>
                   </a:solidFill>
                   <a:latin typeface="맑은 고딕" panose="020B0503020000020004" pitchFamily="50" charset="-127"/>
                 </a:rPr>
-                <a:t>등록된 AST:</a:t>
+                <a:t>등록된</a:t>
               </a:r>
-            </a:p>
-            <a:p>
               <a:r>
-                <a:rPr lang="en-US" altLang="ko-KR" sz="750" b="0">
+                <a:rPr lang="en-US" altLang="ko-KR" sz="750" b="0" dirty="0">
                   <a:solidFill>
                     <a:srgbClr val="292929"/>
                   </a:solidFill>
                   <a:latin typeface="맑은 고딕" panose="020B0503020000020004" pitchFamily="50" charset="-127"/>
                 </a:rPr>
-                <a:t>{"from": "bms_log", "where": [{"op": "&gt;=", "expr": {"col": "collect_datetime"}, "value": "2026-10-01 00:00:00"}], "select": [{"as": "day", "expr": {"fn": "DATE", "args": [{"col": "collect_datetime"}]}}, {"as": "vehicle_id", "expr": {"col": "vehicle_id"}}, {"as": "uman_hours", "expr": {"fn": "SUB", "args": [{"fn": "MAX", "args": [{"col": "uman_time"}]}, {"fn": "MIN", "args": [{"col": "uman_time"}]}]}}], "group_by": [{"fn": "DATE", "args": [{"col": "collect_datetime"}]}, {"col": "vehicle_id"}]}</a:t>
+                <a:t> AST:</a:t>
               </a:r>
             </a:p>
             <a:p>
               <a:r>
-                <a:rPr lang="en-US" altLang="ko-KR" sz="750" b="0">
+                <a:rPr lang="en-US" altLang="ko-KR" sz="750" b="0" dirty="0">
                   <a:solidFill>
                     <a:srgbClr val="292929"/>
                   </a:solidFill>
                   <a:latin typeface="맑은 고딕" panose="020B0503020000020004" pitchFamily="50" charset="-127"/>
                 </a:rPr>
-                <a:t>이 지표의 AST 를 바탕으로 질문에 맞게 기간·조건·묶음·정렬·개수만 바꾸십시오. 계산 부분(select 의 식)은 그대로 둡니다.</a:t>
+                <a:t>{"from": "</a:t>
+              </a:r>
+              <a:r>
+                <a:rPr lang="en-US" altLang="ko-KR" sz="750" b="0" dirty="0" err="1">
+                  <a:solidFill>
+                    <a:srgbClr val="292929"/>
+                  </a:solidFill>
+                  <a:latin typeface="맑은 고딕" panose="020B0503020000020004" pitchFamily="50" charset="-127"/>
+                </a:rPr>
+                <a:t>bms_log</a:t>
+              </a:r>
+              <a:r>
+                <a:rPr lang="en-US" altLang="ko-KR" sz="750" b="0" dirty="0">
+                  <a:solidFill>
+                    <a:srgbClr val="292929"/>
+                  </a:solidFill>
+                  <a:latin typeface="맑은 고딕" panose="020B0503020000020004" pitchFamily="50" charset="-127"/>
+                </a:rPr>
+                <a:t>", "where": [{"op": "&gt;=", "expr": {"col": "</a:t>
+              </a:r>
+              <a:r>
+                <a:rPr lang="en-US" altLang="ko-KR" sz="750" b="0" dirty="0" err="1">
+                  <a:solidFill>
+                    <a:srgbClr val="292929"/>
+                  </a:solidFill>
+                  <a:latin typeface="맑은 고딕" panose="020B0503020000020004" pitchFamily="50" charset="-127"/>
+                </a:rPr>
+                <a:t>collect_datetime</a:t>
+              </a:r>
+              <a:r>
+                <a:rPr lang="en-US" altLang="ko-KR" sz="750" b="0" dirty="0">
+                  <a:solidFill>
+                    <a:srgbClr val="292929"/>
+                  </a:solidFill>
+                  <a:latin typeface="맑은 고딕" panose="020B0503020000020004" pitchFamily="50" charset="-127"/>
+                </a:rPr>
+                <a:t>"}, "value": "2026-10-01 00:00:00"}], "select": [{"as": "day", "expr": {"</a:t>
+              </a:r>
+              <a:r>
+                <a:rPr lang="en-US" altLang="ko-KR" sz="750" b="0" dirty="0" err="1">
+                  <a:solidFill>
+                    <a:srgbClr val="292929"/>
+                  </a:solidFill>
+                  <a:latin typeface="맑은 고딕" panose="020B0503020000020004" pitchFamily="50" charset="-127"/>
+                </a:rPr>
+                <a:t>fn</a:t>
+              </a:r>
+              <a:r>
+                <a:rPr lang="en-US" altLang="ko-KR" sz="750" b="0" dirty="0">
+                  <a:solidFill>
+                    <a:srgbClr val="292929"/>
+                  </a:solidFill>
+                  <a:latin typeface="맑은 고딕" panose="020B0503020000020004" pitchFamily="50" charset="-127"/>
+                </a:rPr>
+                <a:t>": "DATE", "</a:t>
+              </a:r>
+              <a:r>
+                <a:rPr lang="en-US" altLang="ko-KR" sz="750" b="0" dirty="0" err="1">
+                  <a:solidFill>
+                    <a:srgbClr val="292929"/>
+                  </a:solidFill>
+                  <a:latin typeface="맑은 고딕" panose="020B0503020000020004" pitchFamily="50" charset="-127"/>
+                </a:rPr>
+                <a:t>args</a:t>
+              </a:r>
+              <a:r>
+                <a:rPr lang="en-US" altLang="ko-KR" sz="750" b="0" dirty="0">
+                  <a:solidFill>
+                    <a:srgbClr val="292929"/>
+                  </a:solidFill>
+                  <a:latin typeface="맑은 고딕" panose="020B0503020000020004" pitchFamily="50" charset="-127"/>
+                </a:rPr>
+                <a:t>": [{"col": "</a:t>
+              </a:r>
+              <a:r>
+                <a:rPr lang="en-US" altLang="ko-KR" sz="750" b="0" dirty="0" err="1">
+                  <a:solidFill>
+                    <a:srgbClr val="292929"/>
+                  </a:solidFill>
+                  <a:latin typeface="맑은 고딕" panose="020B0503020000020004" pitchFamily="50" charset="-127"/>
+                </a:rPr>
+                <a:t>collect_datetime</a:t>
+              </a:r>
+              <a:r>
+                <a:rPr lang="en-US" altLang="ko-KR" sz="750" b="0" dirty="0">
+                  <a:solidFill>
+                    <a:srgbClr val="292929"/>
+                  </a:solidFill>
+                  <a:latin typeface="맑은 고딕" panose="020B0503020000020004" pitchFamily="50" charset="-127"/>
+                </a:rPr>
+                <a:t>"}]}}, {"as": "</a:t>
+              </a:r>
+              <a:r>
+                <a:rPr lang="en-US" altLang="ko-KR" sz="750" b="0" dirty="0" err="1">
+                  <a:solidFill>
+                    <a:srgbClr val="292929"/>
+                  </a:solidFill>
+                  <a:latin typeface="맑은 고딕" panose="020B0503020000020004" pitchFamily="50" charset="-127"/>
+                </a:rPr>
+                <a:t>vehicle_id</a:t>
+              </a:r>
+              <a:r>
+                <a:rPr lang="en-US" altLang="ko-KR" sz="750" b="0" dirty="0">
+                  <a:solidFill>
+                    <a:srgbClr val="292929"/>
+                  </a:solidFill>
+                  <a:latin typeface="맑은 고딕" panose="020B0503020000020004" pitchFamily="50" charset="-127"/>
+                </a:rPr>
+                <a:t>", "expr": {"col": "</a:t>
+              </a:r>
+              <a:r>
+                <a:rPr lang="en-US" altLang="ko-KR" sz="750" b="0" dirty="0" err="1">
+                  <a:solidFill>
+                    <a:srgbClr val="292929"/>
+                  </a:solidFill>
+                  <a:latin typeface="맑은 고딕" panose="020B0503020000020004" pitchFamily="50" charset="-127"/>
+                </a:rPr>
+                <a:t>vehicle_id</a:t>
+              </a:r>
+              <a:r>
+                <a:rPr lang="en-US" altLang="ko-KR" sz="750" b="0" dirty="0">
+                  <a:solidFill>
+                    <a:srgbClr val="292929"/>
+                  </a:solidFill>
+                  <a:latin typeface="맑은 고딕" panose="020B0503020000020004" pitchFamily="50" charset="-127"/>
+                </a:rPr>
+                <a:t>"}}, {"as": "</a:t>
+              </a:r>
+              <a:r>
+                <a:rPr lang="en-US" altLang="ko-KR" sz="750" b="0" dirty="0" err="1">
+                  <a:solidFill>
+                    <a:srgbClr val="292929"/>
+                  </a:solidFill>
+                  <a:latin typeface="맑은 고딕" panose="020B0503020000020004" pitchFamily="50" charset="-127"/>
+                </a:rPr>
+                <a:t>uman_hours</a:t>
+              </a:r>
+              <a:r>
+                <a:rPr lang="en-US" altLang="ko-KR" sz="750" b="0" dirty="0">
+                  <a:solidFill>
+                    <a:srgbClr val="292929"/>
+                  </a:solidFill>
+                  <a:latin typeface="맑은 고딕" panose="020B0503020000020004" pitchFamily="50" charset="-127"/>
+                </a:rPr>
+                <a:t>", "expr": {"</a:t>
+              </a:r>
+              <a:r>
+                <a:rPr lang="en-US" altLang="ko-KR" sz="750" b="0" dirty="0" err="1">
+                  <a:solidFill>
+                    <a:srgbClr val="292929"/>
+                  </a:solidFill>
+                  <a:latin typeface="맑은 고딕" panose="020B0503020000020004" pitchFamily="50" charset="-127"/>
+                </a:rPr>
+                <a:t>fn</a:t>
+              </a:r>
+              <a:r>
+                <a:rPr lang="en-US" altLang="ko-KR" sz="750" b="0" dirty="0">
+                  <a:solidFill>
+                    <a:srgbClr val="292929"/>
+                  </a:solidFill>
+                  <a:latin typeface="맑은 고딕" panose="020B0503020000020004" pitchFamily="50" charset="-127"/>
+                </a:rPr>
+                <a:t>": "SUB", "</a:t>
+              </a:r>
+              <a:r>
+                <a:rPr lang="en-US" altLang="ko-KR" sz="750" b="0" dirty="0" err="1">
+                  <a:solidFill>
+                    <a:srgbClr val="292929"/>
+                  </a:solidFill>
+                  <a:latin typeface="맑은 고딕" panose="020B0503020000020004" pitchFamily="50" charset="-127"/>
+                </a:rPr>
+                <a:t>args</a:t>
+              </a:r>
+              <a:r>
+                <a:rPr lang="en-US" altLang="ko-KR" sz="750" b="0" dirty="0">
+                  <a:solidFill>
+                    <a:srgbClr val="292929"/>
+                  </a:solidFill>
+                  <a:latin typeface="맑은 고딕" panose="020B0503020000020004" pitchFamily="50" charset="-127"/>
+                </a:rPr>
+                <a:t>": [{"</a:t>
+              </a:r>
+              <a:r>
+                <a:rPr lang="en-US" altLang="ko-KR" sz="750" b="0" dirty="0" err="1">
+                  <a:solidFill>
+                    <a:srgbClr val="292929"/>
+                  </a:solidFill>
+                  <a:latin typeface="맑은 고딕" panose="020B0503020000020004" pitchFamily="50" charset="-127"/>
+                </a:rPr>
+                <a:t>fn</a:t>
+              </a:r>
+              <a:r>
+                <a:rPr lang="en-US" altLang="ko-KR" sz="750" b="0" dirty="0">
+                  <a:solidFill>
+                    <a:srgbClr val="292929"/>
+                  </a:solidFill>
+                  <a:latin typeface="맑은 고딕" panose="020B0503020000020004" pitchFamily="50" charset="-127"/>
+                </a:rPr>
+                <a:t>": "MAX", "</a:t>
+              </a:r>
+              <a:r>
+                <a:rPr lang="en-US" altLang="ko-KR" sz="750" b="0" dirty="0" err="1">
+                  <a:solidFill>
+                    <a:srgbClr val="292929"/>
+                  </a:solidFill>
+                  <a:latin typeface="맑은 고딕" panose="020B0503020000020004" pitchFamily="50" charset="-127"/>
+                </a:rPr>
+                <a:t>args</a:t>
+              </a:r>
+              <a:r>
+                <a:rPr lang="en-US" altLang="ko-KR" sz="750" b="0" dirty="0">
+                  <a:solidFill>
+                    <a:srgbClr val="292929"/>
+                  </a:solidFill>
+                  <a:latin typeface="맑은 고딕" panose="020B0503020000020004" pitchFamily="50" charset="-127"/>
+                </a:rPr>
+                <a:t>": [{"col": "</a:t>
+              </a:r>
+              <a:r>
+                <a:rPr lang="en-US" altLang="ko-KR" sz="750" b="0" dirty="0" err="1">
+                  <a:solidFill>
+                    <a:srgbClr val="292929"/>
+                  </a:solidFill>
+                  <a:latin typeface="맑은 고딕" panose="020B0503020000020004" pitchFamily="50" charset="-127"/>
+                </a:rPr>
+                <a:t>uman_time</a:t>
+              </a:r>
+              <a:r>
+                <a:rPr lang="en-US" altLang="ko-KR" sz="750" b="0" dirty="0">
+                  <a:solidFill>
+                    <a:srgbClr val="292929"/>
+                  </a:solidFill>
+                  <a:latin typeface="맑은 고딕" panose="020B0503020000020004" pitchFamily="50" charset="-127"/>
+                </a:rPr>
+                <a:t>"}]}, {"</a:t>
+              </a:r>
+              <a:r>
+                <a:rPr lang="en-US" altLang="ko-KR" sz="750" b="0" dirty="0" err="1">
+                  <a:solidFill>
+                    <a:srgbClr val="292929"/>
+                  </a:solidFill>
+                  <a:latin typeface="맑은 고딕" panose="020B0503020000020004" pitchFamily="50" charset="-127"/>
+                </a:rPr>
+                <a:t>fn</a:t>
+              </a:r>
+              <a:r>
+                <a:rPr lang="en-US" altLang="ko-KR" sz="750" b="0" dirty="0">
+                  <a:solidFill>
+                    <a:srgbClr val="292929"/>
+                  </a:solidFill>
+                  <a:latin typeface="맑은 고딕" panose="020B0503020000020004" pitchFamily="50" charset="-127"/>
+                </a:rPr>
+                <a:t>": "MIN", "</a:t>
+              </a:r>
+              <a:r>
+                <a:rPr lang="en-US" altLang="ko-KR" sz="750" b="0" dirty="0" err="1">
+                  <a:solidFill>
+                    <a:srgbClr val="292929"/>
+                  </a:solidFill>
+                  <a:latin typeface="맑은 고딕" panose="020B0503020000020004" pitchFamily="50" charset="-127"/>
+                </a:rPr>
+                <a:t>args</a:t>
+              </a:r>
+              <a:r>
+                <a:rPr lang="en-US" altLang="ko-KR" sz="750" b="0" dirty="0">
+                  <a:solidFill>
+                    <a:srgbClr val="292929"/>
+                  </a:solidFill>
+                  <a:latin typeface="맑은 고딕" panose="020B0503020000020004" pitchFamily="50" charset="-127"/>
+                </a:rPr>
+                <a:t>": [{"col": "</a:t>
+              </a:r>
+              <a:r>
+                <a:rPr lang="en-US" altLang="ko-KR" sz="750" b="0" dirty="0" err="1">
+                  <a:solidFill>
+                    <a:srgbClr val="292929"/>
+                  </a:solidFill>
+                  <a:latin typeface="맑은 고딕" panose="020B0503020000020004" pitchFamily="50" charset="-127"/>
+                </a:rPr>
+                <a:t>uman_time</a:t>
+              </a:r>
+              <a:r>
+                <a:rPr lang="en-US" altLang="ko-KR" sz="750" b="0" dirty="0">
+                  <a:solidFill>
+                    <a:srgbClr val="292929"/>
+                  </a:solidFill>
+                  <a:latin typeface="맑은 고딕" panose="020B0503020000020004" pitchFamily="50" charset="-127"/>
+                </a:rPr>
+                <a:t>"}]}]}}], "</a:t>
+              </a:r>
+              <a:r>
+                <a:rPr lang="en-US" altLang="ko-KR" sz="750" b="0" dirty="0" err="1">
+                  <a:solidFill>
+                    <a:srgbClr val="292929"/>
+                  </a:solidFill>
+                  <a:latin typeface="맑은 고딕" panose="020B0503020000020004" pitchFamily="50" charset="-127"/>
+                </a:rPr>
+                <a:t>group_by</a:t>
+              </a:r>
+              <a:r>
+                <a:rPr lang="en-US" altLang="ko-KR" sz="750" b="0" dirty="0">
+                  <a:solidFill>
+                    <a:srgbClr val="292929"/>
+                  </a:solidFill>
+                  <a:latin typeface="맑은 고딕" panose="020B0503020000020004" pitchFamily="50" charset="-127"/>
+                </a:rPr>
+                <a:t>": [{"</a:t>
+              </a:r>
+              <a:r>
+                <a:rPr lang="en-US" altLang="ko-KR" sz="750" b="0" dirty="0" err="1">
+                  <a:solidFill>
+                    <a:srgbClr val="292929"/>
+                  </a:solidFill>
+                  <a:latin typeface="맑은 고딕" panose="020B0503020000020004" pitchFamily="50" charset="-127"/>
+                </a:rPr>
+                <a:t>fn</a:t>
+              </a:r>
+              <a:r>
+                <a:rPr lang="en-US" altLang="ko-KR" sz="750" b="0" dirty="0">
+                  <a:solidFill>
+                    <a:srgbClr val="292929"/>
+                  </a:solidFill>
+                  <a:latin typeface="맑은 고딕" panose="020B0503020000020004" pitchFamily="50" charset="-127"/>
+                </a:rPr>
+                <a:t>": "DATE", "</a:t>
+              </a:r>
+              <a:r>
+                <a:rPr lang="en-US" altLang="ko-KR" sz="750" b="0" dirty="0" err="1">
+                  <a:solidFill>
+                    <a:srgbClr val="292929"/>
+                  </a:solidFill>
+                  <a:latin typeface="맑은 고딕" panose="020B0503020000020004" pitchFamily="50" charset="-127"/>
+                </a:rPr>
+                <a:t>args</a:t>
+              </a:r>
+              <a:r>
+                <a:rPr lang="en-US" altLang="ko-KR" sz="750" b="0" dirty="0">
+                  <a:solidFill>
+                    <a:srgbClr val="292929"/>
+                  </a:solidFill>
+                  <a:latin typeface="맑은 고딕" panose="020B0503020000020004" pitchFamily="50" charset="-127"/>
+                </a:rPr>
+                <a:t>": [{"col": "</a:t>
+              </a:r>
+              <a:r>
+                <a:rPr lang="en-US" altLang="ko-KR" sz="750" b="0" dirty="0" err="1">
+                  <a:solidFill>
+                    <a:srgbClr val="292929"/>
+                  </a:solidFill>
+                  <a:latin typeface="맑은 고딕" panose="020B0503020000020004" pitchFamily="50" charset="-127"/>
+                </a:rPr>
+                <a:t>collect_datetime</a:t>
+              </a:r>
+              <a:r>
+                <a:rPr lang="en-US" altLang="ko-KR" sz="750" b="0" dirty="0">
+                  <a:solidFill>
+                    <a:srgbClr val="292929"/>
+                  </a:solidFill>
+                  <a:latin typeface="맑은 고딕" panose="020B0503020000020004" pitchFamily="50" charset="-127"/>
+                </a:rPr>
+                <a:t>"}]}, {"col": "</a:t>
+              </a:r>
+              <a:r>
+                <a:rPr lang="en-US" altLang="ko-KR" sz="750" b="0" dirty="0" err="1">
+                  <a:solidFill>
+                    <a:srgbClr val="292929"/>
+                  </a:solidFill>
+                  <a:latin typeface="맑은 고딕" panose="020B0503020000020004" pitchFamily="50" charset="-127"/>
+                </a:rPr>
+                <a:t>vehicle_id</a:t>
+              </a:r>
+              <a:r>
+                <a:rPr lang="en-US" altLang="ko-KR" sz="750" b="0" dirty="0">
+                  <a:solidFill>
+                    <a:srgbClr val="292929"/>
+                  </a:solidFill>
+                  <a:latin typeface="맑은 고딕" panose="020B0503020000020004" pitchFamily="50" charset="-127"/>
+                </a:rPr>
+                <a:t>"}]}</a:t>
               </a:r>
             </a:p>
             <a:p>
-              <a:endParaRPr lang="en-US" altLang="ko-KR" sz="750" b="0">
+              <a:r>
+                <a:rPr lang="en-US" altLang="ko-KR" sz="750" b="0" dirty="0">
+                  <a:solidFill>
+                    <a:srgbClr val="292929"/>
+                  </a:solidFill>
+                  <a:latin typeface="맑은 고딕" panose="020B0503020000020004" pitchFamily="50" charset="-127"/>
+                </a:rPr>
+                <a:t>이 </a:t>
+              </a:r>
+              <a:r>
+                <a:rPr lang="en-US" altLang="ko-KR" sz="750" b="0" dirty="0" err="1">
+                  <a:solidFill>
+                    <a:srgbClr val="292929"/>
+                  </a:solidFill>
+                  <a:latin typeface="맑은 고딕" panose="020B0503020000020004" pitchFamily="50" charset="-127"/>
+                </a:rPr>
+                <a:t>지표의</a:t>
+              </a:r>
+              <a:r>
+                <a:rPr lang="en-US" altLang="ko-KR" sz="750" b="0" dirty="0">
+                  <a:solidFill>
+                    <a:srgbClr val="292929"/>
+                  </a:solidFill>
+                  <a:latin typeface="맑은 고딕" panose="020B0503020000020004" pitchFamily="50" charset="-127"/>
+                </a:rPr>
+                <a:t> AST 를 </a:t>
+              </a:r>
+              <a:r>
+                <a:rPr lang="en-US" altLang="ko-KR" sz="750" b="0" dirty="0" err="1">
+                  <a:solidFill>
+                    <a:srgbClr val="292929"/>
+                  </a:solidFill>
+                  <a:latin typeface="맑은 고딕" panose="020B0503020000020004" pitchFamily="50" charset="-127"/>
+                </a:rPr>
+                <a:t>바탕으로</a:t>
+              </a:r>
+              <a:r>
+                <a:rPr lang="en-US" altLang="ko-KR" sz="750" b="0" dirty="0">
+                  <a:solidFill>
+                    <a:srgbClr val="292929"/>
+                  </a:solidFill>
+                  <a:latin typeface="맑은 고딕" panose="020B0503020000020004" pitchFamily="50" charset="-127"/>
+                </a:rPr>
+                <a:t> </a:t>
+              </a:r>
+              <a:r>
+                <a:rPr lang="en-US" altLang="ko-KR" sz="750" b="0" dirty="0" err="1">
+                  <a:solidFill>
+                    <a:srgbClr val="292929"/>
+                  </a:solidFill>
+                  <a:latin typeface="맑은 고딕" panose="020B0503020000020004" pitchFamily="50" charset="-127"/>
+                </a:rPr>
+                <a:t>질문에</a:t>
+              </a:r>
+              <a:r>
+                <a:rPr lang="en-US" altLang="ko-KR" sz="750" b="0" dirty="0">
+                  <a:solidFill>
+                    <a:srgbClr val="292929"/>
+                  </a:solidFill>
+                  <a:latin typeface="맑은 고딕" panose="020B0503020000020004" pitchFamily="50" charset="-127"/>
+                </a:rPr>
+                <a:t> </a:t>
+              </a:r>
+              <a:r>
+                <a:rPr lang="en-US" altLang="ko-KR" sz="750" b="0" dirty="0" err="1">
+                  <a:solidFill>
+                    <a:srgbClr val="292929"/>
+                  </a:solidFill>
+                  <a:latin typeface="맑은 고딕" panose="020B0503020000020004" pitchFamily="50" charset="-127"/>
+                </a:rPr>
+                <a:t>맞게</a:t>
+              </a:r>
+              <a:r>
+                <a:rPr lang="en-US" altLang="ko-KR" sz="750" b="0" dirty="0">
+                  <a:solidFill>
+                    <a:srgbClr val="292929"/>
+                  </a:solidFill>
+                  <a:latin typeface="맑은 고딕" panose="020B0503020000020004" pitchFamily="50" charset="-127"/>
+                </a:rPr>
+                <a:t> </a:t>
+              </a:r>
+              <a:r>
+                <a:rPr lang="en-US" altLang="ko-KR" sz="750" b="0" dirty="0" err="1">
+                  <a:solidFill>
+                    <a:srgbClr val="292929"/>
+                  </a:solidFill>
+                  <a:latin typeface="맑은 고딕" panose="020B0503020000020004" pitchFamily="50" charset="-127"/>
+                </a:rPr>
+                <a:t>기간·조건·묶음·정렬·개수만</a:t>
+              </a:r>
+              <a:r>
+                <a:rPr lang="en-US" altLang="ko-KR" sz="750" b="0" dirty="0">
+                  <a:solidFill>
+                    <a:srgbClr val="292929"/>
+                  </a:solidFill>
+                  <a:latin typeface="맑은 고딕" panose="020B0503020000020004" pitchFamily="50" charset="-127"/>
+                </a:rPr>
+                <a:t> </a:t>
+              </a:r>
+              <a:r>
+                <a:rPr lang="en-US" altLang="ko-KR" sz="750" b="0" dirty="0" err="1">
+                  <a:solidFill>
+                    <a:srgbClr val="292929"/>
+                  </a:solidFill>
+                  <a:latin typeface="맑은 고딕" panose="020B0503020000020004" pitchFamily="50" charset="-127"/>
+                </a:rPr>
+                <a:t>바꾸십시오</a:t>
+              </a:r>
+              <a:r>
+                <a:rPr lang="en-US" altLang="ko-KR" sz="750" b="0" dirty="0">
+                  <a:solidFill>
+                    <a:srgbClr val="292929"/>
+                  </a:solidFill>
+                  <a:latin typeface="맑은 고딕" panose="020B0503020000020004" pitchFamily="50" charset="-127"/>
+                </a:rPr>
+                <a:t>. </a:t>
+              </a:r>
+              <a:r>
+                <a:rPr lang="en-US" altLang="ko-KR" sz="750" b="0" dirty="0" err="1">
+                  <a:solidFill>
+                    <a:srgbClr val="292929"/>
+                  </a:solidFill>
+                  <a:latin typeface="맑은 고딕" panose="020B0503020000020004" pitchFamily="50" charset="-127"/>
+                </a:rPr>
+                <a:t>계산</a:t>
+              </a:r>
+              <a:r>
+                <a:rPr lang="en-US" altLang="ko-KR" sz="750" b="0" dirty="0">
+                  <a:solidFill>
+                    <a:srgbClr val="292929"/>
+                  </a:solidFill>
+                  <a:latin typeface="맑은 고딕" panose="020B0503020000020004" pitchFamily="50" charset="-127"/>
+                </a:rPr>
+                <a:t> </a:t>
+              </a:r>
+              <a:r>
+                <a:rPr lang="en-US" altLang="ko-KR" sz="750" b="0" dirty="0" err="1">
+                  <a:solidFill>
+                    <a:srgbClr val="292929"/>
+                  </a:solidFill>
+                  <a:latin typeface="맑은 고딕" panose="020B0503020000020004" pitchFamily="50" charset="-127"/>
+                </a:rPr>
+                <a:t>부분</a:t>
+              </a:r>
+              <a:r>
+                <a:rPr lang="en-US" altLang="ko-KR" sz="750" b="0" dirty="0">
+                  <a:solidFill>
+                    <a:srgbClr val="292929"/>
+                  </a:solidFill>
+                  <a:latin typeface="맑은 고딕" panose="020B0503020000020004" pitchFamily="50" charset="-127"/>
+                </a:rPr>
+                <a:t>(select 의 식)은 </a:t>
+              </a:r>
+              <a:r>
+                <a:rPr lang="en-US" altLang="ko-KR" sz="750" b="0" dirty="0" err="1">
+                  <a:solidFill>
+                    <a:srgbClr val="292929"/>
+                  </a:solidFill>
+                  <a:latin typeface="맑은 고딕" panose="020B0503020000020004" pitchFamily="50" charset="-127"/>
+                </a:rPr>
+                <a:t>그대로</a:t>
+              </a:r>
+              <a:r>
+                <a:rPr lang="en-US" altLang="ko-KR" sz="750" b="0" dirty="0">
+                  <a:solidFill>
+                    <a:srgbClr val="292929"/>
+                  </a:solidFill>
+                  <a:latin typeface="맑은 고딕" panose="020B0503020000020004" pitchFamily="50" charset="-127"/>
+                </a:rPr>
+                <a:t> </a:t>
+              </a:r>
+              <a:r>
+                <a:rPr lang="en-US" altLang="ko-KR" sz="750" b="0" dirty="0" err="1">
+                  <a:solidFill>
+                    <a:srgbClr val="292929"/>
+                  </a:solidFill>
+                  <a:latin typeface="맑은 고딕" panose="020B0503020000020004" pitchFamily="50" charset="-127"/>
+                </a:rPr>
+                <a:t>둡니다</a:t>
+              </a:r>
+              <a:r>
+                <a:rPr lang="en-US" altLang="ko-KR" sz="750" b="0" dirty="0">
+                  <a:solidFill>
+                    <a:srgbClr val="292929"/>
+                  </a:solidFill>
+                  <a:latin typeface="맑은 고딕" panose="020B0503020000020004" pitchFamily="50" charset="-127"/>
+                </a:rPr>
+                <a:t>.</a:t>
+              </a:r>
+            </a:p>
+            <a:p>
+              <a:endParaRPr lang="en-US" altLang="ko-KR" sz="750" b="0" dirty="0">
                 <a:solidFill>
                   <a:srgbClr val="292929"/>
                 </a:solidFill>
@@ -15689,25 +17852,121 @@
             </a:p>
             <a:p>
               <a:r>
-                <a:rPr lang="en-US" altLang="ko-KR" sz="750" b="0">
+                <a:rPr lang="en-US" altLang="ko-KR" sz="750" b="0" dirty="0">
                   <a:solidFill>
                     <a:srgbClr val="292929"/>
                   </a:solidFill>
                   <a:latin typeface="맑은 고딕" panose="020B0503020000020004" pitchFamily="50" charset="-127"/>
                 </a:rPr>
-                <a:t>[질문]</a:t>
+                <a:t>[</a:t>
               </a:r>
-            </a:p>
-            <a:p>
               <a:r>
-                <a:rPr lang="en-US" altLang="ko-KR" sz="750" b="0">
+                <a:rPr lang="en-US" altLang="ko-KR" sz="750" b="0" dirty="0" err="1">
                   <a:solidFill>
                     <a:srgbClr val="292929"/>
                   </a:solidFill>
                   <a:latin typeface="맑은 고딕" panose="020B0503020000020004" pitchFamily="50" charset="-127"/>
                 </a:rPr>
-                <a:t>최근 5일 차량별 무인 가동시간 합계</a:t>
+                <a:t>질문</a:t>
               </a:r>
+              <a:r>
+                <a:rPr lang="en-US" altLang="ko-KR" sz="750" b="0" dirty="0">
+                  <a:solidFill>
+                    <a:srgbClr val="292929"/>
+                  </a:solidFill>
+                  <a:latin typeface="맑은 고딕" panose="020B0503020000020004" pitchFamily="50" charset="-127"/>
+                </a:rPr>
+                <a:t>]</a:t>
+              </a:r>
+            </a:p>
+            <a:p>
+              <a:r>
+                <a:rPr lang="en-US" altLang="ko-KR" sz="750" b="0" dirty="0" err="1">
+                  <a:solidFill>
+                    <a:srgbClr val="292929"/>
+                  </a:solidFill>
+                  <a:latin typeface="맑은 고딕" panose="020B0503020000020004" pitchFamily="50" charset="-127"/>
+                </a:rPr>
+                <a:t>최근</a:t>
+              </a:r>
+              <a:r>
+                <a:rPr lang="en-US" altLang="ko-KR" sz="750" b="0" dirty="0">
+                  <a:solidFill>
+                    <a:srgbClr val="292929"/>
+                  </a:solidFill>
+                  <a:latin typeface="맑은 고딕" panose="020B0503020000020004" pitchFamily="50" charset="-127"/>
+                </a:rPr>
+                <a:t> 5일 </a:t>
+              </a:r>
+              <a:r>
+                <a:rPr lang="en-US" altLang="ko-KR" sz="750" b="0" dirty="0" err="1">
+                  <a:solidFill>
+                    <a:srgbClr val="292929"/>
+                  </a:solidFill>
+                  <a:latin typeface="맑은 고딕" panose="020B0503020000020004" pitchFamily="50" charset="-127"/>
+                </a:rPr>
+                <a:t>차량별</a:t>
+              </a:r>
+              <a:r>
+                <a:rPr lang="en-US" altLang="ko-KR" sz="750" b="0" dirty="0">
+                  <a:solidFill>
+                    <a:srgbClr val="292929"/>
+                  </a:solidFill>
+                  <a:latin typeface="맑은 고딕" panose="020B0503020000020004" pitchFamily="50" charset="-127"/>
+                </a:rPr>
+                <a:t> </a:t>
+              </a:r>
+              <a:r>
+                <a:rPr lang="en-US" altLang="ko-KR" sz="750" b="0" dirty="0" err="1">
+                  <a:solidFill>
+                    <a:srgbClr val="292929"/>
+                  </a:solidFill>
+                  <a:latin typeface="맑은 고딕" panose="020B0503020000020004" pitchFamily="50" charset="-127"/>
+                </a:rPr>
+                <a:t>무인</a:t>
+              </a:r>
+              <a:r>
+                <a:rPr lang="en-US" altLang="ko-KR" sz="750" b="0" dirty="0">
+                  <a:solidFill>
+                    <a:srgbClr val="292929"/>
+                  </a:solidFill>
+                  <a:latin typeface="맑은 고딕" panose="020B0503020000020004" pitchFamily="50" charset="-127"/>
+                </a:rPr>
+                <a:t> </a:t>
+              </a:r>
+              <a:r>
+                <a:rPr lang="en-US" altLang="ko-KR" sz="750" b="0" dirty="0" err="1">
+                  <a:solidFill>
+                    <a:srgbClr val="292929"/>
+                  </a:solidFill>
+                  <a:latin typeface="맑은 고딕" panose="020B0503020000020004" pitchFamily="50" charset="-127"/>
+                </a:rPr>
+                <a:t>가동시간</a:t>
+              </a:r>
+              <a:r>
+                <a:rPr lang="en-US" altLang="ko-KR" sz="750" b="0" dirty="0">
+                  <a:solidFill>
+                    <a:srgbClr val="292929"/>
+                  </a:solidFill>
+                  <a:latin typeface="맑은 고딕" panose="020B0503020000020004" pitchFamily="50" charset="-127"/>
+                </a:rPr>
+                <a:t> </a:t>
+              </a:r>
+              <a:r>
+                <a:rPr lang="en-US" altLang="ko-KR" sz="750" b="0" dirty="0" err="1">
+                  <a:solidFill>
+                    <a:srgbClr val="292929"/>
+                  </a:solidFill>
+                  <a:latin typeface="맑은 고딕" panose="020B0503020000020004" pitchFamily="50" charset="-127"/>
+                </a:rPr>
+                <a:t>합계</a:t>
+              </a:r>
+              <a:endParaRPr lang="en-US" altLang="ko-KR" sz="750" b="0" dirty="0">
+                <a:solidFill>
+                  <a:srgbClr val="292929"/>
+                </a:solidFill>
+                <a:latin typeface="맑은 고딕" panose="020B0503020000020004" pitchFamily="50" charset="-127"/>
+              </a:endParaRPr>
             </a:p>
           </p:txBody>
         </p:sp>
@@ -16663,7 +18922,71 @@
                   <a:schemeClr val="bg1"/>
                 </a:solidFill>
               </a:rPr>
-              <a:t>테이블 선택 · 지표 판단</a:t>
+              <a:t>테이블</a:t>
+            </a:r>
+            <a:r>
+              <a:rPr lang="en-US" sz="1100" b="1" dirty="0">
+                <a:solidFill>
+                  <a:schemeClr val="bg1"/>
+                </a:solidFill>
+              </a:rPr>
+              <a:t> </a:t>
+            </a:r>
+            <a:r>
+              <a:rPr lang="en-US" sz="1100" b="1" dirty="0" err="1">
+                <a:solidFill>
+                  <a:schemeClr val="bg1"/>
+                </a:solidFill>
+              </a:rPr>
+              <a:t>선택</a:t>
+            </a:r>
+            <a:r>
+              <a:rPr lang="en-US" sz="1100" b="1" dirty="0">
+                <a:solidFill>
+                  <a:schemeClr val="bg1"/>
+                </a:solidFill>
+              </a:rPr>
+              <a:t> </a:t>
+            </a:r>
+            <a:r>
+              <a:rPr lang="ko-KR" altLang="en-US" sz="1100" b="1" dirty="0">
+                <a:solidFill>
+                  <a:schemeClr val="bg1"/>
+                </a:solidFill>
+              </a:rPr>
+              <a:t>및</a:t>
+            </a:r>
+            <a:r>
+              <a:rPr lang="en-US" sz="1100" b="1" dirty="0">
+                <a:solidFill>
+                  <a:schemeClr val="bg1"/>
+                </a:solidFill>
+              </a:rPr>
+              <a:t> </a:t>
+            </a:r>
+            <a:r>
+              <a:rPr lang="en-US" sz="1100" b="1" dirty="0" err="1">
+                <a:solidFill>
+                  <a:schemeClr val="bg1"/>
+                </a:solidFill>
+              </a:rPr>
+              <a:t>지표</a:t>
+            </a:r>
+            <a:r>
+              <a:rPr lang="en-US" sz="1100" b="1" dirty="0">
+                <a:solidFill>
+                  <a:schemeClr val="bg1"/>
+                </a:solidFill>
+              </a:rPr>
+              <a:t> </a:t>
+            </a:r>
+            <a:r>
+              <a:rPr lang="en-US" sz="1100" b="1" dirty="0" err="1">
+                <a:solidFill>
+                  <a:schemeClr val="bg1"/>
+                </a:solidFill>
+              </a:rPr>
+              <a:t>판단</a:t>
             </a:r>
             <a:endParaRPr lang="en-US" sz="1100" dirty="0"/>
           </a:p>
@@ -24094,13 +26417,43 @@
         <a:graphic>
           <a:graphicData uri="http://schemas.openxmlformats.org/drawingml/2006/table">
             <a:tbl>
-              <a:tblPr firstRow="0" bandRow="0"/>
+              <a:tblPr/>
               <a:tblGrid>
-                <a:gridCol w="365760"/>
-                <a:gridCol w="914400"/>
-                <a:gridCol w="2834640"/>
-                <a:gridCol w="3246120"/>
-                <a:gridCol w="411480"/>
+                <a:gridCol w="365760">
+                  <a:extLst>
+                    <a:ext uri="{9D8B030D-6E8A-4147-A177-3AD203B41FA5}">
+                      <a16:colId xmlns:a16="http://schemas.microsoft.com/office/drawing/2014/main" val="20000"/>
+                    </a:ext>
+                  </a:extLst>
+                </a:gridCol>
+                <a:gridCol w="914400">
+                  <a:extLst>
+                    <a:ext uri="{9D8B030D-6E8A-4147-A177-3AD203B41FA5}">
+                      <a16:colId xmlns:a16="http://schemas.microsoft.com/office/drawing/2014/main" val="20001"/>
+                    </a:ext>
+                  </a:extLst>
+                </a:gridCol>
+                <a:gridCol w="2834640">
+                  <a:extLst>
+                    <a:ext uri="{9D8B030D-6E8A-4147-A177-3AD203B41FA5}">
+                      <a16:colId xmlns:a16="http://schemas.microsoft.com/office/drawing/2014/main" val="20002"/>
+                    </a:ext>
+                  </a:extLst>
+                </a:gridCol>
+                <a:gridCol w="3246120">
+                  <a:extLst>
+                    <a:ext uri="{9D8B030D-6E8A-4147-A177-3AD203B41FA5}">
+                      <a16:colId xmlns:a16="http://schemas.microsoft.com/office/drawing/2014/main" val="20003"/>
+                    </a:ext>
+                  </a:extLst>
+                </a:gridCol>
+                <a:gridCol w="411480">
+                  <a:extLst>
+                    <a:ext uri="{9D8B030D-6E8A-4147-A177-3AD203B41FA5}">
+                      <a16:colId xmlns:a16="http://schemas.microsoft.com/office/drawing/2014/main" val="20004"/>
+                    </a:ext>
+                  </a:extLst>
+                </a:gridCol>
               </a:tblGrid>
               <a:tr h="307238">
                 <a:tc>
@@ -24313,6 +26666,11 @@
                     </a:solidFill>
                   </a:tcPr>
                 </a:tc>
+                <a:extLst>
+                  <a:ext uri="{0D108BD9-81ED-4DB2-BD59-A6C34878D82A}">
+                    <a16:rowId xmlns:a16="http://schemas.microsoft.com/office/drawing/2014/main" val="10000"/>
+                  </a:ext>
+                </a:extLst>
               </a:tr>
               <a:tr h="307238">
                 <a:tc>
@@ -24525,6 +26883,11 @@
                     </a:solidFill>
                   </a:tcPr>
                 </a:tc>
+                <a:extLst>
+                  <a:ext uri="{0D108BD9-81ED-4DB2-BD59-A6C34878D82A}">
+                    <a16:rowId xmlns:a16="http://schemas.microsoft.com/office/drawing/2014/main" val="10001"/>
+                  </a:ext>
+                </a:extLst>
               </a:tr>
               <a:tr h="307238">
                 <a:tc>
@@ -24737,6 +27100,11 @@
                     </a:solidFill>
                   </a:tcPr>
                 </a:tc>
+                <a:extLst>
+                  <a:ext uri="{0D108BD9-81ED-4DB2-BD59-A6C34878D82A}">
+                    <a16:rowId xmlns:a16="http://schemas.microsoft.com/office/drawing/2014/main" val="10002"/>
+                  </a:ext>
+                </a:extLst>
               </a:tr>
               <a:tr h="307238">
                 <a:tc>
@@ -24949,6 +27317,11 @@
                     </a:solidFill>
                   </a:tcPr>
                 </a:tc>
+                <a:extLst>
+                  <a:ext uri="{0D108BD9-81ED-4DB2-BD59-A6C34878D82A}">
+                    <a16:rowId xmlns:a16="http://schemas.microsoft.com/office/drawing/2014/main" val="10003"/>
+                  </a:ext>
+                </a:extLst>
               </a:tr>
               <a:tr h="307238">
                 <a:tc>
@@ -25161,6 +27534,11 @@
                     </a:solidFill>
                   </a:tcPr>
                 </a:tc>
+                <a:extLst>
+                  <a:ext uri="{0D108BD9-81ED-4DB2-BD59-A6C34878D82A}">
+                    <a16:rowId xmlns:a16="http://schemas.microsoft.com/office/drawing/2014/main" val="10004"/>
+                  </a:ext>
+                </a:extLst>
               </a:tr>
               <a:tr h="307238">
                 <a:tc>
@@ -25373,6 +27751,11 @@
                     </a:solidFill>
                   </a:tcPr>
                 </a:tc>
+                <a:extLst>
+                  <a:ext uri="{0D108BD9-81ED-4DB2-BD59-A6C34878D82A}">
+                    <a16:rowId xmlns:a16="http://schemas.microsoft.com/office/drawing/2014/main" val="10005"/>
+                  </a:ext>
+                </a:extLst>
               </a:tr>
               <a:tr h="307238">
                 <a:tc>
@@ -25585,6 +27968,11 @@
                     </a:solidFill>
                   </a:tcPr>
                 </a:tc>
+                <a:extLst>
+                  <a:ext uri="{0D108BD9-81ED-4DB2-BD59-A6C34878D82A}">
+                    <a16:rowId xmlns:a16="http://schemas.microsoft.com/office/drawing/2014/main" val="10006"/>
+                  </a:ext>
+                </a:extLst>
               </a:tr>
               <a:tr h="307238">
                 <a:tc>
@@ -25797,6 +28185,11 @@
                     </a:solidFill>
                   </a:tcPr>
                 </a:tc>
+                <a:extLst>
+                  <a:ext uri="{0D108BD9-81ED-4DB2-BD59-A6C34878D82A}">
+                    <a16:rowId xmlns:a16="http://schemas.microsoft.com/office/drawing/2014/main" val="10007"/>
+                  </a:ext>
+                </a:extLst>
               </a:tr>
               <a:tr h="307238">
                 <a:tc>
@@ -26009,6 +28402,11 @@
                     </a:solidFill>
                   </a:tcPr>
                 </a:tc>
+                <a:extLst>
+                  <a:ext uri="{0D108BD9-81ED-4DB2-BD59-A6C34878D82A}">
+                    <a16:rowId xmlns:a16="http://schemas.microsoft.com/office/drawing/2014/main" val="10008"/>
+                  </a:ext>
+                </a:extLst>
               </a:tr>
               <a:tr h="307238">
                 <a:tc>
@@ -26221,6 +28619,11 @@
                     </a:solidFill>
                   </a:tcPr>
                 </a:tc>
+                <a:extLst>
+                  <a:ext uri="{0D108BD9-81ED-4DB2-BD59-A6C34878D82A}">
+                    <a16:rowId xmlns:a16="http://schemas.microsoft.com/office/drawing/2014/main" val="10009"/>
+                  </a:ext>
+                </a:extLst>
               </a:tr>
               <a:tr h="307238">
                 <a:tc>
@@ -26433,6 +28836,11 @@
                     </a:solidFill>
                   </a:tcPr>
                 </a:tc>
+                <a:extLst>
+                  <a:ext uri="{0D108BD9-81ED-4DB2-BD59-A6C34878D82A}">
+                    <a16:rowId xmlns:a16="http://schemas.microsoft.com/office/drawing/2014/main" val="10010"/>
+                  </a:ext>
+                </a:extLst>
               </a:tr>
             </a:tbl>
           </a:graphicData>
@@ -26440,7 +28848,7 @@
       </p:graphicFrame>
       <p:sp>
         <p:nvSpPr>
-          <p:cNvPr id="103" name="답변 머리"/>
+          <p:cNvPr id="4" name="답변 머리"/>
           <p:cNvSpPr/>
           <p:nvPr/>
         </p:nvSpPr>
@@ -27459,7 +29867,7 @@
         <p:spPr>
           <a:xfrm>
             <a:off x="896112" y="4599432"/>
-            <a:ext cx="3017520" cy="280077"/>
+            <a:ext cx="3017520" cy="449354"/>
           </a:xfrm>
           <a:prstGeom prst="rect">
             <a:avLst/>
@@ -27478,12 +29886,20 @@
               </a:spcAft>
             </a:pPr>
             <a:r>
+              <a:rPr lang="ko-KR" altLang="en-US" sz="1100" dirty="0">
+                <a:solidFill>
+                  <a:schemeClr val="tx2"/>
+                </a:solidFill>
+              </a:rPr>
+              <a:t>테이블 및 컬럼</a:t>
+            </a:r>
+            <a:r>
               <a:rPr lang="ko-KR" altLang="en-US" sz="1100" b="0" dirty="0">
                 <a:solidFill>
                   <a:schemeClr val="tx2"/>
                 </a:solidFill>
               </a:rPr>
-              <a:t>지표 후보의 과다로 인한 선택의 어려움</a:t>
+              <a:t> 후보의 과다로 인한 선택의 어려움</a:t>
             </a:r>
           </a:p>
         </p:txBody>
@@ -30895,7 +33311,7 @@
           <p:nvPr>
             <p:extLst>
               <p:ext uri="{D42A27DB-BD31-4B8C-83A1-F6EECF244321}">
-                <p14:modId xmlns:p14="http://schemas.microsoft.com/office/powerpoint/2010/main" val="2703545608"/>
+                <p14:modId xmlns:p14="http://schemas.microsoft.com/office/powerpoint/2010/main" val="445106696"/>
               </p:ext>
             </p:extLst>
           </p:nvPr>
@@ -30968,7 +33384,23 @@
                             <a:schemeClr val="bg1"/>
                           </a:solidFill>
                         </a:rPr>
-                        <a:t>한 번의 검색 (RAG) 후 SQL 생성</a:t>
+                        <a:t>한 번의 </a:t>
+                      </a:r>
+                      <a:r>
+                        <a:rPr lang="ko-KR" altLang="en-US" sz="1200" b="1" dirty="0" err="1">
+                          <a:solidFill>
+                            <a:schemeClr val="bg1"/>
+                          </a:solidFill>
+                        </a:rPr>
+                        <a:t>검색후</a:t>
+                      </a:r>
+                      <a:r>
+                        <a:rPr lang="ko-KR" altLang="en-US" sz="1200" b="1" dirty="0">
+                          <a:solidFill>
+                            <a:schemeClr val="bg1"/>
+                          </a:solidFill>
+                        </a:rPr>
+                        <a:t> SQL 생성</a:t>
                       </a:r>
                     </a:p>
                   </a:txBody>
@@ -31458,7 +33890,7 @@
               </a:spcAft>
             </a:pPr>
             <a:r>
-              <a:rPr lang="ko-KR" altLang="en-US" sz="1300" b="1">
+              <a:rPr lang="ko-KR" altLang="en-US" sz="1300" b="1" dirty="0">
                 <a:solidFill>
                   <a:schemeClr val="accent1"/>
                 </a:solidFill>
@@ -31466,12 +33898,28 @@
               <a:t>운영자가 준비하는 것  </a:t>
             </a:r>
             <a:r>
-              <a:rPr lang="ko-KR" altLang="en-US" sz="1100" b="0">
+              <a:rPr lang="ko-KR" altLang="en-US" sz="1100" b="0" dirty="0">
                 <a:solidFill>
                   <a:schemeClr val="tx2"/>
                 </a:solidFill>
               </a:rPr>
-              <a:t>질문 전에 메타 DB에 미리 등록하는 정보 (상세 구조는 1~3장)</a:t>
+              <a:t>질문 전에 메타 </a:t>
+            </a:r>
+            <a:r>
+              <a:rPr lang="ko-KR" altLang="en-US" sz="1100" b="0" dirty="0" err="1">
+                <a:solidFill>
+                  <a:schemeClr val="tx2"/>
+                </a:solidFill>
+              </a:rPr>
+              <a:t>DB에</a:t>
+            </a:r>
+            <a:r>
+              <a:rPr lang="ko-KR" altLang="en-US" sz="1100" b="0" dirty="0">
+                <a:solidFill>
+                  <a:schemeClr val="tx2"/>
+                </a:solidFill>
+              </a:rPr>
+              <a:t> 미리 등록하는 정보 (상세 구조는 1~3장)</a:t>
             </a:r>
           </a:p>
         </p:txBody>

--- a/docs/NL2SQL-메타정보-설계.pptx
+++ b/docs/NL2SQL-메타정보-설계.pptx
@@ -25,6 +25,8 @@
     <p:sldId id="261" r:id="rId16"/>
     <p:sldId id="271" r:id="rId17"/>
     <p:sldId id="272" r:id="rId18"/>
+    <p:sldId id="273" r:id="rId26"/>
+    <p:sldId id="274" r:id="rId27"/>
   </p:sldIdLst>
   <p:sldSz cx="12192000" cy="6858000"/>
   <p:notesSz cx="6858000" cy="12192000"/>
@@ -21621,6 +21623,28 @@
               <a:t>  (60초 제한)</a:t>
             </a:r>
           </a:p>
+          <a:p>
+            <a:pPr algn="l"/>
+            <a:r>
+              <a:rPr sz="950" b="0" dirty="0">
+                <a:solidFill>
+                  <a:schemeClr val="tx1"/>
+                </a:solidFill>
+              </a:rPr>
+              <a:t>  지표 초안 값 샘플은 인덱스 조회만,</a:t>
+            </a:r>
+          </a:p>
+          <a:p>
+            <a:pPr algn="l"/>
+            <a:r>
+              <a:rPr sz="950" b="0" dirty="0">
+                <a:solidFill>
+                  <a:schemeClr val="tx1"/>
+                </a:solidFill>
+              </a:rPr>
+              <a:t>  EXPLAIN 확인 후 실행 (10초 제한)</a:t>
+            </a:r>
+          </a:p>
         </p:txBody>
       </p:sp>
       <p:sp>
@@ -22532,7 +22556,7 @@
                   <a:schemeClr val="tx2"/>
                 </a:solidFill>
               </a:rPr>
-              <a:t>※ 현재는 SQL 생성까지 구현 (대상 DB 실행은 지표 등록 검증만). 질문 쿼리 전송·DB 조회는 설계안(TO-BE).</a:t>
+              <a:t>※ 현재는 SQL 생성까지 구현 (대상 DB 실행은 지표 등록 검증과 지표 초안 값 샘플만). 질문 쿼리 전송, DB 조회는 설계안(TO-BE).</a:t>
             </a:r>
           </a:p>
         </p:txBody>
@@ -29280,6 +29304,3507 @@
     <p:extLst>
       <p:ext uri="{BB962C8B-B14F-4D97-AF65-F5344CB8AC3E}">
         <p14:creationId xmlns:p14="http://schemas.microsoft.com/office/powerpoint/2010/main" val="1574635612"/>
+      </p:ext>
+    </p:extLst>
+  </p:cSld>
+  <p:clrMapOvr>
+    <a:masterClrMapping/>
+  </p:clrMapOvr>
+</p:sld>
+</file>
+
+<file path=ppt/slides/slide18.xml><?xml version="1.0" encoding="utf-8"?>
+<p:sld xmlns:a="http://schemas.openxmlformats.org/drawingml/2006/main" xmlns:r="http://schemas.openxmlformats.org/officeDocument/2006/relationships" xmlns:p="http://schemas.openxmlformats.org/presentationml/2006/main">
+  <p:cSld>
+    <p:spTree>
+      <p:nvGrpSpPr>
+        <p:cNvPr id="1" name=""/>
+        <p:cNvGrpSpPr/>
+        <p:nvPr/>
+      </p:nvGrpSpPr>
+      <p:grpSpPr>
+        <a:xfrm>
+          <a:off x="0" y="0"/>
+          <a:ext cx="0" cy="0"/>
+          <a:chOff x="0" y="0"/>
+          <a:chExt cx="0" cy="0"/>
+        </a:xfrm>
+      </p:grpSpPr>
+      <p:sp>
+        <p:nvSpPr>
+          <p:cNvPr id="2" name="텍스트 개체 틀 1">
+            <a:extLst>
+              <a:ext uri="{FF2B5EF4-FFF2-40B4-BE49-F238E27FC236}">
+                <a16:creationId xmlns:a16="http://schemas.microsoft.com/office/drawing/2014/main" id="{3B7BCE7D-FC0E-026D-71F7-7511A345826E}"/>
+              </a:ext>
+            </a:extLst>
+          </p:cNvPr>
+          <p:cNvSpPr>
+            <a:spLocks noGrp="1"/>
+          </p:cNvSpPr>
+          <p:nvPr>
+            <p:ph type="body" idx="100"/>
+          </p:nvPr>
+        </p:nvSpPr>
+        <p:spPr/>
+        <p:txBody>
+          <a:bodyPr/>
+          <a:lstStyle/>
+          <a:p>
+            <a:r>
+              <a:rPr dirty="0"/>
+              <a:t>8장  지표 등록 자동화 (1/2)</a:t>
+            </a:r>
+          </a:p>
+        </p:txBody>
+      </p:sp>
+      <p:sp>
+        <p:nvSpPr>
+          <p:cNvPr id="3" name="제목 2">
+            <a:extLst>
+              <a:ext uri="{FF2B5EF4-FFF2-40B4-BE49-F238E27FC236}">
+                <a16:creationId xmlns:a16="http://schemas.microsoft.com/office/drawing/2014/main" id="{54094B4B-8632-B9E4-6566-E997151A3F88}"/>
+              </a:ext>
+            </a:extLst>
+          </p:cNvPr>
+          <p:cNvSpPr>
+            <a:spLocks noGrp="1"/>
+          </p:cNvSpPr>
+          <p:nvPr>
+            <p:ph type="title" idx="101"/>
+          </p:nvPr>
+        </p:nvSpPr>
+        <p:spPr/>
+        <p:txBody>
+          <a:bodyPr/>
+          <a:lstStyle/>
+          <a:p>
+            <a:r>
+              <a:t>지표 초안 생성 과정</a:t>
+            </a:r>
+          </a:p>
+        </p:txBody>
+      </p:sp>
+      <p:sp>
+        <p:nvSpPr>
+          <p:cNvPr id="4" name="사용자 질문"/>
+          <p:cNvSpPr/>
+          <p:nvPr/>
+        </p:nvSpPr>
+        <p:spPr>
+          <a:xfrm>
+            <a:off x="365760" y="932688"/>
+            <a:ext cx="11457432" cy="365760"/>
+          </a:xfrm>
+          <a:prstGeom prst="roundRect">
+            <a:avLst>
+              <a:gd name="adj" fmla="val 25000"/>
+            </a:avLst>
+          </a:prstGeom>
+          <a:solidFill>
+            <a:schemeClr val="accent2"/>
+          </a:solidFill>
+          <a:ln>
+            <a:noFill/>
+          </a:ln>
+          <a:effectLst/>
+        </p:spPr>
+        <p:style>
+          <a:lnRef idx="1">
+            <a:schemeClr val="accent1"/>
+          </a:lnRef>
+          <a:fillRef idx="3">
+            <a:schemeClr val="accent1"/>
+          </a:fillRef>
+          <a:effectRef idx="2">
+            <a:schemeClr val="accent1"/>
+          </a:effectRef>
+          <a:fontRef idx="minor">
+            <a:schemeClr val="lt1"/>
+          </a:fontRef>
+        </p:style>
+        <p:txBody>
+          <a:bodyPr wrap="square" lIns="182880" tIns="54864" rIns="182880" bIns="54864" rtlCol="0" anchor="ctr"/>
+          <a:lstStyle/>
+          <a:p>
+            <a:pPr algn="l"/>
+            <a:r>
+              <a:rPr sz="1000" b="1">
+                <a:solidFill>
+                  <a:schemeClr val="accent5"/>
+                </a:solidFill>
+              </a:rPr>
+              <a:t>사용자 질문   “최근 7일 차량별 무인 절단 시간 합계”   →   '지표 등록이 필요합니다'   →   [지표 등록] 버튼 한 번으로 초안이 채워진 등록 창</a:t>
+            </a:r>
+          </a:p>
+        </p:txBody>
+      </p:sp>
+      <p:sp>
+        <p:nvSpPr>
+          <p:cNvPr id="5" name="쓰인 메타정보"/>
+          <p:cNvSpPr/>
+          <p:nvPr/>
+        </p:nvSpPr>
+        <p:spPr>
+          <a:xfrm>
+            <a:off x="365760" y="1463040"/>
+            <a:ext cx="3886200" cy="5120640"/>
+          </a:xfrm>
+          <a:prstGeom prst="roundRect">
+            <a:avLst>
+              <a:gd name="adj" fmla="val 6000"/>
+            </a:avLst>
+          </a:prstGeom>
+          <a:solidFill>
+            <a:schemeClr val="bg1"/>
+          </a:solidFill>
+          <a:ln w="9525">
+            <a:solidFill>
+              <a:schemeClr val="accent6"/>
+            </a:solidFill>
+          </a:ln>
+          <a:effectLst/>
+        </p:spPr>
+        <p:style>
+          <a:lnRef idx="1">
+            <a:schemeClr val="accent1"/>
+          </a:lnRef>
+          <a:fillRef idx="3">
+            <a:schemeClr val="accent1"/>
+          </a:fillRef>
+          <a:effectRef idx="2">
+            <a:schemeClr val="accent1"/>
+          </a:effectRef>
+          <a:fontRef idx="minor">
+            <a:schemeClr val="lt1"/>
+          </a:fontRef>
+        </p:style>
+        <p:txBody>
+          <a:bodyPr tIns="54864" bIns="54864" rtlCol="0" anchor="t"/>
+          <a:lstStyle/>
+          <a:p>
+            <a:pPr algn="ctr"/>
+            <a:endParaRPr/>
+          </a:p>
+        </p:txBody>
+      </p:sp>
+      <p:sp>
+        <p:nvSpPr>
+          <p:cNvPr id="6" name="쓰인 메타정보 제목"/>
+          <p:cNvSpPr/>
+          <p:nvPr/>
+        </p:nvSpPr>
+        <p:spPr>
+          <a:xfrm>
+            <a:off x="457200" y="1554480"/>
+            <a:ext cx="3703320" cy="329184"/>
+          </a:xfrm>
+          <a:prstGeom prst="roundRect">
+            <a:avLst>
+              <a:gd name="adj" fmla="val 15000"/>
+            </a:avLst>
+          </a:prstGeom>
+          <a:solidFill>
+            <a:schemeClr val="accent1"/>
+          </a:solidFill>
+          <a:ln>
+            <a:noFill/>
+          </a:ln>
+          <a:effectLst/>
+        </p:spPr>
+        <p:style>
+          <a:lnRef idx="1">
+            <a:schemeClr val="accent1"/>
+          </a:lnRef>
+          <a:fillRef idx="3">
+            <a:schemeClr val="accent1"/>
+          </a:fillRef>
+          <a:effectRef idx="2">
+            <a:schemeClr val="accent1"/>
+          </a:effectRef>
+          <a:fontRef idx="minor">
+            <a:schemeClr val="lt1"/>
+          </a:fontRef>
+        </p:style>
+        <p:txBody>
+          <a:bodyPr wrap="square" tIns="54864" bIns="54864" rtlCol="0" anchor="ctr"/>
+          <a:lstStyle/>
+          <a:p>
+            <a:pPr algn="ctr"/>
+            <a:r>
+              <a:rPr sz="1050" b="1">
+                <a:solidFill>
+                  <a:schemeClr val="bg1"/>
+                </a:solidFill>
+              </a:rPr>
+              <a:t>초안에 쓰는 메타정보</a:t>
+            </a:r>
+          </a:p>
+        </p:txBody>
+      </p:sp>
+      <p:sp>
+        <p:nvSpPr>
+          <p:cNvPr id="7" name="쓰인 테이블"/>
+          <p:cNvSpPr txBox="1"/>
+          <p:nvPr/>
+        </p:nvSpPr>
+        <p:spPr>
+          <a:xfrm>
+            <a:off x="502920" y="1975104"/>
+            <a:ext cx="3611880" cy="130805"/>
+          </a:xfrm>
+          <a:prstGeom prst="rect">
+            <a:avLst/>
+          </a:prstGeom>
+          <a:noFill/>
+        </p:spPr>
+        <p:txBody>
+          <a:bodyPr wrap="square" lIns="0" tIns="0" rIns="0" bIns="0">
+            <a:spAutoFit/>
+          </a:bodyPr>
+          <a:lstStyle/>
+          <a:p>
+            <a:pPr algn="l"/>
+            <a:r>
+              <a:rPr lang="ko-KR" altLang="en-US" sz="850" b="1" dirty="0">
+                <a:solidFill>
+                  <a:schemeClr val="accent1"/>
+                </a:solidFill>
+              </a:rPr>
+              <a:t>테이블</a:t>
+            </a:r>
+            <a:r>
+              <a:rPr lang="ko-KR" altLang="en-US" sz="850" b="0" dirty="0">
+                <a:solidFill>
+                  <a:schemeClr val="tx1"/>
+                </a:solidFill>
+              </a:rPr>
+              <a:t>  bms_log   인덱스 idx_bms_log (collect_datetime, vehicle_id)</a:t>
+            </a:r>
+          </a:p>
+        </p:txBody>
+      </p:sp>
+      <p:graphicFrame>
+        <p:nvGraphicFramePr>
+          <p:cNvPr id="8" name="쓰인 컬럼"/>
+          <p:cNvGraphicFramePr>
+            <a:graphicFrameLocks noGrp="1"/>
+          </p:cNvGraphicFramePr>
+          <p:nvPr>
+            <p:extLst>
+              <p:ext uri="{D42A27DB-BD31-4B8C-83A1-F6EECF244321}">
+                <p14:modId xmlns:p14="http://schemas.microsoft.com/office/powerpoint/2010/main" val="1335705477"/>
+              </p:ext>
+            </p:extLst>
+          </p:nvPr>
+        </p:nvGraphicFramePr>
+        <p:xfrm>
+          <a:off x="457200" y="2249424"/>
+          <a:ext cx="3703319" cy="1097280"/>
+        </p:xfrm>
+        <a:graphic>
+          <a:graphicData uri="http://schemas.openxmlformats.org/drawingml/2006/table">
+            <a:tbl>
+              <a:tblPr firstRow="1" bandRow="1">
+                <a:tableStyleId>{5C22544A-7EE6-4342-B048-85BDC9FD1C3A}</a:tableStyleId>
+              </a:tblPr>
+              <a:tblGrid>
+                <a:gridCol w="1084217">
+                  <a:extLst>
+                    <a:ext uri="{9D8B030D-6E8A-4147-A177-3AD203B41FA5}">
+                      <a16:colId xmlns:a16="http://schemas.microsoft.com/office/drawing/2014/main" val="20000"/>
+                    </a:ext>
+                  </a:extLst>
+                </a:gridCol>
+                <a:gridCol w="836023">
+                  <a:extLst>
+                    <a:ext uri="{9D8B030D-6E8A-4147-A177-3AD203B41FA5}">
+                      <a16:colId xmlns:a16="http://schemas.microsoft.com/office/drawing/2014/main" val="20001"/>
+                    </a:ext>
+                  </a:extLst>
+                </a:gridCol>
+                <a:gridCol w="749808">
+                  <a:extLst>
+                    <a:ext uri="{9D8B030D-6E8A-4147-A177-3AD203B41FA5}">
+                      <a16:colId xmlns:a16="http://schemas.microsoft.com/office/drawing/2014/main" val="20002"/>
+                    </a:ext>
+                  </a:extLst>
+                </a:gridCol>
+                <a:gridCol w="1033271">
+                  <a:extLst>
+                    <a:ext uri="{9D8B030D-6E8A-4147-A177-3AD203B41FA5}">
+                      <a16:colId xmlns:a16="http://schemas.microsoft.com/office/drawing/2014/main" val="20003"/>
+                    </a:ext>
+                  </a:extLst>
+                </a:gridCol>
+              </a:tblGrid>
+              <a:tr h="274320">
+                <a:tc>
+                  <a:txBody>
+                    <a:bodyPr/>
+                    <a:lstStyle/>
+                    <a:p>
+                      <a:pPr algn="ctr"/>
+                      <a:r>
+                        <a:rPr sz="750" b="1" dirty="0" err="1">
+                          <a:solidFill>
+                            <a:schemeClr val="bg1"/>
+                          </a:solidFill>
+                        </a:rPr>
+                        <a:t>물리명</a:t>
+                      </a:r>
+                      <a:endParaRPr sz="750" dirty="0"/>
+                    </a:p>
+                  </a:txBody>
+                  <a:tcPr marL="36576" marR="36576" marT="13716" marB="13716" anchor="ctr">
+                    <a:solidFill>
+                      <a:schemeClr val="accent1"/>
+                    </a:solidFill>
+                  </a:tcPr>
+                </a:tc>
+                <a:tc>
+                  <a:txBody>
+                    <a:bodyPr/>
+                    <a:lstStyle/>
+                    <a:p>
+                      <a:pPr algn="ctr"/>
+                      <a:r>
+                        <a:rPr sz="750" b="1">
+                          <a:solidFill>
+                            <a:schemeClr val="bg1"/>
+                          </a:solidFill>
+                        </a:rPr>
+                        <a:t>설명 (코멘트)</a:t>
+                      </a:r>
+                      <a:endParaRPr sz="750"/>
+                    </a:p>
+                  </a:txBody>
+                  <a:tcPr marL="36576" marR="36576" marT="13716" marB="13716" anchor="ctr">
+                    <a:solidFill>
+                      <a:schemeClr val="accent1"/>
+                    </a:solidFill>
+                  </a:tcPr>
+                </a:tc>
+                <a:tc>
+                  <a:txBody>
+                    <a:bodyPr/>
+                    <a:lstStyle/>
+                    <a:p>
+                      <a:pPr algn="ctr"/>
+                      <a:r>
+                        <a:rPr sz="750" b="1">
+                          <a:solidFill>
+                            <a:schemeClr val="bg1"/>
+                          </a:solidFill>
+                        </a:rPr>
+                        <a:t>사람 설정</a:t>
+                      </a:r>
+                      <a:endParaRPr sz="750"/>
+                    </a:p>
+                  </a:txBody>
+                  <a:tcPr marL="36576" marR="36576" marT="13716" marB="13716" anchor="ctr">
+                    <a:solidFill>
+                      <a:schemeClr val="accent1"/>
+                    </a:solidFill>
+                  </a:tcPr>
+                </a:tc>
+                <a:tc>
+                  <a:txBody>
+                    <a:bodyPr/>
+                    <a:lstStyle/>
+                    <a:p>
+                      <a:pPr algn="ctr"/>
+                      <a:r>
+                        <a:rPr sz="750" b="1">
+                          <a:solidFill>
+                            <a:schemeClr val="bg1"/>
+                          </a:solidFill>
+                        </a:rPr>
+                        <a:t>인덱스</a:t>
+                      </a:r>
+                      <a:endParaRPr sz="750"/>
+                    </a:p>
+                  </a:txBody>
+                  <a:tcPr marL="36576" marR="36576" marT="13716" marB="13716" anchor="ctr">
+                    <a:solidFill>
+                      <a:schemeClr val="accent1"/>
+                    </a:solidFill>
+                  </a:tcPr>
+                </a:tc>
+                <a:extLst>
+                  <a:ext uri="{0D108BD9-81ED-4DB2-BD59-A6C34878D82A}">
+                    <a16:rowId xmlns:a16="http://schemas.microsoft.com/office/drawing/2014/main" val="10000"/>
+                  </a:ext>
+                </a:extLst>
+              </a:tr>
+              <a:tr h="274320">
+                <a:tc>
+                  <a:txBody>
+                    <a:bodyPr/>
+                    <a:lstStyle/>
+                    <a:p>
+                      <a:r>
+                        <a:rPr sz="750">
+                          <a:solidFill>
+                            <a:schemeClr val="tx1"/>
+                          </a:solidFill>
+                        </a:rPr>
+                        <a:t>collect_datetime</a:t>
+                      </a:r>
+                      <a:endParaRPr sz="750"/>
+                    </a:p>
+                  </a:txBody>
+                  <a:tcPr marL="36576" marR="36576" marT="13716" marB="13716" anchor="ctr">
+                    <a:solidFill>
+                      <a:schemeClr val="accent5"/>
+                    </a:solidFill>
+                  </a:tcPr>
+                </a:tc>
+                <a:tc>
+                  <a:txBody>
+                    <a:bodyPr/>
+                    <a:lstStyle/>
+                    <a:p>
+                      <a:r>
+                        <a:rPr sz="750">
+                          <a:solidFill>
+                            <a:schemeClr val="tx1"/>
+                          </a:solidFill>
+                        </a:rPr>
+                        <a:t>수집 일시</a:t>
+                      </a:r>
+                      <a:endParaRPr sz="750"/>
+                    </a:p>
+                  </a:txBody>
+                  <a:tcPr marL="36576" marR="36576" marT="13716" marB="13716" anchor="ctr">
+                    <a:solidFill>
+                      <a:schemeClr val="accent5"/>
+                    </a:solidFill>
+                  </a:tcPr>
+                </a:tc>
+                <a:tc>
+                  <a:txBody>
+                    <a:bodyPr/>
+                    <a:lstStyle/>
+                    <a:p>
+                      <a:pPr algn="ctr"/>
+                      <a:r>
+                        <a:rPr sz="750">
+                          <a:solidFill>
+                            <a:schemeClr val="accent3"/>
+                          </a:solidFill>
+                        </a:rPr>
+                        <a:t>UTC 보정</a:t>
+                      </a:r>
+                      <a:endParaRPr sz="750"/>
+                    </a:p>
+                  </a:txBody>
+                  <a:tcPr marL="36576" marR="36576" marT="13716" marB="13716" anchor="ctr">
+                    <a:solidFill>
+                      <a:schemeClr val="accent5"/>
+                    </a:solidFill>
+                  </a:tcPr>
+                </a:tc>
+                <a:tc>
+                  <a:txBody>
+                    <a:bodyPr/>
+                    <a:lstStyle/>
+                    <a:p>
+                      <a:r>
+                        <a:rPr lang="en-US" sz="750" dirty="0">
+                          <a:solidFill>
+                            <a:schemeClr val="tx1"/>
+                          </a:solidFill>
+                        </a:rPr>
+                        <a:t>idx_bms_log 1번 칸</a:t>
+                      </a:r>
+                      <a:endParaRPr sz="750" dirty="0"/>
+                    </a:p>
+                  </a:txBody>
+                  <a:tcPr marL="36576" marR="36576" marT="13716" marB="13716" anchor="ctr">
+                    <a:solidFill>
+                      <a:schemeClr val="accent5"/>
+                    </a:solidFill>
+                  </a:tcPr>
+                </a:tc>
+                <a:extLst>
+                  <a:ext uri="{0D108BD9-81ED-4DB2-BD59-A6C34878D82A}">
+                    <a16:rowId xmlns:a16="http://schemas.microsoft.com/office/drawing/2014/main" val="10001"/>
+                  </a:ext>
+                </a:extLst>
+              </a:tr>
+              <a:tr h="274320">
+                <a:tc>
+                  <a:txBody>
+                    <a:bodyPr/>
+                    <a:lstStyle/>
+                    <a:p>
+                      <a:r>
+                        <a:rPr sz="750">
+                          <a:solidFill>
+                            <a:schemeClr val="tx1"/>
+                          </a:solidFill>
+                        </a:rPr>
+                        <a:t>vehicle_id</a:t>
+                      </a:r>
+                      <a:endParaRPr sz="750"/>
+                    </a:p>
+                  </a:txBody>
+                  <a:tcPr marL="36576" marR="36576" marT="13716" marB="13716" anchor="ctr">
+                    <a:solidFill>
+                      <a:schemeClr val="accent4"/>
+                    </a:solidFill>
+                  </a:tcPr>
+                </a:tc>
+                <a:tc>
+                  <a:txBody>
+                    <a:bodyPr/>
+                    <a:lstStyle/>
+                    <a:p>
+                      <a:r>
+                        <a:rPr sz="750">
+                          <a:solidFill>
+                            <a:schemeClr val="tx1"/>
+                          </a:solidFill>
+                        </a:rPr>
+                        <a:t>차량 시리얼 번호</a:t>
+                      </a:r>
+                      <a:endParaRPr sz="750"/>
+                    </a:p>
+                  </a:txBody>
+                  <a:tcPr marL="36576" marR="36576" marT="13716" marB="13716" anchor="ctr">
+                    <a:solidFill>
+                      <a:schemeClr val="accent4"/>
+                    </a:solidFill>
+                  </a:tcPr>
+                </a:tc>
+                <a:tc>
+                  <a:txBody>
+                    <a:bodyPr/>
+                    <a:lstStyle/>
+                    <a:p>
+                      <a:pPr algn="ctr"/>
+                      <a:endParaRPr sz="750"/>
+                    </a:p>
+                  </a:txBody>
+                  <a:tcPr marL="36576" marR="36576" marT="13716" marB="13716" anchor="ctr">
+                    <a:solidFill>
+                      <a:schemeClr val="accent4"/>
+                    </a:solidFill>
+                  </a:tcPr>
+                </a:tc>
+                <a:tc>
+                  <a:txBody>
+                    <a:bodyPr/>
+                    <a:lstStyle/>
+                    <a:p>
+                      <a:r>
+                        <a:rPr sz="750">
+                          <a:solidFill>
+                            <a:schemeClr val="tx1"/>
+                          </a:solidFill>
+                        </a:rPr>
+                        <a:t>idx_bms_log 2번 칸</a:t>
+                      </a:r>
+                      <a:endParaRPr sz="750"/>
+                    </a:p>
+                  </a:txBody>
+                  <a:tcPr marL="36576" marR="36576" marT="13716" marB="13716" anchor="ctr">
+                    <a:solidFill>
+                      <a:schemeClr val="accent4"/>
+                    </a:solidFill>
+                  </a:tcPr>
+                </a:tc>
+                <a:extLst>
+                  <a:ext uri="{0D108BD9-81ED-4DB2-BD59-A6C34878D82A}">
+                    <a16:rowId xmlns:a16="http://schemas.microsoft.com/office/drawing/2014/main" val="10002"/>
+                  </a:ext>
+                </a:extLst>
+              </a:tr>
+              <a:tr h="274320">
+                <a:tc>
+                  <a:txBody>
+                    <a:bodyPr/>
+                    <a:lstStyle/>
+                    <a:p>
+                      <a:r>
+                        <a:rPr sz="750">
+                          <a:solidFill>
+                            <a:schemeClr val="tx1"/>
+                          </a:solidFill>
+                        </a:rPr>
+                        <a:t>uman_reel</a:t>
+                      </a:r>
+                      <a:endParaRPr sz="750"/>
+                    </a:p>
+                  </a:txBody>
+                  <a:tcPr marL="36576" marR="36576" marT="13716" marB="13716" anchor="ctr">
+                    <a:solidFill>
+                      <a:schemeClr val="accent5"/>
+                    </a:solidFill>
+                  </a:tcPr>
+                </a:tc>
+                <a:tc>
+                  <a:txBody>
+                    <a:bodyPr/>
+                    <a:lstStyle/>
+                    <a:p>
+                      <a:r>
+                        <a:rPr sz="750">
+                          <a:solidFill>
+                            <a:schemeClr val="tx1"/>
+                          </a:solidFill>
+                        </a:rPr>
+                        <a:t>무인 절단 시간</a:t>
+                      </a:r>
+                      <a:endParaRPr sz="750"/>
+                    </a:p>
+                  </a:txBody>
+                  <a:tcPr marL="36576" marR="36576" marT="13716" marB="13716" anchor="ctr">
+                    <a:solidFill>
+                      <a:schemeClr val="accent5"/>
+                    </a:solidFill>
+                  </a:tcPr>
+                </a:tc>
+                <a:tc>
+                  <a:txBody>
+                    <a:bodyPr/>
+                    <a:lstStyle/>
+                    <a:p>
+                      <a:pPr algn="ctr"/>
+                      <a:r>
+                        <a:rPr sz="750">
+                          <a:solidFill>
+                            <a:schemeClr val="accent3"/>
+                          </a:solidFill>
+                        </a:rPr>
+                        <a:t>계산 필요</a:t>
+                      </a:r>
+                      <a:endParaRPr sz="750"/>
+                    </a:p>
+                  </a:txBody>
+                  <a:tcPr marL="36576" marR="36576" marT="13716" marB="13716" anchor="ctr">
+                    <a:solidFill>
+                      <a:schemeClr val="accent5"/>
+                    </a:solidFill>
+                  </a:tcPr>
+                </a:tc>
+                <a:tc>
+                  <a:txBody>
+                    <a:bodyPr/>
+                    <a:lstStyle/>
+                    <a:p>
+                      <a:r>
+                        <a:rPr lang="en-US" sz="750" dirty="0">
+                          <a:solidFill>
+                            <a:schemeClr val="tx1"/>
+                          </a:solidFill>
+                        </a:rPr>
+                        <a:t>지표 없음</a:t>
+                      </a:r>
+                      <a:endParaRPr sz="750" dirty="0"/>
+                    </a:p>
+                  </a:txBody>
+                  <a:tcPr marL="36576" marR="36576" marT="13716" marB="13716" anchor="ctr">
+                    <a:solidFill>
+                      <a:schemeClr val="accent5"/>
+                    </a:solidFill>
+                  </a:tcPr>
+                </a:tc>
+                <a:extLst>
+                  <a:ext uri="{0D108BD9-81ED-4DB2-BD59-A6C34878D82A}">
+                    <a16:rowId xmlns:a16="http://schemas.microsoft.com/office/drawing/2014/main" val="2219227422"/>
+                  </a:ext>
+                </a:extLst>
+              </a:tr>
+            </a:tbl>
+          </a:graphicData>
+        </a:graphic>
+      </p:graphicFrame>
+      <p:sp>
+        <p:nvSpPr>
+          <p:cNvPr id="9" name="쓰인 지표 제목"/>
+          <p:cNvSpPr txBox="1"/>
+          <p:nvPr/>
+        </p:nvSpPr>
+        <p:spPr>
+          <a:xfrm>
+            <a:off x="502920" y="4023360"/>
+            <a:ext cx="3611880" cy="228600"/>
+          </a:xfrm>
+          <a:prstGeom prst="rect">
+            <a:avLst/>
+          </a:prstGeom>
+          <a:noFill/>
+        </p:spPr>
+        <p:txBody>
+          <a:bodyPr wrap="square" lIns="0" tIns="0" rIns="0" bIns="0">
+            <a:spAutoFit/>
+          </a:bodyPr>
+          <a:lstStyle/>
+          <a:p>
+            <a:pPr algn="l"/>
+            <a:r>
+              <a:rPr lang="ko-KR" altLang="en-US" sz="850" b="1" dirty="0">
+                <a:solidFill>
+                  <a:schemeClr val="accent1"/>
+                </a:solidFill>
+              </a:rPr>
+              <a:t>LLM에 함께 보내는 재료</a:t>
+            </a:r>
+          </a:p>
+        </p:txBody>
+      </p:sp>
+      <p:sp>
+        <p:nvSpPr>
+          <p:cNvPr id="10" name="쓰인 지표"/>
+          <p:cNvSpPr/>
+          <p:nvPr/>
+        </p:nvSpPr>
+        <p:spPr>
+          <a:xfrm>
+            <a:off x="457200" y="4297680"/>
+            <a:ext cx="3703320" cy="2194560"/>
+          </a:xfrm>
+          <a:prstGeom prst="roundRect">
+            <a:avLst>
+              <a:gd name="adj" fmla="val 4000"/>
+            </a:avLst>
+          </a:prstGeom>
+          <a:solidFill>
+            <a:schemeClr val="accent4"/>
+          </a:solidFill>
+          <a:ln w="9525">
+            <a:solidFill>
+              <a:schemeClr val="accent5"/>
+            </a:solidFill>
+          </a:ln>
+          <a:effectLst/>
+        </p:spPr>
+        <p:style>
+          <a:lnRef idx="1">
+            <a:schemeClr val="accent1"/>
+          </a:lnRef>
+          <a:fillRef idx="3">
+            <a:schemeClr val="accent1"/>
+          </a:fillRef>
+          <a:effectRef idx="2">
+            <a:schemeClr val="accent1"/>
+          </a:effectRef>
+          <a:fontRef idx="minor">
+            <a:schemeClr val="lt1"/>
+          </a:fontRef>
+        </p:style>
+        <p:txBody>
+          <a:bodyPr wrap="square" tIns="54864" bIns="54864" rtlCol="0" anchor="t"/>
+          <a:lstStyle/>
+          <a:p>
+            <a:pPr algn="l"/>
+            <a:r>
+              <a:rPr lang="ko-KR" altLang="en-US" sz="950" b="1" dirty="0">
+                <a:solidFill>
+                  <a:schemeClr val="accent1"/>
+                </a:solidFill>
+              </a:rPr>
+              <a:t>컬럼 설명과 표시</a:t>
+            </a:r>
+          </a:p>
+          <a:p>
+            <a:pPr algn="l"/>
+            <a:r>
+              <a:rPr lang="ko-KR" altLang="en-US" sz="950" b="0" dirty="0">
+                <a:solidFill>
+                  <a:schemeClr val="tx1"/>
+                </a:solidFill>
+              </a:rPr>
+              <a:t>  코멘트, 계산 필요, UTC 시차</a:t>
+            </a:r>
+          </a:p>
+          <a:p>
+            <a:pPr algn="l"/>
+            <a:r>
+              <a:rPr lang="ko-KR" altLang="en-US" sz="950" b="1" dirty="0">
+                <a:solidFill>
+                  <a:schemeClr val="accent1"/>
+                </a:solidFill>
+              </a:rPr>
+              <a:t>인덱스</a:t>
+            </a:r>
+          </a:p>
+          <a:p>
+            <a:pPr algn="l"/>
+            <a:r>
+              <a:rPr lang="ko-KR" altLang="en-US" sz="950" b="0" dirty="0">
+                <a:solidFill>
+                  <a:schemeClr val="tx1"/>
+                </a:solidFill>
+              </a:rPr>
+              <a:t>  대상 DB 카탈로그에서 바로 읽음</a:t>
+            </a:r>
+          </a:p>
+          <a:p>
+            <a:pPr algn="l"/>
+            <a:r>
+              <a:rPr lang="ko-KR" altLang="en-US" sz="950" b="1" dirty="0">
+                <a:solidFill>
+                  <a:schemeClr val="accent1"/>
+                </a:solidFill>
+              </a:rPr>
+              <a:t>같은 테이블 지표 SQL</a:t>
+            </a:r>
+          </a:p>
+          <a:p>
+            <a:pPr algn="l"/>
+            <a:r>
+              <a:rPr lang="ko-KR" altLang="en-US" sz="950" b="0" dirty="0">
+                <a:solidFill>
+                  <a:schemeClr val="tx1"/>
+                </a:solidFill>
+              </a:rPr>
+              <a:t>  묶음 단위(차량 × 일)와 UTC 처리를 따름</a:t>
+            </a:r>
+          </a:p>
+          <a:p>
+            <a:pPr algn="l"/>
+            <a:r>
+              <a:rPr lang="ko-KR" altLang="en-US" sz="950" b="1" dirty="0">
+                <a:solidFill>
+                  <a:schemeClr val="accent1"/>
+                </a:solidFill>
+              </a:rPr>
+              <a:t>값 샘플</a:t>
+            </a:r>
+          </a:p>
+          <a:p>
+            <a:pPr algn="l"/>
+            <a:r>
+              <a:rPr lang="ko-KR" altLang="en-US" sz="950" b="0" dirty="0">
+                <a:solidFill>
+                  <a:schemeClr val="tx1"/>
+                </a:solidFill>
+              </a:rPr>
+              <a:t>  차량 1대의 날짜별 첫 값, 마지막 값, 최근 10행</a:t>
+            </a:r>
+          </a:p>
+        </p:txBody>
+      </p:sp>
+      <p:sp>
+        <p:nvSpPr>
+          <p:cNvPr id="11" name="화살표 1→2"/>
+          <p:cNvSpPr/>
+          <p:nvPr/>
+        </p:nvSpPr>
+        <p:spPr>
+          <a:xfrm>
+            <a:off x="4297680" y="3657600"/>
+            <a:ext cx="274320" cy="310896"/>
+          </a:xfrm>
+          <a:prstGeom prst="rightArrow">
+            <a:avLst/>
+          </a:prstGeom>
+          <a:solidFill>
+            <a:schemeClr val="accent3"/>
+          </a:solidFill>
+          <a:ln>
+            <a:noFill/>
+          </a:ln>
+          <a:effectLst/>
+        </p:spPr>
+        <p:style>
+          <a:lnRef idx="1">
+            <a:schemeClr val="accent1"/>
+          </a:lnRef>
+          <a:fillRef idx="3">
+            <a:schemeClr val="accent1"/>
+          </a:fillRef>
+          <a:effectRef idx="2">
+            <a:schemeClr val="accent1"/>
+          </a:effectRef>
+          <a:fontRef idx="minor">
+            <a:schemeClr val="lt1"/>
+          </a:fontRef>
+        </p:style>
+        <p:txBody>
+          <a:bodyPr rtlCol="0" anchor="ctr"/>
+          <a:lstStyle/>
+          <a:p>
+            <a:pPr algn="ctr"/>
+            <a:endParaRPr/>
+          </a:p>
+        </p:txBody>
+      </p:sp>
+      <p:sp>
+        <p:nvSpPr>
+          <p:cNvPr id="12" name="LLM 연계 Agent 로직"/>
+          <p:cNvSpPr/>
+          <p:nvPr/>
+        </p:nvSpPr>
+        <p:spPr>
+          <a:xfrm>
+            <a:off x="4626864" y="1463040"/>
+            <a:ext cx="3310128" cy="5120640"/>
+          </a:xfrm>
+          <a:prstGeom prst="roundRect">
+            <a:avLst>
+              <a:gd name="adj" fmla="val 6000"/>
+            </a:avLst>
+          </a:prstGeom>
+          <a:solidFill>
+            <a:schemeClr val="bg1"/>
+          </a:solidFill>
+          <a:ln w="9525">
+            <a:solidFill>
+              <a:schemeClr val="accent6"/>
+            </a:solidFill>
+          </a:ln>
+          <a:effectLst/>
+        </p:spPr>
+        <p:style>
+          <a:lnRef idx="1">
+            <a:schemeClr val="accent1"/>
+          </a:lnRef>
+          <a:fillRef idx="3">
+            <a:schemeClr val="accent1"/>
+          </a:fillRef>
+          <a:effectRef idx="2">
+            <a:schemeClr val="accent1"/>
+          </a:effectRef>
+          <a:fontRef idx="minor">
+            <a:schemeClr val="lt1"/>
+          </a:fontRef>
+        </p:style>
+        <p:txBody>
+          <a:bodyPr tIns="54864" bIns="54864" rtlCol="0" anchor="t"/>
+          <a:lstStyle/>
+          <a:p>
+            <a:pPr algn="ctr"/>
+            <a:endParaRPr/>
+          </a:p>
+        </p:txBody>
+      </p:sp>
+      <p:sp>
+        <p:nvSpPr>
+          <p:cNvPr id="13" name="LLM 연계 Agent 로직 제목"/>
+          <p:cNvSpPr/>
+          <p:nvPr/>
+        </p:nvSpPr>
+        <p:spPr>
+          <a:xfrm>
+            <a:off x="4718303" y="1554480"/>
+            <a:ext cx="3127248" cy="329184"/>
+          </a:xfrm>
+          <a:prstGeom prst="roundRect">
+            <a:avLst>
+              <a:gd name="adj" fmla="val 15000"/>
+            </a:avLst>
+          </a:prstGeom>
+          <a:solidFill>
+            <a:schemeClr val="accent1"/>
+          </a:solidFill>
+          <a:ln>
+            <a:noFill/>
+          </a:ln>
+          <a:effectLst/>
+        </p:spPr>
+        <p:style>
+          <a:lnRef idx="1">
+            <a:schemeClr val="accent1"/>
+          </a:lnRef>
+          <a:fillRef idx="3">
+            <a:schemeClr val="accent1"/>
+          </a:fillRef>
+          <a:effectRef idx="2">
+            <a:schemeClr val="accent1"/>
+          </a:effectRef>
+          <a:fontRef idx="minor">
+            <a:schemeClr val="lt1"/>
+          </a:fontRef>
+        </p:style>
+        <p:txBody>
+          <a:bodyPr wrap="square" tIns="54864" bIns="54864" rtlCol="0" anchor="ctr"/>
+          <a:lstStyle/>
+          <a:p>
+            <a:pPr algn="ctr"/>
+            <a:r>
+              <a:rPr sz="1050" b="1">
+                <a:solidFill>
+                  <a:schemeClr val="bg1"/>
+                </a:solidFill>
+              </a:rPr>
+              <a:t>초안 생성과 검증 로직</a:t>
+            </a:r>
+          </a:p>
+        </p:txBody>
+      </p:sp>
+      <p:sp>
+        <p:nvSpPr>
+          <p:cNvPr id="14" name="LLM 연계 Agent 로직 내용"/>
+          <p:cNvSpPr/>
+          <p:nvPr/>
+        </p:nvSpPr>
+        <p:spPr>
+          <a:xfrm>
+            <a:off x="4718303" y="1956816"/>
+            <a:ext cx="3127248" cy="4535424"/>
+          </a:xfrm>
+          <a:prstGeom prst="roundRect">
+            <a:avLst>
+              <a:gd name="adj" fmla="val 4000"/>
+            </a:avLst>
+          </a:prstGeom>
+          <a:solidFill>
+            <a:schemeClr val="accent4"/>
+          </a:solidFill>
+          <a:ln w="9525">
+            <a:solidFill>
+              <a:schemeClr val="accent5"/>
+            </a:solidFill>
+          </a:ln>
+          <a:effectLst/>
+        </p:spPr>
+        <p:style>
+          <a:lnRef idx="1">
+            <a:schemeClr val="accent1"/>
+          </a:lnRef>
+          <a:fillRef idx="3">
+            <a:schemeClr val="accent1"/>
+          </a:fillRef>
+          <a:effectRef idx="2">
+            <a:schemeClr val="accent1"/>
+          </a:effectRef>
+          <a:fontRef idx="minor">
+            <a:schemeClr val="lt1"/>
+          </a:fontRef>
+        </p:style>
+        <p:txBody>
+          <a:bodyPr wrap="square" tIns="54864" bIns="54864" rtlCol="0" anchor="t"/>
+          <a:lstStyle/>
+          <a:p>
+            <a:pPr algn="l"/>
+            <a:r>
+              <a:rPr lang="ko-KR" altLang="en-US" sz="1000" b="1" dirty="0">
+                <a:solidFill>
+                  <a:schemeClr val="accent1"/>
+                </a:solidFill>
+              </a:rPr>
+              <a:t>1. 없는 계산 받기</a:t>
+            </a:r>
+          </a:p>
+          <a:p>
+            <a:pPr algn="l"/>
+            <a:r>
+              <a:rPr lang="ko-KR" altLang="en-US" sz="1000" b="0" dirty="0">
+                <a:solidFill>
+                  <a:schemeClr val="tx1"/>
+                </a:solidFill>
+              </a:rPr>
+              <a:t>  테이블 선택 응답에 missing 추가</a:t>
+            </a:r>
+          </a:p>
+          <a:p>
+            <a:pPr algn="l"/>
+            <a:r>
+              <a:rPr lang="ko-KR" altLang="en-US" sz="1000" b="0" dirty="0">
+                <a:solidFill>
+                  <a:schemeClr val="tx1"/>
+                </a:solidFill>
+              </a:rPr>
+              <a:t>  [수신] 무인 절단 시간, bms_log, uman_reel</a:t>
+            </a:r>
+          </a:p>
+          <a:p>
+            <a:pPr algn="l"/>
+            <a:endParaRPr lang="ko-KR" sz="1000" dirty="0"/>
+          </a:p>
+          <a:p>
+            <a:pPr algn="l"/>
+            <a:r>
+              <a:rPr lang="ko-KR" altLang="en-US" sz="1000" b="1" dirty="0">
+                <a:solidFill>
+                  <a:schemeClr val="accent1"/>
+                </a:solidFill>
+              </a:rPr>
+              <a:t>2. 값 샘플 조회</a:t>
+            </a:r>
+          </a:p>
+          <a:p>
+            <a:pPr algn="l"/>
+            <a:r>
+              <a:rPr lang="ko-KR" altLang="en-US" sz="1000" b="0" dirty="0">
+                <a:solidFill>
+                  <a:schemeClr val="tx1"/>
+                </a:solidFill>
+              </a:rPr>
+              <a:t>  인덱스를 타는 조회만, 읽기 전용</a:t>
+            </a:r>
+          </a:p>
+          <a:p>
+            <a:pPr algn="l"/>
+            <a:endParaRPr lang="ko-KR" sz="1000" dirty="0"/>
+          </a:p>
+          <a:p>
+            <a:pPr algn="l"/>
+            <a:r>
+              <a:rPr lang="ko-KR" altLang="en-US" sz="1000" b="1" dirty="0">
+                <a:solidFill>
+                  <a:schemeClr val="accent1"/>
+                </a:solidFill>
+              </a:rPr>
+              <a:t>3. LLM 초안</a:t>
+            </a:r>
+          </a:p>
+          <a:p>
+            <a:pPr algn="l"/>
+            <a:r>
+              <a:rPr lang="ko-KR" altLang="en-US" sz="1000" b="0" dirty="0">
+                <a:solidFill>
+                  <a:schemeClr val="tx1"/>
+                </a:solidFill>
+              </a:rPr>
+              <a:t>  [송신] 컬럼, 인덱스, 지표 SQL, 값 샘플</a:t>
+            </a:r>
+          </a:p>
+          <a:p>
+            <a:pPr algn="l"/>
+            <a:r>
+              <a:rPr lang="ko-KR" altLang="en-US" sz="1000" b="0" dirty="0">
+                <a:solidFill>
+                  <a:schemeClr val="tx1"/>
+                </a:solidFill>
+              </a:rPr>
+              <a:t>  [수신] SQL, 이름, 같은 말, 설명, 확인할 가정</a:t>
+            </a:r>
+          </a:p>
+          <a:p>
+            <a:pPr algn="l"/>
+            <a:endParaRPr lang="ko-KR" sz="1000" dirty="0"/>
+          </a:p>
+          <a:p>
+            <a:pPr algn="l"/>
+            <a:r>
+              <a:rPr lang="ko-KR" altLang="en-US" sz="1000" b="1" dirty="0">
+                <a:solidFill>
+                  <a:schemeClr val="accent1"/>
+                </a:solidFill>
+              </a:rPr>
+              <a:t>4. 실행 전 확인</a:t>
+            </a:r>
+          </a:p>
+          <a:p>
+            <a:pPr algn="l"/>
+            <a:r>
+              <a:rPr lang="ko-KR" altLang="en-US" sz="1000" b="0" dirty="0">
+                <a:solidFill>
+                  <a:schemeClr val="tx1"/>
+                </a:solidFill>
+              </a:rPr>
+              <a:t>  GROUP BY 순번, 큰 테이블 전체 훑기</a:t>
+            </a:r>
+          </a:p>
+          <a:p>
+            <a:pPr algn="l"/>
+            <a:r>
+              <a:rPr lang="ko-KR" altLang="en-US" sz="1000" b="0" dirty="0">
+                <a:solidFill>
+                  <a:schemeClr val="tx1"/>
+                </a:solidFill>
+              </a:rPr>
+              <a:t>  → 실행하지 않고 고칠 점을 붙여 재요청</a:t>
+            </a:r>
+          </a:p>
+          <a:p>
+            <a:pPr algn="l"/>
+            <a:endParaRPr lang="ko-KR" sz="1000" dirty="0"/>
+          </a:p>
+          <a:p>
+            <a:pPr algn="l"/>
+            <a:r>
+              <a:rPr lang="ko-KR" altLang="en-US" sz="1000" b="1" dirty="0">
+                <a:solidFill>
+                  <a:schemeClr val="accent1"/>
+                </a:solidFill>
+              </a:rPr>
+              <a:t>5. 등록 확인</a:t>
+            </a:r>
+          </a:p>
+          <a:p>
+            <a:pPr algn="l"/>
+            <a:r>
+              <a:rPr lang="ko-KR" altLang="en-US" sz="1000" b="0" dirty="0">
+                <a:solidFill>
+                  <a:schemeClr val="tx1"/>
+                </a:solidFill>
+              </a:rPr>
+              <a:t>  AST 변환, 원본과 결과 비교 (최대 3회 시도)</a:t>
+            </a:r>
+          </a:p>
+          <a:p>
+            <a:pPr algn="l"/>
+            <a:endParaRPr lang="ko-KR" sz="1000" dirty="0"/>
+          </a:p>
+          <a:p>
+            <a:pPr algn="l"/>
+            <a:r>
+              <a:rPr lang="ko-KR" altLang="en-US" sz="1000" b="1" dirty="0">
+                <a:solidFill>
+                  <a:schemeClr val="accent1"/>
+                </a:solidFill>
+              </a:rPr>
+              <a:t>6. 사람이 확인 후 등록</a:t>
+            </a:r>
+          </a:p>
+          <a:p>
+            <a:pPr algn="l"/>
+            <a:r>
+              <a:rPr lang="ko-KR" altLang="en-US" sz="1000" b="0" dirty="0">
+                <a:solidFill>
+                  <a:schemeClr val="tx1"/>
+                </a:solidFill>
+              </a:rPr>
+              <a:t>  초안은 저장 안 함, 등록하면 같은 질문 재실행</a:t>
+            </a:r>
+          </a:p>
+        </p:txBody>
+      </p:sp>
+      <p:sp>
+        <p:nvSpPr>
+          <p:cNvPr id="15" name="화살표 2→3"/>
+          <p:cNvSpPr/>
+          <p:nvPr/>
+        </p:nvSpPr>
+        <p:spPr>
+          <a:xfrm>
+            <a:off x="7982712" y="3657600"/>
+            <a:ext cx="274320" cy="310896"/>
+          </a:xfrm>
+          <a:prstGeom prst="rightArrow">
+            <a:avLst/>
+          </a:prstGeom>
+          <a:solidFill>
+            <a:schemeClr val="accent3"/>
+          </a:solidFill>
+          <a:ln>
+            <a:noFill/>
+          </a:ln>
+          <a:effectLst/>
+        </p:spPr>
+        <p:style>
+          <a:lnRef idx="1">
+            <a:schemeClr val="accent1"/>
+          </a:lnRef>
+          <a:fillRef idx="3">
+            <a:schemeClr val="accent1"/>
+          </a:fillRef>
+          <a:effectRef idx="2">
+            <a:schemeClr val="accent1"/>
+          </a:effectRef>
+          <a:fontRef idx="minor">
+            <a:schemeClr val="lt1"/>
+          </a:fontRef>
+        </p:style>
+        <p:txBody>
+          <a:bodyPr rtlCol="0" anchor="ctr"/>
+          <a:lstStyle/>
+          <a:p>
+            <a:pPr algn="ctr"/>
+            <a:endParaRPr/>
+          </a:p>
+        </p:txBody>
+      </p:sp>
+      <p:sp>
+        <p:nvSpPr>
+          <p:cNvPr id="16" name="LLM 전송 쿼리"/>
+          <p:cNvSpPr/>
+          <p:nvPr/>
+        </p:nvSpPr>
+        <p:spPr>
+          <a:xfrm>
+            <a:off x="8357616" y="1463040"/>
+            <a:ext cx="3465576" cy="5120640"/>
+          </a:xfrm>
+          <a:prstGeom prst="roundRect">
+            <a:avLst>
+              <a:gd name="adj" fmla="val 6000"/>
+            </a:avLst>
+          </a:prstGeom>
+          <a:solidFill>
+            <a:schemeClr val="bg1"/>
+          </a:solidFill>
+          <a:ln w="9525">
+            <a:solidFill>
+              <a:schemeClr val="accent6"/>
+            </a:solidFill>
+          </a:ln>
+          <a:effectLst/>
+        </p:spPr>
+        <p:style>
+          <a:lnRef idx="1">
+            <a:schemeClr val="accent1"/>
+          </a:lnRef>
+          <a:fillRef idx="3">
+            <a:schemeClr val="accent1"/>
+          </a:fillRef>
+          <a:effectRef idx="2">
+            <a:schemeClr val="accent1"/>
+          </a:effectRef>
+          <a:fontRef idx="minor">
+            <a:schemeClr val="lt1"/>
+          </a:fontRef>
+        </p:style>
+        <p:txBody>
+          <a:bodyPr tIns="54864" bIns="54864" rtlCol="0" anchor="t"/>
+          <a:lstStyle/>
+          <a:p>
+            <a:pPr algn="ctr"/>
+            <a:endParaRPr/>
+          </a:p>
+        </p:txBody>
+      </p:sp>
+      <p:sp>
+        <p:nvSpPr>
+          <p:cNvPr id="17" name="LLM 전송 쿼리 제목"/>
+          <p:cNvSpPr/>
+          <p:nvPr/>
+        </p:nvSpPr>
+        <p:spPr>
+          <a:xfrm>
+            <a:off x="8449056" y="1554480"/>
+            <a:ext cx="3282696" cy="329184"/>
+          </a:xfrm>
+          <a:prstGeom prst="roundRect">
+            <a:avLst>
+              <a:gd name="adj" fmla="val 15000"/>
+            </a:avLst>
+          </a:prstGeom>
+          <a:solidFill>
+            <a:schemeClr val="accent1"/>
+          </a:solidFill>
+          <a:ln>
+            <a:noFill/>
+          </a:ln>
+          <a:effectLst/>
+        </p:spPr>
+        <p:style>
+          <a:lnRef idx="1">
+            <a:schemeClr val="accent1"/>
+          </a:lnRef>
+          <a:fillRef idx="3">
+            <a:schemeClr val="accent1"/>
+          </a:fillRef>
+          <a:effectRef idx="2">
+            <a:schemeClr val="accent1"/>
+          </a:effectRef>
+          <a:fontRef idx="minor">
+            <a:schemeClr val="lt1"/>
+          </a:fontRef>
+        </p:style>
+        <p:txBody>
+          <a:bodyPr wrap="square" tIns="54864" bIns="54864" rtlCol="0" anchor="ctr"/>
+          <a:lstStyle/>
+          <a:p>
+            <a:pPr algn="ctr"/>
+            <a:r>
+              <a:rPr sz="1050" b="1">
+                <a:solidFill>
+                  <a:schemeClr val="bg1"/>
+                </a:solidFill>
+              </a:rPr>
+              <a:t>운영 DB 보호</a:t>
+            </a:r>
+          </a:p>
+        </p:txBody>
+      </p:sp>
+      <p:sp>
+        <p:nvSpPr>
+          <p:cNvPr id="18" name="LLM 전송 쿼리 내용"/>
+          <p:cNvSpPr/>
+          <p:nvPr/>
+        </p:nvSpPr>
+        <p:spPr>
+          <a:xfrm>
+            <a:off x="8449056" y="1956816"/>
+            <a:ext cx="3282696" cy="4535424"/>
+          </a:xfrm>
+          <a:prstGeom prst="roundRect">
+            <a:avLst>
+              <a:gd name="adj" fmla="val 4000"/>
+            </a:avLst>
+          </a:prstGeom>
+          <a:solidFill>
+            <a:schemeClr val="accent4"/>
+          </a:solidFill>
+          <a:ln w="9525">
+            <a:solidFill>
+              <a:schemeClr val="accent5"/>
+            </a:solidFill>
+          </a:ln>
+          <a:effectLst/>
+        </p:spPr>
+        <p:style>
+          <a:lnRef idx="1">
+            <a:schemeClr val="accent1"/>
+          </a:lnRef>
+          <a:fillRef idx="3">
+            <a:schemeClr val="accent1"/>
+          </a:fillRef>
+          <a:effectRef idx="2">
+            <a:schemeClr val="accent1"/>
+          </a:effectRef>
+          <a:fontRef idx="minor">
+            <a:schemeClr val="lt1"/>
+          </a:fontRef>
+        </p:style>
+        <p:txBody>
+          <a:bodyPr wrap="square" tIns="54864" bIns="54864" rtlCol="0" anchor="t"/>
+          <a:lstStyle/>
+          <a:p>
+            <a:pPr algn="l"/>
+            <a:r>
+              <a:rPr lang="ko-KR" altLang="en-US" sz="950" b="1" dirty="0">
+                <a:solidFill>
+                  <a:schemeClr val="accent1"/>
+                </a:solidFill>
+              </a:rPr>
+              <a:t>값 샘플은 인덱스를 타는 조회만</a:t>
+            </a:r>
+          </a:p>
+          <a:p>
+            <a:pPr algn="l"/>
+            <a:r>
+              <a:rPr lang="ko-KR" altLang="en-US" sz="900" b="0" dirty="0">
+                <a:solidFill>
+                  <a:schemeClr val="tx1"/>
+                </a:solidFill>
+              </a:rPr>
+              <a:t>  인덱스 앞 칸에 값이나 범위를 걸고 몇 행만 읽음</a:t>
+            </a:r>
+          </a:p>
+          <a:p>
+            <a:pPr algn="l"/>
+            <a:r>
+              <a:rPr lang="ko-KR" altLang="en-US" sz="850" b="0" dirty="0">
+                <a:solidFill>
+                  <a:schemeClr val="tx1"/>
+                </a:solidFill>
+                <a:latin typeface="Consolas"/>
+              </a:rPr>
+              <a:t>  WHERE vehicle_id = ?</a:t>
+            </a:r>
+          </a:p>
+          <a:p>
+            <a:pPr algn="l"/>
+            <a:r>
+              <a:rPr lang="ko-KR" altLang="en-US" sz="850" b="0" dirty="0">
+                <a:solidFill>
+                  <a:schemeClr val="tx1"/>
+                </a:solidFill>
+                <a:latin typeface="Consolas"/>
+              </a:rPr>
+              <a:t>    AND collect_datetime &gt;= ? AND &lt; ?</a:t>
+            </a:r>
+          </a:p>
+          <a:p>
+            <a:pPr algn="l"/>
+            <a:r>
+              <a:rPr lang="ko-KR" altLang="en-US" sz="850" b="0" dirty="0">
+                <a:solidFill>
+                  <a:schemeClr val="tx1"/>
+                </a:solidFill>
+                <a:latin typeface="Consolas"/>
+              </a:rPr>
+              <a:t>  ORDER BY collect_datetime LIMIT 1</a:t>
+            </a:r>
+          </a:p>
+          <a:p>
+            <a:pPr algn="l"/>
+            <a:endParaRPr lang="ko-KR" sz="900" dirty="0"/>
+          </a:p>
+          <a:p>
+            <a:pPr algn="l"/>
+            <a:r>
+              <a:rPr lang="ko-KR" altLang="en-US" sz="950" b="1" dirty="0">
+                <a:solidFill>
+                  <a:schemeClr val="accent1"/>
+                </a:solidFill>
+              </a:rPr>
+              <a:t>실행 전에 EXPLAIN</a:t>
+            </a:r>
+          </a:p>
+          <a:p>
+            <a:pPr algn="l"/>
+            <a:r>
+              <a:rPr lang="ko-KR" altLang="en-US" sz="900" b="0" dirty="0">
+                <a:solidFill>
+                  <a:schemeClr val="tx1"/>
+                </a:solidFill>
+              </a:rPr>
+              <a:t>  큰 테이블(1만 행 이상) 전체 훑기면 실행하지 않음</a:t>
+            </a:r>
+          </a:p>
+          <a:p>
+            <a:pPr algn="l"/>
+            <a:r>
+              <a:rPr lang="ko-KR" altLang="en-US" sz="900" b="0" dirty="0">
+                <a:solidFill>
+                  <a:schemeClr val="tx1"/>
+                </a:solidFill>
+              </a:rPr>
+              <a:t>  LLM이 쓴 초안 SQL도 같은 확인</a:t>
+            </a:r>
+          </a:p>
+          <a:p>
+            <a:pPr algn="l"/>
+            <a:endParaRPr lang="ko-KR" sz="900" dirty="0"/>
+          </a:p>
+          <a:p>
+            <a:pPr algn="l"/>
+            <a:r>
+              <a:rPr lang="ko-KR" altLang="en-US" sz="950" b="1" dirty="0">
+                <a:solidFill>
+                  <a:schemeClr val="accent1"/>
+                </a:solidFill>
+              </a:rPr>
+              <a:t>읽기 전용 트랜잭션</a:t>
+            </a:r>
+          </a:p>
+          <a:p>
+            <a:pPr algn="l"/>
+            <a:r>
+              <a:rPr lang="ko-KR" altLang="en-US" sz="900" b="0" dirty="0">
+                <a:solidFill>
+                  <a:schemeClr val="tx1"/>
+                </a:solidFill>
+              </a:rPr>
+              <a:t>  조회당 10초 제한</a:t>
+            </a:r>
+          </a:p>
+          <a:p>
+            <a:pPr algn="l"/>
+            <a:endParaRPr lang="ko-KR" sz="900" dirty="0"/>
+          </a:p>
+          <a:p>
+            <a:pPr algn="l"/>
+            <a:r>
+              <a:rPr lang="ko-KR" altLang="en-US" sz="950" b="1" dirty="0">
+                <a:solidFill>
+                  <a:schemeClr val="accent1"/>
+                </a:solidFill>
+              </a:rPr>
+              <a:t>실측  bms_log 약 1,600만 행</a:t>
+            </a:r>
+          </a:p>
+          <a:p>
+            <a:pPr algn="l"/>
+            <a:r>
+              <a:rPr lang="ko-KR" altLang="en-US" sz="900" b="0" dirty="0">
+                <a:solidFill>
+                  <a:schemeClr val="tx1"/>
+                </a:solidFill>
+              </a:rPr>
+              <a:t>  샘플 조회 8개 모두 Index Scan, 합계 0.12초</a:t>
+            </a:r>
+          </a:p>
+          <a:p>
+            <a:pPr algn="l"/>
+            <a:r>
+              <a:rPr lang="ko-KR" altLang="en-US" sz="900" b="0" dirty="0">
+                <a:solidFill>
+                  <a:schemeClr val="tx1"/>
+                </a:solidFill>
+              </a:rPr>
+              <a:t>  그날 기록이 없는 차량(최악)도 12ms</a:t>
+            </a:r>
+          </a:p>
+        </p:txBody>
+      </p:sp>
+    </p:spTree>
+    <p:extLst>
+      <p:ext uri="{BB962C8B-B14F-4D97-AF65-F5344CB8AC3E}">
+        <p14:creationId xmlns:p14="http://schemas.microsoft.com/office/powerpoint/2010/main" val="638393710"/>
+      </p:ext>
+    </p:extLst>
+  </p:cSld>
+  <p:clrMapOvr>
+    <a:masterClrMapping/>
+  </p:clrMapOvr>
+</p:sld>
+</file>
+
+<file path=ppt/slides/slide19.xml><?xml version="1.0" encoding="utf-8"?>
+<p:sld xmlns:a="http://schemas.openxmlformats.org/drawingml/2006/main" xmlns:r="http://schemas.openxmlformats.org/officeDocument/2006/relationships" xmlns:p="http://schemas.openxmlformats.org/presentationml/2006/main">
+  <p:cSld>
+    <p:spTree>
+      <p:nvGrpSpPr>
+        <p:cNvPr id="1" name=""/>
+        <p:cNvGrpSpPr/>
+        <p:nvPr/>
+      </p:nvGrpSpPr>
+      <p:grpSpPr>
+        <a:xfrm>
+          <a:off x="0" y="0"/>
+          <a:ext cx="0" cy="0"/>
+          <a:chOff x="0" y="0"/>
+          <a:chExt cx="0" cy="0"/>
+        </a:xfrm>
+      </p:grpSpPr>
+      <p:sp>
+        <p:nvSpPr>
+          <p:cNvPr id="2" name="텍스트 개체 틀 1">
+            <a:extLst>
+              <a:ext uri="{FF2B5EF4-FFF2-40B4-BE49-F238E27FC236}">
+                <a16:creationId xmlns:a16="http://schemas.microsoft.com/office/drawing/2014/main" id="{3B7BCE7D-FC0E-026D-71F7-7511A345826E}"/>
+              </a:ext>
+            </a:extLst>
+          </p:cNvPr>
+          <p:cNvSpPr>
+            <a:spLocks noGrp="1"/>
+          </p:cNvSpPr>
+          <p:nvPr>
+            <p:ph type="body" idx="100"/>
+          </p:nvPr>
+        </p:nvSpPr>
+        <p:spPr/>
+        <p:txBody>
+          <a:bodyPr/>
+          <a:lstStyle/>
+          <a:p>
+            <a:r>
+              <a:rPr dirty="0"/>
+              <a:t>8장  지표 등록 자동화 (2/2)  -  baroness 차량 BMS DB  2026-10-20 실제 실행 기록</a:t>
+            </a:r>
+          </a:p>
+        </p:txBody>
+      </p:sp>
+      <p:sp>
+        <p:nvSpPr>
+          <p:cNvPr id="3" name="제목 2">
+            <a:extLst>
+              <a:ext uri="{FF2B5EF4-FFF2-40B4-BE49-F238E27FC236}">
+                <a16:creationId xmlns:a16="http://schemas.microsoft.com/office/drawing/2014/main" id="{54094B4B-8632-B9E4-6566-E997151A3F88}"/>
+              </a:ext>
+            </a:extLst>
+          </p:cNvPr>
+          <p:cNvSpPr>
+            <a:spLocks noGrp="1"/>
+          </p:cNvSpPr>
+          <p:nvPr>
+            <p:ph type="title" idx="101"/>
+          </p:nvPr>
+        </p:nvSpPr>
+        <p:spPr/>
+        <p:txBody>
+          <a:bodyPr/>
+          <a:lstStyle/>
+          <a:p>
+            <a:r>
+              <a:t>지표 초안 실제 결과</a:t>
+            </a:r>
+          </a:p>
+        </p:txBody>
+      </p:sp>
+      <p:sp>
+        <p:nvSpPr>
+          <p:cNvPr id="4" name="사용자 질문"/>
+          <p:cNvSpPr/>
+          <p:nvPr/>
+        </p:nvSpPr>
+        <p:spPr>
+          <a:xfrm>
+            <a:off x="365760" y="932688"/>
+            <a:ext cx="11457432" cy="365760"/>
+          </a:xfrm>
+          <a:prstGeom prst="roundRect">
+            <a:avLst>
+              <a:gd name="adj" fmla="val 25000"/>
+            </a:avLst>
+          </a:prstGeom>
+          <a:solidFill>
+            <a:schemeClr val="accent2"/>
+          </a:solidFill>
+          <a:ln>
+            <a:noFill/>
+          </a:ln>
+          <a:effectLst/>
+        </p:spPr>
+        <p:style>
+          <a:lnRef idx="1">
+            <a:schemeClr val="accent1"/>
+          </a:lnRef>
+          <a:fillRef idx="3">
+            <a:schemeClr val="accent1"/>
+          </a:fillRef>
+          <a:effectRef idx="2">
+            <a:schemeClr val="accent1"/>
+          </a:effectRef>
+          <a:fontRef idx="minor">
+            <a:schemeClr val="lt1"/>
+          </a:fontRef>
+        </p:style>
+        <p:txBody>
+          <a:bodyPr wrap="square" lIns="182880" tIns="54864" rIns="182880" bIns="54864" rtlCol="0" anchor="ctr"/>
+          <a:lstStyle/>
+          <a:p>
+            <a:pPr algn="l"/>
+            <a:r>
+              <a:rPr sz="1000" b="1">
+                <a:solidFill>
+                  <a:schemeClr val="accent5"/>
+                </a:solidFill>
+              </a:rPr>
+              <a:t>사용자 질문   “최근 7일 차량별 무인 절단 시간 합계”   →   초안 1번 시도에 확인 통과   23.8초 (LLM 20.8초)</a:t>
+            </a:r>
+          </a:p>
+        </p:txBody>
+      </p:sp>
+      <p:sp>
+        <p:nvSpPr>
+          <p:cNvPr id="5" name="쓰인 메타정보"/>
+          <p:cNvSpPr/>
+          <p:nvPr/>
+        </p:nvSpPr>
+        <p:spPr>
+          <a:xfrm>
+            <a:off x="365760" y="1463040"/>
+            <a:ext cx="3886200" cy="5120640"/>
+          </a:xfrm>
+          <a:prstGeom prst="roundRect">
+            <a:avLst>
+              <a:gd name="adj" fmla="val 6000"/>
+            </a:avLst>
+          </a:prstGeom>
+          <a:solidFill>
+            <a:schemeClr val="bg1"/>
+          </a:solidFill>
+          <a:ln w="9525">
+            <a:solidFill>
+              <a:schemeClr val="accent6"/>
+            </a:solidFill>
+          </a:ln>
+          <a:effectLst/>
+        </p:spPr>
+        <p:style>
+          <a:lnRef idx="1">
+            <a:schemeClr val="accent1"/>
+          </a:lnRef>
+          <a:fillRef idx="3">
+            <a:schemeClr val="accent1"/>
+          </a:fillRef>
+          <a:effectRef idx="2">
+            <a:schemeClr val="accent1"/>
+          </a:effectRef>
+          <a:fontRef idx="minor">
+            <a:schemeClr val="lt1"/>
+          </a:fontRef>
+        </p:style>
+        <p:txBody>
+          <a:bodyPr tIns="54864" bIns="54864" rtlCol="0" anchor="t"/>
+          <a:lstStyle/>
+          <a:p>
+            <a:pPr algn="ctr"/>
+            <a:endParaRPr/>
+          </a:p>
+        </p:txBody>
+      </p:sp>
+      <p:sp>
+        <p:nvSpPr>
+          <p:cNvPr id="6" name="쓰인 메타정보 제목"/>
+          <p:cNvSpPr/>
+          <p:nvPr/>
+        </p:nvSpPr>
+        <p:spPr>
+          <a:xfrm>
+            <a:off x="457200" y="1554480"/>
+            <a:ext cx="3703320" cy="329184"/>
+          </a:xfrm>
+          <a:prstGeom prst="roundRect">
+            <a:avLst>
+              <a:gd name="adj" fmla="val 15000"/>
+            </a:avLst>
+          </a:prstGeom>
+          <a:solidFill>
+            <a:schemeClr val="accent1"/>
+          </a:solidFill>
+          <a:ln>
+            <a:noFill/>
+          </a:ln>
+          <a:effectLst/>
+        </p:spPr>
+        <p:style>
+          <a:lnRef idx="1">
+            <a:schemeClr val="accent1"/>
+          </a:lnRef>
+          <a:fillRef idx="3">
+            <a:schemeClr val="accent1"/>
+          </a:fillRef>
+          <a:effectRef idx="2">
+            <a:schemeClr val="accent1"/>
+          </a:effectRef>
+          <a:fontRef idx="minor">
+            <a:schemeClr val="lt1"/>
+          </a:fontRef>
+        </p:style>
+        <p:txBody>
+          <a:bodyPr wrap="square" tIns="54864" bIns="54864" rtlCol="0" anchor="ctr"/>
+          <a:lstStyle/>
+          <a:p>
+            <a:pPr algn="ctr"/>
+            <a:r>
+              <a:rPr sz="1050" b="1">
+                <a:solidFill>
+                  <a:schemeClr val="bg1"/>
+                </a:solidFill>
+              </a:rPr>
+              <a:t>값 샘플 (인덱스 idx_bms_log)</a:t>
+            </a:r>
+          </a:p>
+        </p:txBody>
+      </p:sp>
+      <p:sp>
+        <p:nvSpPr>
+          <p:cNvPr id="7" name="쓰인 테이블"/>
+          <p:cNvSpPr txBox="1"/>
+          <p:nvPr/>
+        </p:nvSpPr>
+        <p:spPr>
+          <a:xfrm>
+            <a:off x="502920" y="1975104"/>
+            <a:ext cx="3611880" cy="130805"/>
+          </a:xfrm>
+          <a:prstGeom prst="rect">
+            <a:avLst/>
+          </a:prstGeom>
+          <a:noFill/>
+        </p:spPr>
+        <p:txBody>
+          <a:bodyPr wrap="square" lIns="0" tIns="0" rIns="0" bIns="0">
+            <a:spAutoFit/>
+          </a:bodyPr>
+          <a:lstStyle/>
+          <a:p>
+            <a:pPr algn="l"/>
+            <a:r>
+              <a:rPr lang="ko-KR" altLang="en-US" sz="850" b="1" dirty="0">
+                <a:solidFill>
+                  <a:schemeClr val="accent1"/>
+                </a:solidFill>
+              </a:rPr>
+              <a:t>차량</a:t>
+            </a:r>
+            <a:r>
+              <a:rPr lang="ko-KR" altLang="en-US" sz="850" b="0" dirty="0">
+                <a:solidFill>
+                  <a:schemeClr val="tx1"/>
+                </a:solidFill>
+              </a:rPr>
+              <a:t>  ULM272-14006   시각은 현지(UTC + 9시간)</a:t>
+            </a:r>
+          </a:p>
+        </p:txBody>
+      </p:sp>
+      <p:graphicFrame>
+        <p:nvGraphicFramePr>
+          <p:cNvPr id="8" name="쓰인 컬럼"/>
+          <p:cNvGraphicFramePr>
+            <a:graphicFrameLocks noGrp="1"/>
+          </p:cNvGraphicFramePr>
+          <p:nvPr>
+            <p:extLst>
+              <p:ext uri="{D42A27DB-BD31-4B8C-83A1-F6EECF244321}">
+                <p14:modId xmlns:p14="http://schemas.microsoft.com/office/powerpoint/2010/main" val="1335705477"/>
+              </p:ext>
+            </p:extLst>
+          </p:nvPr>
+        </p:nvGraphicFramePr>
+        <p:xfrm>
+          <a:off x="457200" y="2249424"/>
+          <a:ext cx="3703319" cy="1097280"/>
+        </p:xfrm>
+        <a:graphic>
+          <a:graphicData uri="http://schemas.openxmlformats.org/drawingml/2006/table">
+            <a:tbl>
+              <a:tblPr firstRow="1" bandRow="1">
+                <a:tableStyleId>{5C22544A-7EE6-4342-B048-85BDC9FD1C3A}</a:tableStyleId>
+              </a:tblPr>
+              <a:tblGrid>
+                <a:gridCol w="1084217">
+                  <a:extLst>
+                    <a:ext uri="{9D8B030D-6E8A-4147-A177-3AD203B41FA5}">
+                      <a16:colId xmlns:a16="http://schemas.microsoft.com/office/drawing/2014/main" val="20000"/>
+                    </a:ext>
+                  </a:extLst>
+                </a:gridCol>
+                <a:gridCol w="836023">
+                  <a:extLst>
+                    <a:ext uri="{9D8B030D-6E8A-4147-A177-3AD203B41FA5}">
+                      <a16:colId xmlns:a16="http://schemas.microsoft.com/office/drawing/2014/main" val="20001"/>
+                    </a:ext>
+                  </a:extLst>
+                </a:gridCol>
+                <a:gridCol w="749808">
+                  <a:extLst>
+                    <a:ext uri="{9D8B030D-6E8A-4147-A177-3AD203B41FA5}">
+                      <a16:colId xmlns:a16="http://schemas.microsoft.com/office/drawing/2014/main" val="20002"/>
+                    </a:ext>
+                  </a:extLst>
+                </a:gridCol>
+                <a:gridCol w="1033271">
+                  <a:extLst>
+                    <a:ext uri="{9D8B030D-6E8A-4147-A177-3AD203B41FA5}">
+                      <a16:colId xmlns:a16="http://schemas.microsoft.com/office/drawing/2014/main" val="20003"/>
+                    </a:ext>
+                  </a:extLst>
+                </a:gridCol>
+              </a:tblGrid>
+              <a:tr h="274320">
+                <a:tc>
+                  <a:txBody>
+                    <a:bodyPr/>
+                    <a:lstStyle/>
+                    <a:p>
+                      <a:pPr algn="ctr"/>
+                      <a:r>
+                        <a:rPr sz="750" b="1" dirty="0" err="1">
+                          <a:solidFill>
+                            <a:schemeClr val="bg1"/>
+                          </a:solidFill>
+                        </a:rPr>
+                        <a:t>구분</a:t>
+                      </a:r>
+                      <a:endParaRPr sz="750" dirty="0"/>
+                    </a:p>
+                  </a:txBody>
+                  <a:tcPr marL="36576" marR="36576" marT="13716" marB="13716" anchor="ctr">
+                    <a:solidFill>
+                      <a:schemeClr val="accent1"/>
+                    </a:solidFill>
+                  </a:tcPr>
+                </a:tc>
+                <a:tc>
+                  <a:txBody>
+                    <a:bodyPr/>
+                    <a:lstStyle/>
+                    <a:p>
+                      <a:pPr algn="ctr"/>
+                      <a:r>
+                        <a:rPr sz="750" b="1">
+                          <a:solidFill>
+                            <a:schemeClr val="bg1"/>
+                          </a:solidFill>
+                        </a:rPr>
+                        <a:t>수집 시각</a:t>
+                      </a:r>
+                      <a:endParaRPr sz="750"/>
+                    </a:p>
+                  </a:txBody>
+                  <a:tcPr marL="36576" marR="36576" marT="13716" marB="13716" anchor="ctr">
+                    <a:solidFill>
+                      <a:schemeClr val="accent1"/>
+                    </a:solidFill>
+                  </a:tcPr>
+                </a:tc>
+                <a:tc>
+                  <a:txBody>
+                    <a:bodyPr/>
+                    <a:lstStyle/>
+                    <a:p>
+                      <a:pPr algn="ctr"/>
+                      <a:r>
+                        <a:rPr sz="750" b="1">
+                          <a:solidFill>
+                            <a:schemeClr val="bg1"/>
+                          </a:solidFill>
+                        </a:rPr>
+                        <a:t>uman_reel</a:t>
+                      </a:r>
+                      <a:endParaRPr sz="750"/>
+                    </a:p>
+                  </a:txBody>
+                  <a:tcPr marL="36576" marR="36576" marT="13716" marB="13716" anchor="ctr">
+                    <a:solidFill>
+                      <a:schemeClr val="accent1"/>
+                    </a:solidFill>
+                  </a:tcPr>
+                </a:tc>
+                <a:tc>
+                  <a:txBody>
+                    <a:bodyPr/>
+                    <a:lstStyle/>
+                    <a:p>
+                      <a:pPr algn="ctr"/>
+                      <a:r>
+                        <a:rPr sz="750" b="1">
+                          <a:solidFill>
+                            <a:schemeClr val="bg1"/>
+                          </a:solidFill>
+                        </a:rPr>
+                        <a:t>변화</a:t>
+                      </a:r>
+                      <a:endParaRPr sz="750"/>
+                    </a:p>
+                  </a:txBody>
+                  <a:tcPr marL="36576" marR="36576" marT="13716" marB="13716" anchor="ctr">
+                    <a:solidFill>
+                      <a:schemeClr val="accent1"/>
+                    </a:solidFill>
+                  </a:tcPr>
+                </a:tc>
+                <a:extLst>
+                  <a:ext uri="{0D108BD9-81ED-4DB2-BD59-A6C34878D82A}">
+                    <a16:rowId xmlns:a16="http://schemas.microsoft.com/office/drawing/2014/main" val="10000"/>
+                  </a:ext>
+                </a:extLst>
+              </a:tr>
+              <a:tr h="274320">
+                <a:tc>
+                  <a:txBody>
+                    <a:bodyPr/>
+                    <a:lstStyle/>
+                    <a:p>
+                      <a:r>
+                        <a:rPr sz="750">
+                          <a:solidFill>
+                            <a:schemeClr val="tx1"/>
+                          </a:solidFill>
+                        </a:rPr>
+                        <a:t>10-18 첫 값</a:t>
+                      </a:r>
+                      <a:endParaRPr sz="750"/>
+                    </a:p>
+                  </a:txBody>
+                  <a:tcPr marL="36576" marR="36576" marT="13716" marB="13716" anchor="ctr">
+                    <a:solidFill>
+                      <a:schemeClr val="accent5"/>
+                    </a:solidFill>
+                  </a:tcPr>
+                </a:tc>
+                <a:tc>
+                  <a:txBody>
+                    <a:bodyPr/>
+                    <a:lstStyle/>
+                    <a:p>
+                      <a:r>
+                        <a:rPr sz="750">
+                          <a:solidFill>
+                            <a:schemeClr val="tx1"/>
+                          </a:solidFill>
+                        </a:rPr>
+                        <a:t>10-18 00:00:08</a:t>
+                      </a:r>
+                      <a:endParaRPr sz="750"/>
+                    </a:p>
+                  </a:txBody>
+                  <a:tcPr marL="36576" marR="36576" marT="13716" marB="13716" anchor="ctr">
+                    <a:solidFill>
+                      <a:schemeClr val="accent5"/>
+                    </a:solidFill>
+                  </a:tcPr>
+                </a:tc>
+                <a:tc>
+                  <a:txBody>
+                    <a:bodyPr/>
+                    <a:lstStyle/>
+                    <a:p>
+                      <a:pPr algn="ctr"/>
+                      <a:r>
+                        <a:rPr sz="750">
+                          <a:solidFill>
+                            <a:schemeClr val="tx1"/>
+                          </a:solidFill>
+                        </a:rPr>
+                        <a:t>347.7</a:t>
+                      </a:r>
+                      <a:endParaRPr sz="750"/>
+                    </a:p>
+                  </a:txBody>
+                  <a:tcPr marL="36576" marR="36576" marT="13716" marB="13716" anchor="ctr">
+                    <a:solidFill>
+                      <a:schemeClr val="accent5"/>
+                    </a:solidFill>
+                  </a:tcPr>
+                </a:tc>
+                <a:tc>
+                  <a:txBody>
+                    <a:bodyPr/>
+                    <a:lstStyle/>
+                    <a:p>
+                      <a:r>
+                        <a:rPr sz="750">
+                          <a:solidFill>
+                            <a:schemeClr val="tx1"/>
+                          </a:solidFill>
+                        </a:rPr>
+                        <a:t/>
+                      </a:r>
+                      <a:endParaRPr sz="750" dirty="0"/>
+                    </a:p>
+                  </a:txBody>
+                  <a:tcPr marL="36576" marR="36576" marT="13716" marB="13716" anchor="ctr">
+                    <a:solidFill>
+                      <a:schemeClr val="accent5"/>
+                    </a:solidFill>
+                  </a:tcPr>
+                </a:tc>
+                <a:extLst>
+                  <a:ext uri="{0D108BD9-81ED-4DB2-BD59-A6C34878D82A}">
+                    <a16:rowId xmlns:a16="http://schemas.microsoft.com/office/drawing/2014/main" val="10001"/>
+                  </a:ext>
+                </a:extLst>
+              </a:tr>
+              <a:tr h="274320">
+                <a:tc>
+                  <a:txBody>
+                    <a:bodyPr/>
+                    <a:lstStyle/>
+                    <a:p>
+                      <a:r>
+                        <a:rPr sz="750">
+                          <a:solidFill>
+                            <a:schemeClr val="tx1"/>
+                          </a:solidFill>
+                        </a:rPr>
+                        <a:t>10-18 마지막 값</a:t>
+                      </a:r>
+                      <a:endParaRPr sz="750"/>
+                    </a:p>
+                  </a:txBody>
+                  <a:tcPr marL="36576" marR="36576" marT="13716" marB="13716" anchor="ctr">
+                    <a:solidFill>
+                      <a:schemeClr val="accent4"/>
+                    </a:solidFill>
+                  </a:tcPr>
+                </a:tc>
+                <a:tc>
+                  <a:txBody>
+                    <a:bodyPr/>
+                    <a:lstStyle/>
+                    <a:p>
+                      <a:r>
+                        <a:rPr sz="750">
+                          <a:solidFill>
+                            <a:schemeClr val="tx1"/>
+                          </a:solidFill>
+                        </a:rPr>
+                        <a:t>10-18 23:59:48</a:t>
+                      </a:r>
+                      <a:endParaRPr sz="750"/>
+                    </a:p>
+                  </a:txBody>
+                  <a:tcPr marL="36576" marR="36576" marT="13716" marB="13716" anchor="ctr">
+                    <a:solidFill>
+                      <a:schemeClr val="accent4"/>
+                    </a:solidFill>
+                  </a:tcPr>
+                </a:tc>
+                <a:tc>
+                  <a:txBody>
+                    <a:bodyPr/>
+                    <a:lstStyle/>
+                    <a:p>
+                      <a:pPr algn="ctr"/>
+                      <a:r>
+                        <a:rPr sz="750">
+                          <a:solidFill>
+                            <a:schemeClr val="tx1"/>
+                          </a:solidFill>
+                        </a:rPr>
+                        <a:t>352.7</a:t>
+                      </a:r>
+                      <a:endParaRPr sz="750"/>
+                    </a:p>
+                  </a:txBody>
+                  <a:tcPr marL="36576" marR="36576" marT="13716" marB="13716" anchor="ctr">
+                    <a:solidFill>
+                      <a:schemeClr val="accent4"/>
+                    </a:solidFill>
+                  </a:tcPr>
+                </a:tc>
+                <a:tc>
+                  <a:txBody>
+                    <a:bodyPr/>
+                    <a:lstStyle/>
+                    <a:p>
+                      <a:r>
+                        <a:rPr sz="750">
+                          <a:solidFill>
+                            <a:schemeClr val="tx1"/>
+                          </a:solidFill>
+                        </a:rPr>
+                        <a:t>+5.0</a:t>
+                      </a:r>
+                      <a:endParaRPr sz="750"/>
+                    </a:p>
+                  </a:txBody>
+                  <a:tcPr marL="36576" marR="36576" marT="13716" marB="13716" anchor="ctr">
+                    <a:solidFill>
+                      <a:schemeClr val="accent4"/>
+                    </a:solidFill>
+                  </a:tcPr>
+                </a:tc>
+                <a:extLst>
+                  <a:ext uri="{0D108BD9-81ED-4DB2-BD59-A6C34878D82A}">
+                    <a16:rowId xmlns:a16="http://schemas.microsoft.com/office/drawing/2014/main" val="10002"/>
+                  </a:ext>
+                </a:extLst>
+              </a:tr>
+              <a:tr h="274320">
+                <a:tc>
+                  <a:txBody>
+                    <a:bodyPr/>
+                    <a:lstStyle/>
+                    <a:p>
+                      <a:r>
+                        <a:rPr sz="750">
+                          <a:solidFill>
+                            <a:schemeClr val="tx1"/>
+                          </a:solidFill>
+                        </a:rPr>
+                        <a:t>10-19 첫 값</a:t>
+                      </a:r>
+                      <a:endParaRPr sz="750"/>
+                    </a:p>
+                  </a:txBody>
+                  <a:tcPr marL="36576" marR="36576" marT="13716" marB="13716" anchor="ctr">
+                    <a:solidFill>
+                      <a:schemeClr val="accent5"/>
+                    </a:solidFill>
+                  </a:tcPr>
+                </a:tc>
+                <a:tc>
+                  <a:txBody>
+                    <a:bodyPr/>
+                    <a:lstStyle/>
+                    <a:p>
+                      <a:r>
+                        <a:rPr sz="750">
+                          <a:solidFill>
+                            <a:schemeClr val="tx1"/>
+                          </a:solidFill>
+                        </a:rPr>
+                        <a:t>10-19 00:00:03</a:t>
+                      </a:r>
+                      <a:endParaRPr sz="750"/>
+                    </a:p>
+                  </a:txBody>
+                  <a:tcPr marL="36576" marR="36576" marT="13716" marB="13716" anchor="ctr">
+                    <a:solidFill>
+                      <a:schemeClr val="accent5"/>
+                    </a:solidFill>
+                  </a:tcPr>
+                </a:tc>
+                <a:tc>
+                  <a:txBody>
+                    <a:bodyPr/>
+                    <a:lstStyle/>
+                    <a:p>
+                      <a:pPr algn="ctr"/>
+                      <a:r>
+                        <a:rPr sz="750">
+                          <a:solidFill>
+                            <a:schemeClr val="tx1"/>
+                          </a:solidFill>
+                        </a:rPr>
+                        <a:t>352.7</a:t>
+                      </a:r>
+                      <a:endParaRPr sz="750"/>
+                    </a:p>
+                  </a:txBody>
+                  <a:tcPr marL="36576" marR="36576" marT="13716" marB="13716" anchor="ctr">
+                    <a:solidFill>
+                      <a:schemeClr val="accent5"/>
+                    </a:solidFill>
+                  </a:tcPr>
+                </a:tc>
+                <a:tc>
+                  <a:txBody>
+                    <a:bodyPr/>
+                    <a:lstStyle/>
+                    <a:p>
+                      <a:r>
+                        <a:rPr sz="750">
+                          <a:solidFill>
+                            <a:schemeClr val="tx1"/>
+                          </a:solidFill>
+                        </a:rPr>
+                        <a:t>이어짐</a:t>
+                      </a:r>
+                      <a:endParaRPr sz="750" dirty="0"/>
+                    </a:p>
+                  </a:txBody>
+                  <a:tcPr marL="36576" marR="36576" marT="13716" marB="13716" anchor="ctr">
+                    <a:solidFill>
+                      <a:schemeClr val="accent5"/>
+                    </a:solidFill>
+                  </a:tcPr>
+                </a:tc>
+                <a:extLst>
+                  <a:ext uri="{0D108BD9-81ED-4DB2-BD59-A6C34878D82A}">
+                    <a16:rowId xmlns:a16="http://schemas.microsoft.com/office/drawing/2014/main" val="2219227422"/>
+                  </a:ext>
+                </a:extLst>
+              </a:tr>
+              <a:tr h="274320">
+                <a:tc>
+                  <a:txBody>
+                    <a:bodyPr/>
+                    <a:lstStyle/>
+                    <a:p>
+                      <a:r>
+                        <a:rPr sz="750">
+                          <a:solidFill>
+                            <a:schemeClr val="tx1"/>
+                          </a:solidFill>
+                        </a:rPr>
+                        <a:t>10-19 마지막 값</a:t>
+                      </a:r>
+                      <a:endParaRPr sz="750"/>
+                    </a:p>
+                  </a:txBody>
+                  <a:tcPr marL="36576" marR="36576" marT="13716" marB="13716" anchor="ctr">
+                    <a:solidFill>
+                      <a:schemeClr val="accent4"/>
+                    </a:solidFill>
+                  </a:tcPr>
+                </a:tc>
+                <a:tc>
+                  <a:txBody>
+                    <a:bodyPr/>
+                    <a:lstStyle/>
+                    <a:p>
+                      <a:r>
+                        <a:rPr sz="750">
+                          <a:solidFill>
+                            <a:schemeClr val="tx1"/>
+                          </a:solidFill>
+                        </a:rPr>
+                        <a:t>10-19 23:59:46</a:t>
+                      </a:r>
+                      <a:endParaRPr sz="750"/>
+                    </a:p>
+                  </a:txBody>
+                  <a:tcPr marL="36576" marR="36576" marT="13716" marB="13716" anchor="ctr">
+                    <a:solidFill>
+                      <a:schemeClr val="accent4"/>
+                    </a:solidFill>
+                  </a:tcPr>
+                </a:tc>
+                <a:tc>
+                  <a:txBody>
+                    <a:bodyPr/>
+                    <a:lstStyle/>
+                    <a:p>
+                      <a:pPr algn="ctr"/>
+                      <a:r>
+                        <a:rPr sz="750">
+                          <a:solidFill>
+                            <a:schemeClr val="tx1"/>
+                          </a:solidFill>
+                        </a:rPr>
+                        <a:t>355.5</a:t>
+                      </a:r>
+                      <a:endParaRPr sz="750"/>
+                    </a:p>
+                  </a:txBody>
+                  <a:tcPr marL="36576" marR="36576" marT="13716" marB="13716" anchor="ctr">
+                    <a:solidFill>
+                      <a:schemeClr val="accent4"/>
+                    </a:solidFill>
+                  </a:tcPr>
+                </a:tc>
+                <a:tc>
+                  <a:txBody>
+                    <a:bodyPr/>
+                    <a:lstStyle/>
+                    <a:p>
+                      <a:r>
+                        <a:rPr sz="750">
+                          <a:solidFill>
+                            <a:schemeClr val="tx1"/>
+                          </a:solidFill>
+                        </a:rPr>
+                        <a:t>+2.8</a:t>
+                      </a:r>
+                      <a:endParaRPr sz="750"/>
+                    </a:p>
+                  </a:txBody>
+                  <a:tcPr marL="36576" marR="36576" marT="13716" marB="13716" anchor="ctr">
+                    <a:solidFill>
+                      <a:schemeClr val="accent4"/>
+                    </a:solidFill>
+                  </a:tcPr>
+                </a:tc>
+                <a:extLst>
+                  <a:ext uri="{0D108BD9-81ED-4DB2-BD59-A6C34878D82A}">
+                    <a16:rowId xmlns:a16="http://schemas.microsoft.com/office/drawing/2014/main" val="10002"/>
+                  </a:ext>
+                </a:extLst>
+              </a:tr>
+              <a:tr h="274320">
+                <a:tc>
+                  <a:txBody>
+                    <a:bodyPr/>
+                    <a:lstStyle/>
+                    <a:p>
+                      <a:r>
+                        <a:rPr sz="750">
+                          <a:solidFill>
+                            <a:schemeClr val="tx1"/>
+                          </a:solidFill>
+                        </a:rPr>
+                        <a:t>10-20 첫 값</a:t>
+                      </a:r>
+                      <a:endParaRPr sz="750"/>
+                    </a:p>
+                  </a:txBody>
+                  <a:tcPr marL="36576" marR="36576" marT="13716" marB="13716" anchor="ctr">
+                    <a:solidFill>
+                      <a:schemeClr val="accent5"/>
+                    </a:solidFill>
+                  </a:tcPr>
+                </a:tc>
+                <a:tc>
+                  <a:txBody>
+                    <a:bodyPr/>
+                    <a:lstStyle/>
+                    <a:p>
+                      <a:r>
+                        <a:rPr sz="750">
+                          <a:solidFill>
+                            <a:schemeClr val="tx1"/>
+                          </a:solidFill>
+                        </a:rPr>
+                        <a:t>10-20 00:00:01</a:t>
+                      </a:r>
+                      <a:endParaRPr sz="750"/>
+                    </a:p>
+                  </a:txBody>
+                  <a:tcPr marL="36576" marR="36576" marT="13716" marB="13716" anchor="ctr">
+                    <a:solidFill>
+                      <a:schemeClr val="accent5"/>
+                    </a:solidFill>
+                  </a:tcPr>
+                </a:tc>
+                <a:tc>
+                  <a:txBody>
+                    <a:bodyPr/>
+                    <a:lstStyle/>
+                    <a:p>
+                      <a:pPr algn="ctr"/>
+                      <a:r>
+                        <a:rPr sz="750">
+                          <a:solidFill>
+                            <a:schemeClr val="tx1"/>
+                          </a:solidFill>
+                        </a:rPr>
+                        <a:t>355.5</a:t>
+                      </a:r>
+                      <a:endParaRPr sz="750"/>
+                    </a:p>
+                  </a:txBody>
+                  <a:tcPr marL="36576" marR="36576" marT="13716" marB="13716" anchor="ctr">
+                    <a:solidFill>
+                      <a:schemeClr val="accent5"/>
+                    </a:solidFill>
+                  </a:tcPr>
+                </a:tc>
+                <a:tc>
+                  <a:txBody>
+                    <a:bodyPr/>
+                    <a:lstStyle/>
+                    <a:p>
+                      <a:r>
+                        <a:rPr sz="750">
+                          <a:solidFill>
+                            <a:schemeClr val="tx1"/>
+                          </a:solidFill>
+                        </a:rPr>
+                        <a:t>이어짐</a:t>
+                      </a:r>
+                      <a:endParaRPr sz="750" dirty="0"/>
+                    </a:p>
+                  </a:txBody>
+                  <a:tcPr marL="36576" marR="36576" marT="13716" marB="13716" anchor="ctr">
+                    <a:solidFill>
+                      <a:schemeClr val="accent5"/>
+                    </a:solidFill>
+                  </a:tcPr>
+                </a:tc>
+                <a:extLst>
+                  <a:ext uri="{0D108BD9-81ED-4DB2-BD59-A6C34878D82A}">
+                    <a16:rowId xmlns:a16="http://schemas.microsoft.com/office/drawing/2014/main" val="10001"/>
+                  </a:ext>
+                </a:extLst>
+              </a:tr>
+              <a:tr h="274320">
+                <a:tc>
+                  <a:txBody>
+                    <a:bodyPr/>
+                    <a:lstStyle/>
+                    <a:p>
+                      <a:r>
+                        <a:rPr sz="750">
+                          <a:solidFill>
+                            <a:schemeClr val="tx1"/>
+                          </a:solidFill>
+                        </a:rPr>
+                        <a:t>최근</a:t>
+                      </a:r>
+                      <a:endParaRPr sz="750"/>
+                    </a:p>
+                  </a:txBody>
+                  <a:tcPr marL="36576" marR="36576" marT="13716" marB="13716" anchor="ctr">
+                    <a:solidFill>
+                      <a:schemeClr val="accent4"/>
+                    </a:solidFill>
+                  </a:tcPr>
+                </a:tc>
+                <a:tc>
+                  <a:txBody>
+                    <a:bodyPr/>
+                    <a:lstStyle/>
+                    <a:p>
+                      <a:r>
+                        <a:rPr sz="750">
+                          <a:solidFill>
+                            <a:schemeClr val="tx1"/>
+                          </a:solidFill>
+                        </a:rPr>
+                        <a:t>10-20 11:08:41</a:t>
+                      </a:r>
+                      <a:endParaRPr sz="750"/>
+                    </a:p>
+                  </a:txBody>
+                  <a:tcPr marL="36576" marR="36576" marT="13716" marB="13716" anchor="ctr">
+                    <a:solidFill>
+                      <a:schemeClr val="accent4"/>
+                    </a:solidFill>
+                  </a:tcPr>
+                </a:tc>
+                <a:tc>
+                  <a:txBody>
+                    <a:bodyPr/>
+                    <a:lstStyle/>
+                    <a:p>
+                      <a:pPr algn="ctr"/>
+                      <a:r>
+                        <a:rPr sz="750">
+                          <a:solidFill>
+                            <a:schemeClr val="tx1"/>
+                          </a:solidFill>
+                        </a:rPr>
+                        <a:t>356.5</a:t>
+                      </a:r>
+                      <a:endParaRPr sz="750"/>
+                    </a:p>
+                  </a:txBody>
+                  <a:tcPr marL="36576" marR="36576" marT="13716" marB="13716" anchor="ctr">
+                    <a:solidFill>
+                      <a:schemeClr val="accent4"/>
+                    </a:solidFill>
+                  </a:tcPr>
+                </a:tc>
+                <a:tc>
+                  <a:txBody>
+                    <a:bodyPr/>
+                    <a:lstStyle/>
+                    <a:p>
+                      <a:r>
+                        <a:rPr sz="750">
+                          <a:solidFill>
+                            <a:schemeClr val="tx1"/>
+                          </a:solidFill>
+                        </a:rPr>
+                        <a:t>+1.0</a:t>
+                      </a:r>
+                      <a:endParaRPr sz="750"/>
+                    </a:p>
+                  </a:txBody>
+                  <a:tcPr marL="36576" marR="36576" marT="13716" marB="13716" anchor="ctr">
+                    <a:solidFill>
+                      <a:schemeClr val="accent4"/>
+                    </a:solidFill>
+                  </a:tcPr>
+                </a:tc>
+                <a:extLst>
+                  <a:ext uri="{0D108BD9-81ED-4DB2-BD59-A6C34878D82A}">
+                    <a16:rowId xmlns:a16="http://schemas.microsoft.com/office/drawing/2014/main" val="10002"/>
+                  </a:ext>
+                </a:extLst>
+              </a:tr>
+            </a:tbl>
+          </a:graphicData>
+        </a:graphic>
+      </p:graphicFrame>
+      <p:sp>
+        <p:nvSpPr>
+          <p:cNvPr id="9" name="쓰인 지표 제목"/>
+          <p:cNvSpPr txBox="1"/>
+          <p:nvPr/>
+        </p:nvSpPr>
+        <p:spPr>
+          <a:xfrm>
+            <a:off x="502920" y="4389120"/>
+            <a:ext cx="3611880" cy="228600"/>
+          </a:xfrm>
+          <a:prstGeom prst="rect">
+            <a:avLst/>
+          </a:prstGeom>
+          <a:noFill/>
+        </p:spPr>
+        <p:txBody>
+          <a:bodyPr wrap="square" lIns="0" tIns="0" rIns="0" bIns="0">
+            <a:spAutoFit/>
+          </a:bodyPr>
+          <a:lstStyle/>
+          <a:p>
+            <a:pPr algn="l"/>
+            <a:r>
+              <a:rPr lang="ko-KR" altLang="en-US" sz="850" b="1" dirty="0">
+                <a:solidFill>
+                  <a:schemeClr val="accent1"/>
+                </a:solidFill>
+              </a:rPr>
+              <a:t>LLM 판단</a:t>
+            </a:r>
+          </a:p>
+        </p:txBody>
+      </p:sp>
+      <p:sp>
+        <p:nvSpPr>
+          <p:cNvPr id="10" name="쓰인 지표"/>
+          <p:cNvSpPr/>
+          <p:nvPr/>
+        </p:nvSpPr>
+        <p:spPr>
+          <a:xfrm>
+            <a:off x="457200" y="4626864"/>
+            <a:ext cx="3703320" cy="1865376"/>
+          </a:xfrm>
+          <a:prstGeom prst="roundRect">
+            <a:avLst>
+              <a:gd name="adj" fmla="val 4000"/>
+            </a:avLst>
+          </a:prstGeom>
+          <a:solidFill>
+            <a:schemeClr val="accent4"/>
+          </a:solidFill>
+          <a:ln w="9525">
+            <a:solidFill>
+              <a:schemeClr val="accent5"/>
+            </a:solidFill>
+          </a:ln>
+          <a:effectLst/>
+        </p:spPr>
+        <p:style>
+          <a:lnRef idx="1">
+            <a:schemeClr val="accent1"/>
+          </a:lnRef>
+          <a:fillRef idx="3">
+            <a:schemeClr val="accent1"/>
+          </a:fillRef>
+          <a:effectRef idx="2">
+            <a:schemeClr val="accent1"/>
+          </a:effectRef>
+          <a:fontRef idx="minor">
+            <a:schemeClr val="lt1"/>
+          </a:fontRef>
+        </p:style>
+        <p:txBody>
+          <a:bodyPr wrap="square" tIns="54864" bIns="54864" rtlCol="0" anchor="t"/>
+          <a:lstStyle/>
+          <a:p>
+            <a:pPr algn="l"/>
+            <a:r>
+              <a:rPr lang="ko-KR" altLang="en-US" sz="950" b="0" dirty="0">
+                <a:solidFill>
+                  <a:schemeClr val="tx1"/>
+                </a:solidFill>
+              </a:rPr>
+              <a:t>날짜가 바뀌어도 값이 이어짐 (352.7 → 352.7)</a:t>
+            </a:r>
+          </a:p>
+          <a:p>
+            <a:pPr algn="l"/>
+            <a:r>
+              <a:rPr lang="ko-KR" altLang="en-US" sz="950" b="0" dirty="0">
+                <a:solidFill>
+                  <a:schemeClr val="tx1"/>
+                </a:solidFill>
+              </a:rPr>
+              <a:t>  → 날을 넘어 커지는 누적값</a:t>
+            </a:r>
+          </a:p>
+          <a:p>
+            <a:pPr algn="l"/>
+            <a:r>
+              <a:rPr lang="ko-KR" altLang="en-US" sz="950" b="0" dirty="0">
+                <a:solidFill>
+                  <a:schemeClr val="tx1"/>
+                </a:solidFill>
+              </a:rPr>
+              <a:t>  → 현지 날짜별 하루의 MAX − MIN 으로 계산</a:t>
+            </a:r>
+          </a:p>
+          <a:p>
+            <a:pPr algn="l"/>
+            <a:endParaRPr lang="ko-KR" sz="950" dirty="0"/>
+          </a:p>
+          <a:p>
+            <a:pPr algn="l"/>
+            <a:r>
+              <a:rPr lang="ko-KR" altLang="en-US" sz="950" b="0" dirty="0">
+                <a:solidFill>
+                  <a:schemeClr val="tx1"/>
+                </a:solidFill>
+              </a:rPr>
+              <a:t>같은 테이블 지표 '무인 가동시간'과</a:t>
+            </a:r>
+          </a:p>
+          <a:p>
+            <a:pPr algn="l"/>
+            <a:r>
+              <a:rPr lang="ko-KR" altLang="en-US" sz="950" b="0" dirty="0">
+                <a:solidFill>
+                  <a:schemeClr val="tx1"/>
+                </a:solidFill>
+              </a:rPr>
+              <a:t>  같은 묶음 단위(차량 × 일)와 UTC 처리</a:t>
+            </a:r>
+          </a:p>
+        </p:txBody>
+      </p:sp>
+      <p:sp>
+        <p:nvSpPr>
+          <p:cNvPr id="11" name="화살표 1→2"/>
+          <p:cNvSpPr/>
+          <p:nvPr/>
+        </p:nvSpPr>
+        <p:spPr>
+          <a:xfrm>
+            <a:off x="4297680" y="3657600"/>
+            <a:ext cx="274320" cy="310896"/>
+          </a:xfrm>
+          <a:prstGeom prst="rightArrow">
+            <a:avLst/>
+          </a:prstGeom>
+          <a:solidFill>
+            <a:schemeClr val="accent3"/>
+          </a:solidFill>
+          <a:ln>
+            <a:noFill/>
+          </a:ln>
+          <a:effectLst/>
+        </p:spPr>
+        <p:style>
+          <a:lnRef idx="1">
+            <a:schemeClr val="accent1"/>
+          </a:lnRef>
+          <a:fillRef idx="3">
+            <a:schemeClr val="accent1"/>
+          </a:fillRef>
+          <a:effectRef idx="2">
+            <a:schemeClr val="accent1"/>
+          </a:effectRef>
+          <a:fontRef idx="minor">
+            <a:schemeClr val="lt1"/>
+          </a:fontRef>
+        </p:style>
+        <p:txBody>
+          <a:bodyPr rtlCol="0" anchor="ctr"/>
+          <a:lstStyle/>
+          <a:p>
+            <a:pPr algn="ctr"/>
+            <a:endParaRPr/>
+          </a:p>
+        </p:txBody>
+      </p:sp>
+      <p:sp>
+        <p:nvSpPr>
+          <p:cNvPr id="12" name="LLM 연계 Agent 로직"/>
+          <p:cNvSpPr/>
+          <p:nvPr/>
+        </p:nvSpPr>
+        <p:spPr>
+          <a:xfrm>
+            <a:off x="4626864" y="1463040"/>
+            <a:ext cx="3310128" cy="5120640"/>
+          </a:xfrm>
+          <a:prstGeom prst="roundRect">
+            <a:avLst>
+              <a:gd name="adj" fmla="val 6000"/>
+            </a:avLst>
+          </a:prstGeom>
+          <a:solidFill>
+            <a:schemeClr val="bg1"/>
+          </a:solidFill>
+          <a:ln w="9525">
+            <a:solidFill>
+              <a:schemeClr val="accent6"/>
+            </a:solidFill>
+          </a:ln>
+          <a:effectLst/>
+        </p:spPr>
+        <p:style>
+          <a:lnRef idx="1">
+            <a:schemeClr val="accent1"/>
+          </a:lnRef>
+          <a:fillRef idx="3">
+            <a:schemeClr val="accent1"/>
+          </a:fillRef>
+          <a:effectRef idx="2">
+            <a:schemeClr val="accent1"/>
+          </a:effectRef>
+          <a:fontRef idx="minor">
+            <a:schemeClr val="lt1"/>
+          </a:fontRef>
+        </p:style>
+        <p:txBody>
+          <a:bodyPr tIns="54864" bIns="54864" rtlCol="0" anchor="t"/>
+          <a:lstStyle/>
+          <a:p>
+            <a:pPr algn="ctr"/>
+            <a:endParaRPr/>
+          </a:p>
+        </p:txBody>
+      </p:sp>
+      <p:sp>
+        <p:nvSpPr>
+          <p:cNvPr id="13" name="LLM 연계 Agent 로직 제목"/>
+          <p:cNvSpPr/>
+          <p:nvPr/>
+        </p:nvSpPr>
+        <p:spPr>
+          <a:xfrm>
+            <a:off x="4718303" y="1554480"/>
+            <a:ext cx="3127248" cy="329184"/>
+          </a:xfrm>
+          <a:prstGeom prst="roundRect">
+            <a:avLst>
+              <a:gd name="adj" fmla="val 15000"/>
+            </a:avLst>
+          </a:prstGeom>
+          <a:solidFill>
+            <a:schemeClr val="accent1"/>
+          </a:solidFill>
+          <a:ln>
+            <a:noFill/>
+          </a:ln>
+          <a:effectLst/>
+        </p:spPr>
+        <p:style>
+          <a:lnRef idx="1">
+            <a:schemeClr val="accent1"/>
+          </a:lnRef>
+          <a:fillRef idx="3">
+            <a:schemeClr val="accent1"/>
+          </a:fillRef>
+          <a:effectRef idx="2">
+            <a:schemeClr val="accent1"/>
+          </a:effectRef>
+          <a:fontRef idx="minor">
+            <a:schemeClr val="lt1"/>
+          </a:fontRef>
+        </p:style>
+        <p:txBody>
+          <a:bodyPr wrap="square" tIns="54864" bIns="54864" rtlCol="0" anchor="ctr"/>
+          <a:lstStyle/>
+          <a:p>
+            <a:pPr algn="ctr"/>
+            <a:r>
+              <a:rPr sz="1050" b="1">
+                <a:solidFill>
+                  <a:schemeClr val="bg1"/>
+                </a:solidFill>
+              </a:rPr>
+              <a:t>LLM 초안 (저장 전)</a:t>
+            </a:r>
+          </a:p>
+        </p:txBody>
+      </p:sp>
+      <p:sp>
+        <p:nvSpPr>
+          <p:cNvPr id="14" name="LLM 연계 Agent 로직 내용"/>
+          <p:cNvSpPr/>
+          <p:nvPr/>
+        </p:nvSpPr>
+        <p:spPr>
+          <a:xfrm>
+            <a:off x="4718303" y="1956816"/>
+            <a:ext cx="3127248" cy="4535424"/>
+          </a:xfrm>
+          <a:prstGeom prst="roundRect">
+            <a:avLst>
+              <a:gd name="adj" fmla="val 4000"/>
+            </a:avLst>
+          </a:prstGeom>
+          <a:solidFill>
+            <a:schemeClr val="accent4"/>
+          </a:solidFill>
+          <a:ln w="9525">
+            <a:solidFill>
+              <a:schemeClr val="accent5"/>
+            </a:solidFill>
+          </a:ln>
+          <a:effectLst/>
+        </p:spPr>
+        <p:style>
+          <a:lnRef idx="1">
+            <a:schemeClr val="accent1"/>
+          </a:lnRef>
+          <a:fillRef idx="3">
+            <a:schemeClr val="accent1"/>
+          </a:fillRef>
+          <a:effectRef idx="2">
+            <a:schemeClr val="accent1"/>
+          </a:effectRef>
+          <a:fontRef idx="minor">
+            <a:schemeClr val="lt1"/>
+          </a:fontRef>
+        </p:style>
+        <p:txBody>
+          <a:bodyPr wrap="square" tIns="54864" bIns="54864" rtlCol="0" anchor="t"/>
+          <a:lstStyle/>
+          <a:p>
+            <a:pPr algn="l"/>
+            <a:r>
+              <a:rPr lang="ko-KR" altLang="en-US" sz="950" b="1" dirty="0">
+                <a:solidFill>
+                  <a:schemeClr val="accent1"/>
+                </a:solidFill>
+              </a:rPr>
+              <a:t>이름</a:t>
+            </a:r>
+          </a:p>
+          <a:p>
+            <a:pPr algn="l"/>
+            <a:r>
+              <a:rPr lang="ko-KR" altLang="en-US" sz="950" b="0" dirty="0">
+                <a:solidFill>
+                  <a:schemeClr val="tx1"/>
+                </a:solidFill>
+              </a:rPr>
+              <a:t>  무인 절단 시간</a:t>
+            </a:r>
+          </a:p>
+          <a:p>
+            <a:pPr algn="l"/>
+            <a:r>
+              <a:rPr lang="ko-KR" altLang="en-US" sz="950" b="1" dirty="0">
+                <a:solidFill>
+                  <a:schemeClr val="accent1"/>
+                </a:solidFill>
+              </a:rPr>
+              <a:t>같은 말</a:t>
+            </a:r>
+          </a:p>
+          <a:p>
+            <a:pPr algn="l"/>
+            <a:r>
+              <a:rPr lang="ko-KR" altLang="en-US" sz="950" b="0" dirty="0">
+                <a:solidFill>
+                  <a:schemeClr val="tx1"/>
+                </a:solidFill>
+              </a:rPr>
+              <a:t>  무인 절단시간, 무인 절단 시간 증가분, uman_reel</a:t>
+            </a:r>
+          </a:p>
+          <a:p>
+            <a:pPr algn="l"/>
+            <a:r>
+              <a:rPr lang="ko-KR" altLang="en-US" sz="950" b="1" dirty="0">
+                <a:solidFill>
+                  <a:schemeClr val="accent1"/>
+                </a:solidFill>
+              </a:rPr>
+              <a:t>설명</a:t>
+            </a:r>
+          </a:p>
+          <a:p>
+            <a:pPr algn="l"/>
+            <a:r>
+              <a:rPr lang="ko-KR" altLang="en-US" sz="950" b="0" dirty="0">
+                <a:solidFill>
+                  <a:schemeClr val="tx1"/>
+                </a:solidFill>
+              </a:rPr>
+              <a:t>  차량별 하루 무인 절단 시간. uman_reel은 누적값이므로 UTC+9 현지 날짜 기준으로 하루의 MAX(uman_reel) - MIN(uman_reel)을 계산한다. 기간별 합계는 이 일별 값을 SUM으로 구한다.</a:t>
+            </a:r>
+          </a:p>
+          <a:p>
+            <a:pPr algn="l"/>
+            <a:r>
+              <a:rPr lang="ko-KR" altLang="en-US" sz="950" b="1" dirty="0">
+                <a:solidFill>
+                  <a:schemeClr val="accent1"/>
+                </a:solidFill>
+              </a:rPr>
+              <a:t>확인할 가정</a:t>
+            </a:r>
+          </a:p>
+          <a:p>
+            <a:pPr algn="l"/>
+            <a:r>
+              <a:rPr lang="ko-KR" altLang="en-US" sz="950" b="0" dirty="0">
+                <a:solidFill>
+                  <a:schemeClr val="tx1"/>
+                </a:solidFill>
+              </a:rPr>
+              <a:t>  uman_reel은 하루 중 리셋되지 않고 누적 증가한다</a:t>
+            </a:r>
+          </a:p>
+          <a:p>
+            <a:pPr algn="l"/>
+            <a:r>
+              <a:rPr lang="ko-KR" altLang="en-US" sz="950" b="0" dirty="0">
+                <a:solidFill>
+                  <a:schemeClr val="tx1"/>
+                </a:solidFill>
+              </a:rPr>
+              <a:t>  collect_datetime은 UTC로 저장되어 있으며 UTC+9로 변환해 현지 날짜를 만든다</a:t>
+            </a:r>
+          </a:p>
+          <a:p>
+            <a:pPr algn="l"/>
+            <a:r>
+              <a:rPr lang="ko-KR" altLang="en-US" sz="950" b="0" dirty="0">
+                <a:solidFill>
+                  <a:schemeClr val="tx1"/>
+                </a:solidFill>
+              </a:rPr>
+              <a:t>  차량별 하루에 최소 1개 이상의 로그가 존재한다</a:t>
+            </a:r>
+          </a:p>
+          <a:p>
+            <a:pPr algn="l"/>
+            <a:endParaRPr lang="ko-KR" sz="950" dirty="0"/>
+          </a:p>
+          <a:p>
+            <a:pPr algn="l"/>
+            <a:r>
+              <a:rPr lang="ko-KR" altLang="en-US" sz="950" b="1" dirty="0">
+                <a:solidFill>
+                  <a:schemeClr val="accent1"/>
+                </a:solidFill>
+              </a:rPr>
+              <a:t>사람이 하는 일</a:t>
+            </a:r>
+          </a:p>
+          <a:p>
+            <a:pPr algn="l"/>
+            <a:r>
+              <a:rPr lang="ko-KR" altLang="en-US" sz="950" b="0" dirty="0">
+                <a:solidFill>
+                  <a:schemeClr val="tx1"/>
+                </a:solidFill>
+              </a:rPr>
+              <a:t>  가정과 값 샘플을 보고 고친 뒤 '지표 등록'</a:t>
+            </a:r>
+          </a:p>
+        </p:txBody>
+      </p:sp>
+      <p:sp>
+        <p:nvSpPr>
+          <p:cNvPr id="15" name="화살표 2→3"/>
+          <p:cNvSpPr/>
+          <p:nvPr/>
+        </p:nvSpPr>
+        <p:spPr>
+          <a:xfrm>
+            <a:off x="7982712" y="3657600"/>
+            <a:ext cx="274320" cy="310896"/>
+          </a:xfrm>
+          <a:prstGeom prst="rightArrow">
+            <a:avLst/>
+          </a:prstGeom>
+          <a:solidFill>
+            <a:schemeClr val="accent3"/>
+          </a:solidFill>
+          <a:ln>
+            <a:noFill/>
+          </a:ln>
+          <a:effectLst/>
+        </p:spPr>
+        <p:style>
+          <a:lnRef idx="1">
+            <a:schemeClr val="accent1"/>
+          </a:lnRef>
+          <a:fillRef idx="3">
+            <a:schemeClr val="accent1"/>
+          </a:fillRef>
+          <a:effectRef idx="2">
+            <a:schemeClr val="accent1"/>
+          </a:effectRef>
+          <a:fontRef idx="minor">
+            <a:schemeClr val="lt1"/>
+          </a:fontRef>
+        </p:style>
+        <p:txBody>
+          <a:bodyPr rtlCol="0" anchor="ctr"/>
+          <a:lstStyle/>
+          <a:p>
+            <a:pPr algn="ctr"/>
+            <a:endParaRPr/>
+          </a:p>
+        </p:txBody>
+      </p:sp>
+      <p:sp>
+        <p:nvSpPr>
+          <p:cNvPr id="16" name="LLM 전송 쿼리"/>
+          <p:cNvSpPr/>
+          <p:nvPr/>
+        </p:nvSpPr>
+        <p:spPr>
+          <a:xfrm>
+            <a:off x="8357616" y="1463040"/>
+            <a:ext cx="3465576" cy="5120640"/>
+          </a:xfrm>
+          <a:prstGeom prst="roundRect">
+            <a:avLst>
+              <a:gd name="adj" fmla="val 6000"/>
+            </a:avLst>
+          </a:prstGeom>
+          <a:solidFill>
+            <a:schemeClr val="bg1"/>
+          </a:solidFill>
+          <a:ln w="9525">
+            <a:solidFill>
+              <a:schemeClr val="accent6"/>
+            </a:solidFill>
+          </a:ln>
+          <a:effectLst/>
+        </p:spPr>
+        <p:style>
+          <a:lnRef idx="1">
+            <a:schemeClr val="accent1"/>
+          </a:lnRef>
+          <a:fillRef idx="3">
+            <a:schemeClr val="accent1"/>
+          </a:fillRef>
+          <a:effectRef idx="2">
+            <a:schemeClr val="accent1"/>
+          </a:effectRef>
+          <a:fontRef idx="minor">
+            <a:schemeClr val="lt1"/>
+          </a:fontRef>
+        </p:style>
+        <p:txBody>
+          <a:bodyPr tIns="54864" bIns="54864" rtlCol="0" anchor="t"/>
+          <a:lstStyle/>
+          <a:p>
+            <a:pPr algn="ctr"/>
+            <a:endParaRPr/>
+          </a:p>
+        </p:txBody>
+      </p:sp>
+      <p:sp>
+        <p:nvSpPr>
+          <p:cNvPr id="17" name="LLM 전송 쿼리 제목"/>
+          <p:cNvSpPr/>
+          <p:nvPr/>
+        </p:nvSpPr>
+        <p:spPr>
+          <a:xfrm>
+            <a:off x="8449056" y="1554480"/>
+            <a:ext cx="3282696" cy="329184"/>
+          </a:xfrm>
+          <a:prstGeom prst="roundRect">
+            <a:avLst>
+              <a:gd name="adj" fmla="val 15000"/>
+            </a:avLst>
+          </a:prstGeom>
+          <a:solidFill>
+            <a:schemeClr val="accent1"/>
+          </a:solidFill>
+          <a:ln>
+            <a:noFill/>
+          </a:ln>
+          <a:effectLst/>
+        </p:spPr>
+        <p:style>
+          <a:lnRef idx="1">
+            <a:schemeClr val="accent1"/>
+          </a:lnRef>
+          <a:fillRef idx="3">
+            <a:schemeClr val="accent1"/>
+          </a:fillRef>
+          <a:effectRef idx="2">
+            <a:schemeClr val="accent1"/>
+          </a:effectRef>
+          <a:fontRef idx="minor">
+            <a:schemeClr val="lt1"/>
+          </a:fontRef>
+        </p:style>
+        <p:txBody>
+          <a:bodyPr wrap="square" tIns="54864" bIns="54864" rtlCol="0" anchor="ctr"/>
+          <a:lstStyle/>
+          <a:p>
+            <a:pPr algn="ctr"/>
+            <a:r>
+              <a:rPr sz="1050" b="1">
+                <a:solidFill>
+                  <a:schemeClr val="bg1"/>
+                </a:solidFill>
+              </a:rPr>
+              <a:t>초안 SQL → 검증</a:t>
+            </a:r>
+          </a:p>
+        </p:txBody>
+      </p:sp>
+      <p:sp>
+        <p:nvSpPr>
+          <p:cNvPr id="18" name="LLM 전송 쿼리 내용"/>
+          <p:cNvSpPr/>
+          <p:nvPr/>
+        </p:nvSpPr>
+        <p:spPr>
+          <a:xfrm>
+            <a:off x="8449056" y="1956816"/>
+            <a:ext cx="3282696" cy="4535424"/>
+          </a:xfrm>
+          <a:prstGeom prst="roundRect">
+            <a:avLst>
+              <a:gd name="adj" fmla="val 4000"/>
+            </a:avLst>
+          </a:prstGeom>
+          <a:solidFill>
+            <a:schemeClr val="accent4"/>
+          </a:solidFill>
+          <a:ln w="9525">
+            <a:solidFill>
+              <a:schemeClr val="accent5"/>
+            </a:solidFill>
+          </a:ln>
+          <a:effectLst/>
+        </p:spPr>
+        <p:style>
+          <a:lnRef idx="1">
+            <a:schemeClr val="accent1"/>
+          </a:lnRef>
+          <a:fillRef idx="3">
+            <a:schemeClr val="accent1"/>
+          </a:fillRef>
+          <a:effectRef idx="2">
+            <a:schemeClr val="accent1"/>
+          </a:effectRef>
+          <a:fontRef idx="minor">
+            <a:schemeClr val="lt1"/>
+          </a:fontRef>
+        </p:style>
+        <p:txBody>
+          <a:bodyPr wrap="square" tIns="54864" bIns="54864" rtlCol="0" anchor="t"/>
+          <a:lstStyle/>
+          <a:p>
+            <a:pPr algn="l"/>
+            <a:r>
+              <a:rPr lang="ko-KR" altLang="en-US" sz="850" b="1" dirty="0">
+                <a:solidFill>
+                  <a:schemeClr val="accent1"/>
+                </a:solidFill>
+              </a:rPr>
+              <a:t>LLM이 쓴 SQL (요약)</a:t>
+            </a:r>
+          </a:p>
+          <a:p>
+            <a:pPr algn="l"/>
+            <a:r>
+              <a:rPr lang="ko-KR" altLang="en-US" sz="850" b="0" dirty="0">
+                <a:solidFill>
+                  <a:schemeClr val="tx1"/>
+                </a:solidFill>
+                <a:latin typeface="Consolas"/>
+              </a:rPr>
+              <a:t>SELECT date(collect_datetime + 9h) day,</a:t>
+            </a:r>
+          </a:p>
+          <a:p>
+            <a:pPr algn="l"/>
+            <a:r>
+              <a:rPr lang="ko-KR" altLang="en-US" sz="850" b="0" dirty="0">
+                <a:solidFill>
+                  <a:schemeClr val="tx1"/>
+                </a:solidFill>
+                <a:latin typeface="Consolas"/>
+              </a:rPr>
+              <a:t>       vehicle_id,</a:t>
+            </a:r>
+          </a:p>
+          <a:p>
+            <a:pPr algn="l"/>
+            <a:r>
+              <a:rPr lang="ko-KR" altLang="en-US" sz="850" b="0" dirty="0">
+                <a:solidFill>
+                  <a:schemeClr val="tx1"/>
+                </a:solidFill>
+                <a:latin typeface="Consolas"/>
+              </a:rPr>
+              <a:t>       max(uman_reel) - min(uman_reel)</a:t>
+            </a:r>
+          </a:p>
+          <a:p>
+            <a:pPr algn="l"/>
+            <a:r>
+              <a:rPr lang="ko-KR" altLang="en-US" sz="850" b="0" dirty="0">
+                <a:solidFill>
+                  <a:schemeClr val="tx1"/>
+                </a:solidFill>
+                <a:latin typeface="Consolas"/>
+              </a:rPr>
+              <a:t>FROM bms_log</a:t>
+            </a:r>
+          </a:p>
+          <a:p>
+            <a:pPr algn="l"/>
+            <a:r>
+              <a:rPr lang="ko-KR" altLang="en-US" sz="850" b="0" dirty="0">
+                <a:solidFill>
+                  <a:schemeClr val="tx1"/>
+                </a:solidFill>
+                <a:latin typeface="Consolas"/>
+              </a:rPr>
+              <a:t>WHERE collect_datetime &gt;= '10-18' - 9h</a:t>
+            </a:r>
+          </a:p>
+          <a:p>
+            <a:pPr algn="l"/>
+            <a:r>
+              <a:rPr lang="ko-KR" altLang="en-US" sz="850" b="0" dirty="0">
+                <a:solidFill>
+                  <a:schemeClr val="tx1"/>
+                </a:solidFill>
+                <a:latin typeface="Consolas"/>
+              </a:rPr>
+              <a:t>  AND collect_datetime &lt;  '10-21' - 9h</a:t>
+            </a:r>
+          </a:p>
+          <a:p>
+            <a:pPr algn="l"/>
+            <a:r>
+              <a:rPr lang="ko-KR" altLang="en-US" sz="850" b="0" dirty="0">
+                <a:solidFill>
+                  <a:schemeClr val="tx1"/>
+                </a:solidFill>
+                <a:latin typeface="Consolas"/>
+              </a:rPr>
+              <a:t>GROUP BY date(collect_datetime + 9h),</a:t>
+            </a:r>
+          </a:p>
+          <a:p>
+            <a:pPr algn="l"/>
+            <a:r>
+              <a:rPr lang="ko-KR" altLang="en-US" sz="850" b="0" dirty="0">
+                <a:solidFill>
+                  <a:schemeClr val="tx1"/>
+                </a:solidFill>
+                <a:latin typeface="Consolas"/>
+              </a:rPr>
+              <a:t>         vehicle_id</a:t>
+            </a:r>
+          </a:p>
+          <a:p>
+            <a:pPr algn="l"/>
+            <a:endParaRPr lang="ko-KR" sz="850" dirty="0"/>
+          </a:p>
+          <a:p>
+            <a:pPr algn="l"/>
+            <a:r>
+              <a:rPr lang="ko-KR" altLang="en-US" sz="900" b="1" dirty="0">
+                <a:solidFill>
+                  <a:schemeClr val="accent1"/>
+                </a:solidFill>
+              </a:rPr>
+              <a:t>실행 전 확인</a:t>
+            </a:r>
+          </a:p>
+          <a:p>
+            <a:pPr algn="l"/>
+            <a:r>
+              <a:rPr lang="ko-KR" altLang="en-US" sz="900" b="0" dirty="0">
+                <a:solidFill>
+                  <a:schemeClr val="tx1"/>
+                </a:solidFill>
+              </a:rPr>
+              <a:t>  GROUP BY 순번 없음 (식으로 작성)</a:t>
+            </a:r>
+          </a:p>
+          <a:p>
+            <a:pPr algn="l"/>
+            <a:r>
+              <a:rPr lang="ko-KR" altLang="en-US" sz="900" b="0" dirty="0">
+                <a:solidFill>
+                  <a:schemeClr val="tx1"/>
+                </a:solidFill>
+              </a:rPr>
+              <a:t>  실행 계획에 전체 훑기 없음</a:t>
+            </a:r>
+          </a:p>
+          <a:p>
+            <a:pPr algn="l"/>
+            <a:endParaRPr lang="ko-KR" sz="900" dirty="0"/>
+          </a:p>
+          <a:p>
+            <a:pPr algn="l"/>
+            <a:r>
+              <a:rPr lang="ko-KR" altLang="en-US" sz="900" b="1" dirty="0">
+                <a:solidFill>
+                  <a:schemeClr val="accent1"/>
+                </a:solidFill>
+              </a:rPr>
+              <a:t>등록 확인</a:t>
+            </a:r>
+          </a:p>
+          <a:p>
+            <a:pPr algn="l"/>
+            <a:r>
+              <a:rPr lang="ko-KR" altLang="en-US" sz="900" b="0" dirty="0">
+                <a:solidFill>
+                  <a:schemeClr val="tx1"/>
+                </a:solidFill>
+              </a:rPr>
+              <a:t>  AST 변환 성공, 원본과 결과 같음 (209행)</a:t>
+            </a:r>
+          </a:p>
+          <a:p>
+            <a:pPr algn="l"/>
+            <a:endParaRPr lang="ko-KR" sz="900" dirty="0"/>
+          </a:p>
+          <a:p>
+            <a:pPr algn="l"/>
+            <a:r>
+              <a:rPr lang="ko-KR" altLang="en-US" sz="900" b="1" dirty="0">
+                <a:solidFill>
+                  <a:schemeClr val="accent1"/>
+                </a:solidFill>
+              </a:rPr>
+              <a:t>소요</a:t>
+            </a:r>
+          </a:p>
+          <a:p>
+            <a:pPr algn="l"/>
+            <a:r>
+              <a:rPr lang="ko-KR" altLang="en-US" sz="900" b="0" dirty="0">
+                <a:solidFill>
+                  <a:schemeClr val="tx1"/>
+                </a:solidFill>
+              </a:rPr>
+              <a:t>  1번 시도 23.8초</a:t>
+            </a:r>
+          </a:p>
+          <a:p>
+            <a:pPr algn="l"/>
+            <a:r>
+              <a:rPr lang="ko-KR" altLang="en-US" sz="900" b="0" dirty="0">
+                <a:solidFill>
+                  <a:schemeClr val="tx1"/>
+                </a:solidFill>
+              </a:rPr>
+              <a:t>  LLM 20.8초, 토큰 3,671 + 2,250</a:t>
+            </a:r>
+          </a:p>
+        </p:txBody>
+      </p:sp>
+    </p:spTree>
+    <p:extLst>
+      <p:ext uri="{BB962C8B-B14F-4D97-AF65-F5344CB8AC3E}">
+        <p14:creationId xmlns:p14="http://schemas.microsoft.com/office/powerpoint/2010/main" val="638393710"/>
       </p:ext>
     </p:extLst>
   </p:cSld>
@@ -36291,7 +39816,7 @@
                   <a:schemeClr val="tx1"/>
                 </a:solidFill>
               </a:rPr>
-              <a:t>'지표 등록이 필요합니다'가 나오면 해당 계산을 지표로 등록</a:t>
+              <a:t>'지표 등록이 필요합니다'가 나오면 LLM 초안을 확인하고 지표로 등록 (8장)</a:t>
             </a:r>
           </a:p>
           <a:p>

--- a/docs/NL2SQL-메타정보-설계.pptx
+++ b/docs/NL2SQL-메타정보-설계.pptx
@@ -5,7 +5,7 @@
     <p:sldMasterId id="2147483648" r:id="rId1"/>
   </p:sldMasterIdLst>
   <p:notesMasterIdLst>
-    <p:notesMasterId r:id="rId19"/>
+    <p:notesMasterId r:id="rId21"/>
   </p:notesMasterIdLst>
   <p:sldIdLst>
     <p:sldId id="262" r:id="rId2"/>
@@ -25,8 +25,8 @@
     <p:sldId id="261" r:id="rId16"/>
     <p:sldId id="271" r:id="rId17"/>
     <p:sldId id="272" r:id="rId18"/>
-    <p:sldId id="273" r:id="rId26"/>
-    <p:sldId id="274" r:id="rId27"/>
+    <p:sldId id="273" r:id="rId19"/>
+    <p:sldId id="274" r:id="rId20"/>
   </p:sldIdLst>
   <p:sldSz cx="12192000" cy="6858000"/>
   <p:notesSz cx="6858000" cy="12192000"/>
@@ -144,6 +144,8 @@
             <p14:sldId id="261"/>
             <p14:sldId id="271"/>
             <p14:sldId id="272"/>
+            <p14:sldId id="273"/>
+            <p14:sldId id="274"/>
           </p14:sldIdLst>
         </p14:section>
       </p14:sectionLst>
@@ -1108,7 +1110,7 @@
           </a:prstGeom>
           <a:extLst>
             <a:ext uri="{C572A759-6A51-4108-AA02-DFA0A04FC94B}">
-              <ma14:wrappingTextBoxFlag xmlns="" xmlns:ma14="http://schemas.microsoft.com/office/mac/drawingml/2011/main" val="0"/>
+              <ma14:wrappingTextBoxFlag xmlns:ma14="http://schemas.microsoft.com/office/mac/drawingml/2011/main" xmlns="" val="0"/>
             </a:ext>
           </a:extLst>
         </p:spPr>
@@ -1314,7 +1316,7 @@
           </a:prstGeom>
           <a:extLst>
             <a:ext uri="{C572A759-6A51-4108-AA02-DFA0A04FC94B}">
-              <ma14:wrappingTextBoxFlag xmlns="" xmlns:ma14="http://schemas.microsoft.com/office/mac/drawingml/2011/main" val="0"/>
+              <ma14:wrappingTextBoxFlag xmlns:ma14="http://schemas.microsoft.com/office/mac/drawingml/2011/main" xmlns="" val="0"/>
             </a:ext>
           </a:extLst>
         </p:spPr>
@@ -30398,8 +30400,37 @@
                   <a:schemeClr val="tx1"/>
                 </a:solidFill>
               </a:rPr>
-              <a:t>  테이블 선택 응답에 missing 추가</a:t>
-            </a:r>
+              <a:t>  테이블 선택 질문응답에 </a:t>
+            </a:r>
+            <a:r>
+              <a:rPr lang="ko-KR" altLang="en-US" sz="1000" b="0" dirty="0" err="1">
+                <a:solidFill>
+                  <a:schemeClr val="tx1"/>
+                </a:solidFill>
+              </a:rPr>
+              <a:t>missing</a:t>
+            </a:r>
+            <a:r>
+              <a:rPr lang="ko-KR" altLang="en-US" sz="1000" b="0" dirty="0">
+                <a:solidFill>
+                  <a:schemeClr val="tx1"/>
+                </a:solidFill>
+              </a:rPr>
+              <a:t> 이 전달되면 </a:t>
+            </a:r>
+            <a:r>
+              <a:rPr lang="en-US" altLang="ko-KR" sz="1000" b="0" dirty="0">
+                <a:solidFill>
+                  <a:schemeClr val="tx1"/>
+                </a:solidFill>
+              </a:rPr>
+              <a:t>:</a:t>
+            </a:r>
+            <a:endParaRPr lang="ko-KR" altLang="en-US" sz="1000" b="0" dirty="0">
+              <a:solidFill>
+                <a:schemeClr val="tx1"/>
+              </a:solidFill>
+            </a:endParaRPr>
           </a:p>
           <a:p>
             <a:pPr algn="l"/>
@@ -30424,7 +30455,7 @@
                   <a:schemeClr val="accent1"/>
                 </a:solidFill>
               </a:rPr>
-              <a:t>2. 값 샘플 조회</a:t>
+              <a:t>2. 값 샘플 데이터 조회</a:t>
             </a:r>
           </a:p>
           <a:p>
@@ -30437,6 +30468,106 @@
               </a:rPr>
               <a:t>  인덱스를 타는 조회만, 읽기 전용</a:t>
             </a:r>
+            <a:endParaRPr lang="en-US" altLang="ko-KR" sz="1000" b="0" dirty="0">
+              <a:solidFill>
+                <a:schemeClr val="tx1"/>
+              </a:solidFill>
+            </a:endParaRPr>
+          </a:p>
+          <a:p>
+            <a:pPr algn="l"/>
+            <a:r>
+              <a:rPr lang="en-US" altLang="ko-KR" sz="1000" dirty="0">
+                <a:solidFill>
+                  <a:schemeClr val="tx1"/>
+                </a:solidFill>
+              </a:rPr>
+              <a:t>  </a:t>
+            </a:r>
+            <a:r>
+              <a:rPr lang="ko-KR" altLang="en-US" sz="1000" dirty="0">
+                <a:solidFill>
+                  <a:schemeClr val="tx1"/>
+                </a:solidFill>
+              </a:rPr>
+              <a:t>샘플 데이터 </a:t>
+            </a:r>
+            <a:r>
+              <a:rPr lang="en-US" altLang="ko-KR" sz="1000" dirty="0">
+                <a:solidFill>
+                  <a:schemeClr val="tx1"/>
+                </a:solidFill>
+              </a:rPr>
+              <a:t>3</a:t>
+            </a:r>
+            <a:r>
+              <a:rPr lang="ko-KR" altLang="en-US" sz="1000" dirty="0">
+                <a:solidFill>
+                  <a:schemeClr val="tx1"/>
+                </a:solidFill>
+              </a:rPr>
+              <a:t>일치 하루 최초</a:t>
+            </a:r>
+            <a:r>
+              <a:rPr lang="en-US" altLang="ko-KR" sz="1000" dirty="0">
+                <a:solidFill>
+                  <a:schemeClr val="tx1"/>
+                </a:solidFill>
+              </a:rPr>
+              <a:t>/</a:t>
+            </a:r>
+            <a:r>
+              <a:rPr lang="ko-KR" altLang="en-US" sz="1000" dirty="0">
+                <a:solidFill>
+                  <a:schemeClr val="tx1"/>
+                </a:solidFill>
+              </a:rPr>
+              <a:t>마지막 데이터 조회  </a:t>
+            </a:r>
+            <a:br>
+              <a:rPr lang="en-US" altLang="ko-KR" sz="1000" dirty="0">
+                <a:solidFill>
+                  <a:schemeClr val="tx1"/>
+                </a:solidFill>
+              </a:rPr>
+            </a:br>
+            <a:r>
+              <a:rPr lang="en-US" altLang="ko-KR" sz="1000" dirty="0">
+                <a:solidFill>
+                  <a:schemeClr val="tx1"/>
+                </a:solidFill>
+              </a:rPr>
+              <a:t>  </a:t>
+            </a:r>
+            <a:r>
+              <a:rPr lang="ko-KR" altLang="en-US" sz="1000" dirty="0">
+                <a:solidFill>
+                  <a:schemeClr val="tx1"/>
+                </a:solidFill>
+              </a:rPr>
+              <a:t>최근 데이터 </a:t>
+            </a:r>
+            <a:r>
+              <a:rPr lang="en-US" altLang="ko-KR" sz="1000" dirty="0">
+                <a:solidFill>
+                  <a:schemeClr val="tx1"/>
+                </a:solidFill>
+              </a:rPr>
+              <a:t>10</a:t>
+            </a:r>
+            <a:r>
+              <a:rPr lang="ko-KR" altLang="en-US" sz="1000" dirty="0">
+                <a:solidFill>
+                  <a:schemeClr val="tx1"/>
+                </a:solidFill>
+              </a:rPr>
+              <a:t>개 조회</a:t>
+            </a:r>
+            <a:endParaRPr lang="ko-KR" altLang="en-US" sz="1000" b="0" dirty="0">
+              <a:solidFill>
+                <a:schemeClr val="tx1"/>
+              </a:solidFill>
+            </a:endParaRPr>
           </a:p>
           <a:p>
             <a:pPr algn="l"/>
@@ -30461,7 +30592,23 @@
                   <a:schemeClr val="tx1"/>
                 </a:solidFill>
               </a:rPr>
-              <a:t>  [송신] 컬럼, 인덱스, 지표 SQL, 값 샘플</a:t>
+              <a:t>  [송신] 컬럼, 인덱스, </a:t>
+            </a:r>
+            <a:r>
+              <a:rPr lang="ko-KR" altLang="en-US" sz="1000" b="0" dirty="0">
+                <a:solidFill>
+                  <a:srgbClr val="FF0000"/>
+                </a:solidFill>
+              </a:rPr>
+              <a:t>지표 SQL</a:t>
+            </a:r>
+            <a:r>
+              <a:rPr lang="ko-KR" altLang="en-US" sz="1000" b="0" dirty="0">
+                <a:solidFill>
+                  <a:schemeClr val="tx1"/>
+                </a:solidFill>
+              </a:rPr>
+              <a:t>, 샘플 값</a:t>
             </a:r>
           </a:p>
           <a:p>
@@ -30472,7 +30619,15 @@
                   <a:schemeClr val="tx1"/>
                 </a:solidFill>
               </a:rPr>
-              <a:t>  [수신] SQL, 이름, 같은 말, 설명, 확인할 가정</a:t>
+              <a:t>  [수신] SQL, 이름, 같은 말, 설명, </a:t>
+            </a:r>
+            <a:r>
+              <a:rPr lang="ko-KR" altLang="en-US" sz="1000" b="0" dirty="0">
+                <a:solidFill>
+                  <a:srgbClr val="FF0000"/>
+                </a:solidFill>
+              </a:rPr>
+              <a:t>생성근거</a:t>
             </a:r>
           </a:p>
           <a:p>
@@ -30498,19 +30653,13 @@
                   <a:schemeClr val="tx1"/>
                 </a:solidFill>
               </a:rPr>
-              <a:t>  GROUP BY 순번, 큰 테이블 전체 훑기</a:t>
-            </a:r>
-          </a:p>
-          <a:p>
-            <a:pPr algn="l"/>
-            <a:r>
-              <a:rPr lang="ko-KR" altLang="en-US" sz="1000" b="0" dirty="0">
-                <a:solidFill>
-                  <a:schemeClr val="tx1"/>
-                </a:solidFill>
-              </a:rPr>
-              <a:t>  → 실행하지 않고 고칠 점을 붙여 재요청</a:t>
-            </a:r>
+              <a:t>  문법 확인</a:t>
+            </a:r>
+            <a:endParaRPr lang="en-US" altLang="ko-KR" sz="1000" b="0" dirty="0">
+              <a:solidFill>
+                <a:schemeClr val="tx1"/>
+              </a:solidFill>
+            </a:endParaRPr>
           </a:p>
           <a:p>
             <a:pPr algn="l"/>
@@ -31210,14 +31359,14 @@
           <p:nvPr>
             <p:extLst>
               <p:ext uri="{D42A27DB-BD31-4B8C-83A1-F6EECF244321}">
-                <p14:modId xmlns:p14="http://schemas.microsoft.com/office/powerpoint/2010/main" val="1335705477"/>
+                <p14:modId xmlns:p14="http://schemas.microsoft.com/office/powerpoint/2010/main" val="2179373833"/>
               </p:ext>
             </p:extLst>
           </p:nvPr>
         </p:nvGraphicFramePr>
         <p:xfrm>
           <a:off x="457200" y="2249424"/>
-          <a:ext cx="3703319" cy="1097280"/>
+          <a:ext cx="3703319" cy="1920240"/>
         </p:xfrm>
         <a:graphic>
           <a:graphicData uri="http://schemas.openxmlformats.org/drawingml/2006/table">
@@ -31427,14 +31576,6 @@
                     <a:bodyPr/>
                     <a:lstStyle/>
                     <a:p>
-                      <a:r>
-                        <a:rPr sz="750">
-                          <a:solidFill>
-                            <a:schemeClr val="tx1"/>
-                          </a:solidFill>
-                        </a:rPr>
-                        <a:t/>
-                      </a:r>
                       <a:endParaRPr sz="750" dirty="0"/>
                     </a:p>
                   </a:txBody>
@@ -31524,14 +31665,13 @@
                     <a:lstStyle/>
                     <a:p>
                       <a:r>
-                        <a:rPr sz="750">
-                          <a:solidFill>
-                            <a:schemeClr val="tx1"/>
+                        <a:rPr sz="750" dirty="0">
+                          <a:solidFill>
+                            <a:srgbClr val="FF0000"/>
                           </a:solidFill>
                         </a:rPr>
                         <a:t>+5.0</a:t>
                       </a:r>
-                      <a:endParaRPr sz="750"/>
                     </a:p>
                   </a:txBody>
                   <a:tcPr marL="36576" marR="36576" marT="13716" marB="13716" anchor="ctr">
@@ -31620,14 +31760,22 @@
                     <a:lstStyle/>
                     <a:p>
                       <a:r>
-                        <a:rPr sz="750">
-                          <a:solidFill>
-                            <a:schemeClr val="tx1"/>
+                        <a:rPr sz="750" dirty="0" err="1">
+                          <a:solidFill>
+                            <a:schemeClr val="bg2">
+                              <a:lumMod val="50000"/>
+                            </a:schemeClr>
                           </a:solidFill>
                         </a:rPr>
                         <a:t>이어짐</a:t>
                       </a:r>
-                      <a:endParaRPr sz="750" dirty="0"/>
+                      <a:endParaRPr sz="750" dirty="0">
+                        <a:solidFill>
+                          <a:schemeClr val="bg2">
+                            <a:lumMod val="50000"/>
+                          </a:schemeClr>
+                        </a:solidFill>
+                      </a:endParaRPr>
                     </a:p>
                   </a:txBody>
                   <a:tcPr marL="36576" marR="36576" marT="13716" marB="13716" anchor="ctr">
@@ -31716,14 +31864,13 @@
                     <a:lstStyle/>
                     <a:p>
                       <a:r>
-                        <a:rPr sz="750">
-                          <a:solidFill>
-                            <a:schemeClr val="tx1"/>
+                        <a:rPr sz="750" dirty="0">
+                          <a:solidFill>
+                            <a:srgbClr val="FF0000"/>
                           </a:solidFill>
                         </a:rPr>
                         <a:t>+2.8</a:t>
                       </a:r>
-                      <a:endParaRPr sz="750"/>
                     </a:p>
                   </a:txBody>
                   <a:tcPr marL="36576" marR="36576" marT="13716" marB="13716" anchor="ctr">
@@ -31734,7 +31881,7 @@
                 </a:tc>
                 <a:extLst>
                   <a:ext uri="{0D108BD9-81ED-4DB2-BD59-A6C34878D82A}">
-                    <a16:rowId xmlns:a16="http://schemas.microsoft.com/office/drawing/2014/main" val="10002"/>
+                    <a16:rowId xmlns:a16="http://schemas.microsoft.com/office/drawing/2014/main" val="3589373249"/>
                   </a:ext>
                 </a:extLst>
               </a:tr>
@@ -31812,14 +31959,22 @@
                     <a:lstStyle/>
                     <a:p>
                       <a:r>
-                        <a:rPr sz="750">
-                          <a:solidFill>
-                            <a:schemeClr val="tx1"/>
+                        <a:rPr sz="750" dirty="0" err="1">
+                          <a:solidFill>
+                            <a:schemeClr val="bg2">
+                              <a:lumMod val="50000"/>
+                            </a:schemeClr>
                           </a:solidFill>
                         </a:rPr>
                         <a:t>이어짐</a:t>
                       </a:r>
-                      <a:endParaRPr sz="750" dirty="0"/>
+                      <a:endParaRPr sz="750" dirty="0">
+                        <a:solidFill>
+                          <a:schemeClr val="bg2">
+                            <a:lumMod val="50000"/>
+                          </a:schemeClr>
+                        </a:solidFill>
+                      </a:endParaRPr>
                     </a:p>
                   </a:txBody>
                   <a:tcPr marL="36576" marR="36576" marT="13716" marB="13716" anchor="ctr">
@@ -31830,7 +31985,7 @@
                 </a:tc>
                 <a:extLst>
                   <a:ext uri="{0D108BD9-81ED-4DB2-BD59-A6C34878D82A}">
-                    <a16:rowId xmlns:a16="http://schemas.microsoft.com/office/drawing/2014/main" val="10001"/>
+                    <a16:rowId xmlns:a16="http://schemas.microsoft.com/office/drawing/2014/main" val="1534971878"/>
                   </a:ext>
                 </a:extLst>
               </a:tr>
@@ -31908,14 +32063,13 @@
                     <a:lstStyle/>
                     <a:p>
                       <a:r>
-                        <a:rPr sz="750">
-                          <a:solidFill>
-                            <a:schemeClr val="tx1"/>
+                        <a:rPr sz="750" dirty="0">
+                          <a:solidFill>
+                            <a:srgbClr val="FF0000"/>
                           </a:solidFill>
                         </a:rPr>
                         <a:t>+1.0</a:t>
                       </a:r>
-                      <a:endParaRPr sz="750"/>
                     </a:p>
                   </a:txBody>
                   <a:tcPr marL="36576" marR="36576" marT="13716" marB="13716" anchor="ctr">
@@ -31926,7 +32080,7 @@
                 </a:tc>
                 <a:extLst>
                   <a:ext uri="{0D108BD9-81ED-4DB2-BD59-A6C34878D82A}">
-                    <a16:rowId xmlns:a16="http://schemas.microsoft.com/office/drawing/2014/main" val="10002"/>
+                    <a16:rowId xmlns:a16="http://schemas.microsoft.com/office/drawing/2014/main" val="3941449391"/>
                   </a:ext>
                 </a:extLst>
               </a:tr>
@@ -32019,7 +32173,17 @@
                   <a:schemeClr val="tx1"/>
                 </a:solidFill>
               </a:rPr>
-              <a:t>날짜가 바뀌어도 값이 이어짐 (352.7 → 352.7)</a:t>
+              <a:t>날짜가 바뀌어도 값이 </a:t>
+            </a:r>
+            <a:r>
+              <a:rPr lang="ko-KR" altLang="en-US" sz="950" b="0" dirty="0">
+                <a:solidFill>
+                  <a:schemeClr val="bg2">
+                    <a:lumMod val="50000"/>
+                  </a:schemeClr>
+                </a:solidFill>
+              </a:rPr>
+              <a:t>이어짐 (352.7 → 352.7)</a:t>
             </a:r>
           </a:p>
           <a:p>
@@ -32332,13 +32496,18 @@
           <a:p>
             <a:pPr algn="l"/>
             <a:r>
-              <a:rPr lang="ko-KR" altLang="en-US" sz="950" b="1" dirty="0">
+              <a:rPr lang="ko-KR" altLang="en-US" sz="950" b="1">
                 <a:solidFill>
                   <a:schemeClr val="accent1"/>
                 </a:solidFill>
               </a:rPr>
-              <a:t>확인할 가정</a:t>
-            </a:r>
+              <a:t>지표생성 근거</a:t>
+            </a:r>
+            <a:endParaRPr lang="ko-KR" altLang="en-US" sz="950" b="1" dirty="0">
+              <a:solidFill>
+                <a:schemeClr val="accent1"/>
+              </a:solidFill>
+            </a:endParaRPr>
           </a:p>
           <a:p>
             <a:pPr algn="l"/>

--- a/docs/NL2SQL-메타정보-설계.pptx
+++ b/docs/NL2SQL-메타정보-설계.pptx
@@ -1110,7 +1110,7 @@
           </a:prstGeom>
           <a:extLst>
             <a:ext uri="{C572A759-6A51-4108-AA02-DFA0A04FC94B}">
-              <ma14:wrappingTextBoxFlag xmlns:ma14="http://schemas.microsoft.com/office/mac/drawingml/2011/main" xmlns="" val="0"/>
+              <ma14:wrappingTextBoxFlag xmlns="" xmlns:ma14="http://schemas.microsoft.com/office/mac/drawingml/2011/main" val="0"/>
             </a:ext>
           </a:extLst>
         </p:spPr>
@@ -1316,7 +1316,7 @@
           </a:prstGeom>
           <a:extLst>
             <a:ext uri="{C572A759-6A51-4108-AA02-DFA0A04FC94B}">
-              <ma14:wrappingTextBoxFlag xmlns:ma14="http://schemas.microsoft.com/office/mac/drawingml/2011/main" xmlns="" val="0"/>
+              <ma14:wrappingTextBoxFlag xmlns="" xmlns:ma14="http://schemas.microsoft.com/office/mac/drawingml/2011/main" val="0"/>
             </a:ext>
           </a:extLst>
         </p:spPr>
